--- a/artifacts/external-markdown-visual-eval/iteration-02/build/deck.pptx
+++ b/artifacts/external-markdown-visual-eval/iteration-02/build/deck.pptx
@@ -5797,37 +5797,8 @@
         </p:nvSpPr>
         <p:spPr>
           <a:xfrm>
-            <a:off x="786384" y="1956816"/>
-            <a:ext cx="32004" cy="3483864"/>
-          </a:xfrm>
-          <a:prstGeom prst="rect">
-            <a:avLst/>
-          </a:prstGeom>
-          <a:solidFill>
-            <a:srgbClr val="9E0F62">
-              <a:alpha val="80000"/>
-            </a:srgbClr>
-          </a:solidFill>
-          <a:ln w="12700">
-            <a:solidFill>
-              <a:srgbClr val="9E0F62">
-                <a:alpha val="0"/>
-              </a:srgbClr>
-            </a:solidFill>
-            <a:prstDash val="solid"/>
-          </a:ln>
-        </p:spPr>
-      </p:sp>
-      <p:sp>
-        <p:nvSpPr>
-          <p:cNvPr id="9" name="Shape 7"/>
-          <p:cNvSpPr/>
-          <p:nvPr/>
-        </p:nvSpPr>
-        <p:spPr>
-          <a:xfrm>
-            <a:off x="914400" y="1865376"/>
-            <a:ext cx="73152" cy="1024128"/>
+            <a:off x="822960" y="1554480"/>
+            <a:ext cx="4937760" cy="73152"/>
           </a:xfrm>
           <a:prstGeom prst="rect">
             <a:avLst/>
@@ -5847,41 +5818,14 @@
       </p:sp>
       <p:sp>
         <p:nvSpPr>
-          <p:cNvPr id="10" name="Shape 8"/>
-          <p:cNvSpPr/>
-          <p:nvPr/>
-        </p:nvSpPr>
-        <p:spPr>
-          <a:xfrm>
-            <a:off x="914400" y="3191256"/>
-            <a:ext cx="73152" cy="1024128"/>
-          </a:xfrm>
-          <a:prstGeom prst="rect">
-            <a:avLst/>
-          </a:prstGeom>
-          <a:solidFill>
-            <a:srgbClr val="9E0F62"/>
-          </a:solidFill>
-          <a:ln w="12700">
-            <a:solidFill>
-              <a:srgbClr val="9E0F62">
-                <a:alpha val="0"/>
-              </a:srgbClr>
-            </a:solidFill>
-            <a:prstDash val="solid"/>
-          </a:ln>
-        </p:spPr>
-      </p:sp>
-      <p:sp>
-        <p:nvSpPr>
-          <p:cNvPr id="11" name="Shape 9"/>
-          <p:cNvSpPr/>
-          <p:nvPr/>
-        </p:nvSpPr>
-        <p:spPr>
-          <a:xfrm>
-            <a:off x="914400" y="4507992"/>
-            <a:ext cx="73152" cy="1024128"/>
+          <p:cNvPr id="9" name="Shape 7"/>
+          <p:cNvSpPr/>
+          <p:nvPr/>
+        </p:nvSpPr>
+        <p:spPr>
+          <a:xfrm>
+            <a:off x="6400800" y="1554480"/>
+            <a:ext cx="4937760" cy="73152"/>
           </a:xfrm>
           <a:prstGeom prst="rect">
             <a:avLst/>
@@ -5899,207 +5843,9 @@
           </a:ln>
         </p:spPr>
       </p:sp>
-      <p:pic>
-        <p:nvPicPr>
-          <p:cNvPr id="12" name="Image 0" descr="preencoded.png">    </p:cNvPr>
-          <p:cNvPicPr>
-            <a:picLocks noChangeAspect="1"/>
-          </p:cNvPicPr>
-          <p:nvPr/>
-        </p:nvPicPr>
-        <p:blipFill>
-          <a:blip r:embed="rId1">
-            <a:extLst>
-              <a:ext uri="{96DAC541-7B7A-43D3-8B79-37D633B846F1}">
-                <asvg:svgBlip xmlns:asvg="http://schemas.microsoft.com/office/drawing/2016/SVG/main" r:embed="rId2"/>
-              </a:ext>
-            </a:extLst>
-          </a:blip>
-          <a:stretch>
-            <a:fillRect/>
-          </a:stretch>
-        </p:blipFill>
-        <p:spPr>
-          <a:xfrm>
-            <a:off x="914400" y="1865376"/>
-            <a:ext cx="10241280" cy="1024128"/>
-          </a:xfrm>
-          <a:prstGeom prst="rect">
-            <a:avLst/>
-          </a:prstGeom>
-        </p:spPr>
-      </p:pic>
-      <p:sp>
-        <p:nvSpPr>
-          <p:cNvPr id="13" name="Shape 10"/>
-          <p:cNvSpPr/>
-          <p:nvPr/>
-        </p:nvSpPr>
-        <p:spPr>
-          <a:xfrm>
-            <a:off x="914400" y="1865376"/>
-            <a:ext cx="10241280" cy="1024128"/>
-          </a:xfrm>
-          <a:prstGeom prst="rect">
-            <a:avLst/>
-          </a:prstGeom>
-          <a:solidFill>
-            <a:srgbClr val="FBF8F3">
-              <a:alpha val="0"/>
-            </a:srgbClr>
-          </a:solidFill>
-          <a:ln w="12700">
-            <a:solidFill>
-              <a:srgbClr val="C6CCC9">
-                <a:alpha val="0"/>
-              </a:srgbClr>
-            </a:solidFill>
-            <a:prstDash val="solid"/>
-          </a:ln>
-          <a:effectLst>
-            <a:outerShdw sx="100000" sy="100000" kx="0" ky="0" algn="bl" rotWithShape="0" blurRad="12700" dist="50800" dir="2700000">
-              <a:srgbClr val="000000">
-                <a:alpha val="8000"/>
-              </a:srgbClr>
-            </a:outerShdw>
-          </a:effectLst>
-        </p:spPr>
-      </p:sp>
-      <p:pic>
-        <p:nvPicPr>
-          <p:cNvPr id="14" name="Image 1" descr="preencoded.png">    </p:cNvPr>
-          <p:cNvPicPr>
-            <a:picLocks noChangeAspect="1"/>
-          </p:cNvPicPr>
-          <p:nvPr/>
-        </p:nvPicPr>
-        <p:blipFill>
-          <a:blip r:embed="rId3">
-            <a:extLst>
-              <a:ext uri="{96DAC541-7B7A-43D3-8B79-37D633B846F1}">
-                <asvg:svgBlip xmlns:asvg="http://schemas.microsoft.com/office/drawing/2016/SVG/main" r:embed="rId4"/>
-              </a:ext>
-            </a:extLst>
-          </a:blip>
-          <a:stretch>
-            <a:fillRect/>
-          </a:stretch>
-        </p:blipFill>
-        <p:spPr>
-          <a:xfrm>
-            <a:off x="914400" y="3191256"/>
-            <a:ext cx="10241280" cy="1024128"/>
-          </a:xfrm>
-          <a:prstGeom prst="rect">
-            <a:avLst/>
-          </a:prstGeom>
-        </p:spPr>
-      </p:pic>
-      <p:sp>
-        <p:nvSpPr>
-          <p:cNvPr id="15" name="Shape 11"/>
-          <p:cNvSpPr/>
-          <p:nvPr/>
-        </p:nvSpPr>
-        <p:spPr>
-          <a:xfrm>
-            <a:off x="914400" y="3191256"/>
-            <a:ext cx="10241280" cy="1024128"/>
-          </a:xfrm>
-          <a:prstGeom prst="rect">
-            <a:avLst/>
-          </a:prstGeom>
-          <a:solidFill>
-            <a:srgbClr val="FBF8F3">
-              <a:alpha val="0"/>
-            </a:srgbClr>
-          </a:solidFill>
-          <a:ln w="12700">
-            <a:solidFill>
-              <a:srgbClr val="C6CCC9">
-                <a:alpha val="0"/>
-              </a:srgbClr>
-            </a:solidFill>
-            <a:prstDash val="solid"/>
-          </a:ln>
-          <a:effectLst>
-            <a:outerShdw sx="100000" sy="100000" kx="0" ky="0" algn="bl" rotWithShape="0" blurRad="12700" dist="50800" dir="2700000">
-              <a:srgbClr val="000000">
-                <a:alpha val="8000"/>
-              </a:srgbClr>
-            </a:outerShdw>
-          </a:effectLst>
-        </p:spPr>
-      </p:sp>
-      <p:pic>
-        <p:nvPicPr>
-          <p:cNvPr id="16" name="Image 2" descr="preencoded.png">    </p:cNvPr>
-          <p:cNvPicPr>
-            <a:picLocks noChangeAspect="1"/>
-          </p:cNvPicPr>
-          <p:nvPr/>
-        </p:nvPicPr>
-        <p:blipFill>
-          <a:blip r:embed="rId5">
-            <a:extLst>
-              <a:ext uri="{96DAC541-7B7A-43D3-8B79-37D633B846F1}">
-                <asvg:svgBlip xmlns:asvg="http://schemas.microsoft.com/office/drawing/2016/SVG/main" r:embed="rId6"/>
-              </a:ext>
-            </a:extLst>
-          </a:blip>
-          <a:stretch>
-            <a:fillRect/>
-          </a:stretch>
-        </p:blipFill>
-        <p:spPr>
-          <a:xfrm>
-            <a:off x="914400" y="4507992"/>
-            <a:ext cx="10241280" cy="1024128"/>
-          </a:xfrm>
-          <a:prstGeom prst="rect">
-            <a:avLst/>
-          </a:prstGeom>
-        </p:spPr>
-      </p:pic>
-      <p:sp>
-        <p:nvSpPr>
-          <p:cNvPr id="17" name="Shape 12"/>
-          <p:cNvSpPr/>
-          <p:nvPr/>
-        </p:nvSpPr>
-        <p:spPr>
-          <a:xfrm>
-            <a:off x="914400" y="4507992"/>
-            <a:ext cx="10241280" cy="1024128"/>
-          </a:xfrm>
-          <a:prstGeom prst="rect">
-            <a:avLst/>
-          </a:prstGeom>
-          <a:solidFill>
-            <a:srgbClr val="FBF8F3">
-              <a:alpha val="0"/>
-            </a:srgbClr>
-          </a:solidFill>
-          <a:ln w="12700">
-            <a:solidFill>
-              <a:srgbClr val="C6CCC9">
-                <a:alpha val="0"/>
-              </a:srgbClr>
-            </a:solidFill>
-            <a:prstDash val="solid"/>
-          </a:ln>
-          <a:effectLst>
-            <a:outerShdw sx="100000" sy="100000" kx="0" ky="0" algn="bl" rotWithShape="0" blurRad="12700" dist="50800" dir="2700000">
-              <a:srgbClr val="000000">
-                <a:alpha val="8000"/>
-              </a:srgbClr>
-            </a:outerShdw>
-          </a:effectLst>
-        </p:spPr>
-      </p:sp>
-      <p:sp>
-        <p:nvSpPr>
-          <p:cNvPr id="18" name="Text 13"/>
+      <p:sp>
+        <p:nvSpPr>
+          <p:cNvPr id="10" name="Text 8"/>
           <p:cNvSpPr txBox="1"/>
           <p:nvPr/>
         </p:nvSpPr>
@@ -6141,71 +5887,14 @@
       </p:sp>
       <p:sp>
         <p:nvSpPr>
-          <p:cNvPr id="19" name="Shape 14"/>
-          <p:cNvSpPr/>
-          <p:nvPr/>
-        </p:nvSpPr>
-        <p:spPr>
-          <a:xfrm>
-            <a:off x="1097280" y="2140428"/>
-            <a:ext cx="474025" cy="474025"/>
-          </a:xfrm>
-          <a:prstGeom prst="roundRect">
-            <a:avLst>
-              <a:gd name="adj" fmla="val 7716"/>
-            </a:avLst>
-          </a:prstGeom>
-          <a:solidFill>
-            <a:srgbClr val="F8F4EF"/>
-          </a:solidFill>
-          <a:ln w="12700">
-            <a:solidFill>
-              <a:srgbClr val="C6CCC9"/>
-            </a:solidFill>
-            <a:prstDash val="solid"/>
-          </a:ln>
-        </p:spPr>
-      </p:sp>
-      <p:pic>
-        <p:nvPicPr>
-          <p:cNvPr id="20" name="Image 3" descr="article icon from tabler-icons (MIT)">    </p:cNvPr>
-          <p:cNvPicPr>
-            <a:picLocks noChangeAspect="1"/>
-          </p:cNvPicPr>
-          <p:nvPr/>
-        </p:nvPicPr>
-        <p:blipFill>
-          <a:blip r:embed="rId7">
-            <a:extLst>
-              <a:ext uri="{96DAC541-7B7A-43D3-8B79-37D633B846F1}">
-                <asvg:svgBlip xmlns:asvg="http://schemas.microsoft.com/office/drawing/2016/SVG/main" r:embed="rId8"/>
-              </a:ext>
-            </a:extLst>
-          </a:blip>
-          <a:stretch>
-            <a:fillRect/>
-          </a:stretch>
-        </p:blipFill>
-        <p:spPr>
-          <a:xfrm>
-            <a:off x="1170432" y="2213580"/>
-            <a:ext cx="327721" cy="327721"/>
-          </a:xfrm>
-          <a:prstGeom prst="rect">
-            <a:avLst/>
-          </a:prstGeom>
-        </p:spPr>
-      </p:pic>
-      <p:sp>
-        <p:nvSpPr>
-          <p:cNvPr id="21" name="Text 15"/>
+          <p:cNvPr id="11" name="Text 9"/>
           <p:cNvSpPr txBox="1"/>
           <p:nvPr/>
         </p:nvSpPr>
         <p:spPr>
           <a:xfrm>
-            <a:off x="1699321" y="1996440"/>
-            <a:ext cx="9255191" cy="762000"/>
+            <a:off x="896112" y="3200400"/>
+            <a:ext cx="4791456" cy="1097280"/>
           </a:xfrm>
           <a:prstGeom prst="rect">
             <a:avLst/>
@@ -6217,7 +5906,7 @@
           <a:bodyPr wrap="square" lIns="0" tIns="25400" rIns="25400" bIns="0" rtlCol="0" anchor="ctr"/>
           <a:lstStyle/>
           <a:p>
-            <a:pPr algn="ctr" indent="0" marL="0">
+            <a:pPr algn="l" indent="0" marL="0">
               <a:lnSpc>
                 <a:spcPct val="120000"/>
               </a:lnSpc>
@@ -6232,7 +5921,7 @@
                 <a:ea typeface="Pretendard" pitchFamily="34" charset="-122"/>
                 <a:cs typeface="Pretendard" pitchFamily="34" charset="-120"/>
               </a:rPr>
-              <a:t>Create a New React App if you're looking for a powerful JavaScript toolchain.</a:t>
+              <a:t>- Create a New React App if you're looking for a powerful JavaScript toolchain.</a:t>
             </a:r>
             <a:endParaRPr lang="en-US" sz="2200" dirty="0"/>
           </a:p>
@@ -6240,71 +5929,14 @@
       </p:sp>
       <p:sp>
         <p:nvSpPr>
-          <p:cNvPr id="22" name="Shape 16"/>
-          <p:cNvSpPr/>
-          <p:nvPr/>
-        </p:nvSpPr>
-        <p:spPr>
-          <a:xfrm>
-            <a:off x="1097280" y="3466308"/>
-            <a:ext cx="474025" cy="474025"/>
-          </a:xfrm>
-          <a:prstGeom prst="roundRect">
-            <a:avLst>
-              <a:gd name="adj" fmla="val 7716"/>
-            </a:avLst>
-          </a:prstGeom>
-          <a:solidFill>
-            <a:srgbClr val="F8F4EF"/>
-          </a:solidFill>
-          <a:ln w="12700">
-            <a:solidFill>
-              <a:srgbClr val="C6CCC9"/>
-            </a:solidFill>
-            <a:prstDash val="solid"/>
-          </a:ln>
-        </p:spPr>
-      </p:sp>
-      <p:pic>
-        <p:nvPicPr>
-          <p:cNvPr id="23" name="Image 4" descr="article icon from tabler-icons (MIT)">    </p:cNvPr>
-          <p:cNvPicPr>
-            <a:picLocks noChangeAspect="1"/>
-          </p:cNvPicPr>
-          <p:nvPr/>
-        </p:nvPicPr>
-        <p:blipFill>
-          <a:blip r:embed="rId9">
-            <a:extLst>
-              <a:ext uri="{96DAC541-7B7A-43D3-8B79-37D633B846F1}">
-                <asvg:svgBlip xmlns:asvg="http://schemas.microsoft.com/office/drawing/2016/SVG/main" r:embed="rId10"/>
-              </a:ext>
-            </a:extLst>
-          </a:blip>
-          <a:stretch>
-            <a:fillRect/>
-          </a:stretch>
-        </p:blipFill>
-        <p:spPr>
-          <a:xfrm>
-            <a:off x="1170432" y="3539460"/>
-            <a:ext cx="327721" cy="327721"/>
-          </a:xfrm>
-          <a:prstGeom prst="rect">
-            <a:avLst/>
-          </a:prstGeom>
-        </p:spPr>
-      </p:pic>
-      <p:sp>
-        <p:nvSpPr>
-          <p:cNvPr id="24" name="Text 17"/>
+          <p:cNvPr id="12" name="Text 10"/>
           <p:cNvSpPr txBox="1"/>
           <p:nvPr/>
         </p:nvSpPr>
         <p:spPr>
           <a:xfrm>
-            <a:off x="1699321" y="3489960"/>
-            <a:ext cx="9255191" cy="426720"/>
+            <a:off x="6473952" y="3535680"/>
+            <a:ext cx="4791456" cy="426720"/>
           </a:xfrm>
           <a:prstGeom prst="rect">
             <a:avLst/>
@@ -6316,7 +5948,7 @@
           <a:bodyPr wrap="square" lIns="0" tIns="25400" rIns="25400" bIns="0" rtlCol="0" anchor="ctr"/>
           <a:lstStyle/>
           <a:p>
-            <a:pPr algn="ctr" indent="0" marL="0">
+            <a:pPr algn="l" indent="0" marL="0">
               <a:lnSpc>
                 <a:spcPct val="120000"/>
               </a:lnSpc>
@@ -6331,106 +5963,7 @@
                 <a:ea typeface="Pretendard" pitchFamily="34" charset="-122"/>
                 <a:cs typeface="Pretendard" pitchFamily="34" charset="-120"/>
               </a:rPr>
-              <a:t>Adding Interactivity</a:t>
-            </a:r>
-            <a:endParaRPr lang="en-US" sz="2200" dirty="0"/>
-          </a:p>
-        </p:txBody>
-      </p:sp>
-      <p:sp>
-        <p:nvSpPr>
-          <p:cNvPr id="25" name="Shape 18"/>
-          <p:cNvSpPr/>
-          <p:nvPr/>
-        </p:nvSpPr>
-        <p:spPr>
-          <a:xfrm>
-            <a:off x="1097280" y="4783044"/>
-            <a:ext cx="474025" cy="474025"/>
-          </a:xfrm>
-          <a:prstGeom prst="roundRect">
-            <a:avLst>
-              <a:gd name="adj" fmla="val 7716"/>
-            </a:avLst>
-          </a:prstGeom>
-          <a:solidFill>
-            <a:srgbClr val="F8F4EF"/>
-          </a:solidFill>
-          <a:ln w="12700">
-            <a:solidFill>
-              <a:srgbClr val="C6CCC9"/>
-            </a:solidFill>
-            <a:prstDash val="solid"/>
-          </a:ln>
-        </p:spPr>
-      </p:sp>
-      <p:pic>
-        <p:nvPicPr>
-          <p:cNvPr id="26" name="Image 5" descr="article icon from tabler-icons (MIT)">    </p:cNvPr>
-          <p:cNvPicPr>
-            <a:picLocks noChangeAspect="1"/>
-          </p:cNvPicPr>
-          <p:nvPr/>
-        </p:nvPicPr>
-        <p:blipFill>
-          <a:blip r:embed="rId11">
-            <a:extLst>
-              <a:ext uri="{96DAC541-7B7A-43D3-8B79-37D633B846F1}">
-                <asvg:svgBlip xmlns:asvg="http://schemas.microsoft.com/office/drawing/2016/SVG/main" r:embed="rId12"/>
-              </a:ext>
-            </a:extLst>
-          </a:blip>
-          <a:stretch>
-            <a:fillRect/>
-          </a:stretch>
-        </p:blipFill>
-        <p:spPr>
-          <a:xfrm>
-            <a:off x="1170432" y="4856196"/>
-            <a:ext cx="327721" cy="327721"/>
-          </a:xfrm>
-          <a:prstGeom prst="rect">
-            <a:avLst/>
-          </a:prstGeom>
-        </p:spPr>
-      </p:pic>
-      <p:sp>
-        <p:nvSpPr>
-          <p:cNvPr id="27" name="Text 19"/>
-          <p:cNvSpPr txBox="1"/>
-          <p:nvPr/>
-        </p:nvSpPr>
-        <p:spPr>
-          <a:xfrm>
-            <a:off x="1699321" y="4806696"/>
-            <a:ext cx="9255191" cy="426720"/>
-          </a:xfrm>
-          <a:prstGeom prst="rect">
-            <a:avLst/>
-          </a:prstGeom>
-          <a:noFill/>
-          <a:ln/>
-        </p:spPr>
-        <p:txBody>
-          <a:bodyPr wrap="square" lIns="0" tIns="25400" rIns="25400" bIns="0" rtlCol="0" anchor="ctr"/>
-          <a:lstStyle/>
-          <a:p>
-            <a:pPr algn="ctr" indent="0" marL="0">
-              <a:lnSpc>
-                <a:spcPct val="120000"/>
-              </a:lnSpc>
-              <a:buNone/>
-            </a:pPr>
-            <a:r>
-              <a:rPr lang="en-US" sz="2200" dirty="0">
-                <a:solidFill>
-                  <a:srgbClr val="18181B"/>
-                </a:solidFill>
-                <a:latin typeface="Pretendard" pitchFamily="34" charset="0"/>
-                <a:ea typeface="Pretendard" pitchFamily="34" charset="-122"/>
-                <a:cs typeface="Pretendard" pitchFamily="34" charset="-120"/>
-              </a:rPr>
-              <a:t>Where to Get Support</a:t>
+              <a:t>- Adding Interactivity</a:t>
             </a:r>
             <a:endParaRPr lang="en-US" sz="2200" dirty="0"/>
           </a:p>
@@ -8401,7 +7934,7 @@
                 <a:ea typeface="Pretendard" pitchFamily="34" charset="-122"/>
                 <a:cs typeface="Pretendard" pitchFamily="34" charset="-120"/>
               </a:rPr>
-              <a:t>03. vuejs/core</a:t>
+              <a:t>03. Vue</a:t>
             </a:r>
             <a:endParaRPr lang="en-US" sz="3400" dirty="0"/>
           </a:p>
@@ -9027,7 +8560,7 @@
                 <a:ea typeface="Pretendard" pitchFamily="34" charset="-122"/>
                 <a:cs typeface="Pretendard" pitchFamily="34" charset="-120"/>
               </a:rPr>
-              <a:t>03. vuejs/core (Cont. 2/2)</a:t>
+              <a:t>03. Vue (Cont. 2/2)</a:t>
             </a:r>
             <a:endParaRPr lang="en-US" sz="3400" dirty="0"/>
           </a:p>
@@ -11383,37 +10916,8 @@
         </p:nvSpPr>
         <p:spPr>
           <a:xfrm>
-            <a:off x="786384" y="1956816"/>
-            <a:ext cx="32004" cy="3483864"/>
-          </a:xfrm>
-          <a:prstGeom prst="rect">
-            <a:avLst/>
-          </a:prstGeom>
-          <a:solidFill>
-            <a:srgbClr val="9E0F62">
-              <a:alpha val="80000"/>
-            </a:srgbClr>
-          </a:solidFill>
-          <a:ln w="12700">
-            <a:solidFill>
-              <a:srgbClr val="9E0F62">
-                <a:alpha val="0"/>
-              </a:srgbClr>
-            </a:solidFill>
-            <a:prstDash val="solid"/>
-          </a:ln>
-        </p:spPr>
-      </p:sp>
-      <p:sp>
-        <p:nvSpPr>
-          <p:cNvPr id="9" name="Shape 7"/>
-          <p:cNvSpPr/>
-          <p:nvPr/>
-        </p:nvSpPr>
-        <p:spPr>
-          <a:xfrm>
-            <a:off x="914400" y="1865376"/>
-            <a:ext cx="73152" cy="1024128"/>
+            <a:off x="822960" y="1554480"/>
+            <a:ext cx="4937760" cy="73152"/>
           </a:xfrm>
           <a:prstGeom prst="rect">
             <a:avLst/>
@@ -11433,41 +10937,14 @@
       </p:sp>
       <p:sp>
         <p:nvSpPr>
-          <p:cNvPr id="10" name="Shape 8"/>
-          <p:cNvSpPr/>
-          <p:nvPr/>
-        </p:nvSpPr>
-        <p:spPr>
-          <a:xfrm>
-            <a:off x="914400" y="3191256"/>
-            <a:ext cx="73152" cy="1024128"/>
-          </a:xfrm>
-          <a:prstGeom prst="rect">
-            <a:avLst/>
-          </a:prstGeom>
-          <a:solidFill>
-            <a:srgbClr val="9E0F62"/>
-          </a:solidFill>
-          <a:ln w="12700">
-            <a:solidFill>
-              <a:srgbClr val="9E0F62">
-                <a:alpha val="0"/>
-              </a:srgbClr>
-            </a:solidFill>
-            <a:prstDash val="solid"/>
-          </a:ln>
-        </p:spPr>
-      </p:sp>
-      <p:sp>
-        <p:nvSpPr>
-          <p:cNvPr id="11" name="Shape 9"/>
-          <p:cNvSpPr/>
-          <p:nvPr/>
-        </p:nvSpPr>
-        <p:spPr>
-          <a:xfrm>
-            <a:off x="914400" y="4507992"/>
-            <a:ext cx="73152" cy="1024128"/>
+          <p:cNvPr id="9" name="Shape 7"/>
+          <p:cNvSpPr/>
+          <p:nvPr/>
+        </p:nvSpPr>
+        <p:spPr>
+          <a:xfrm>
+            <a:off x="6400800" y="1554480"/>
+            <a:ext cx="4937760" cy="73152"/>
           </a:xfrm>
           <a:prstGeom prst="rect">
             <a:avLst/>
@@ -11485,207 +10962,9 @@
           </a:ln>
         </p:spPr>
       </p:sp>
-      <p:pic>
-        <p:nvPicPr>
-          <p:cNvPr id="12" name="Image 0" descr="preencoded.png">    </p:cNvPr>
-          <p:cNvPicPr>
-            <a:picLocks noChangeAspect="1"/>
-          </p:cNvPicPr>
-          <p:nvPr/>
-        </p:nvPicPr>
-        <p:blipFill>
-          <a:blip r:embed="rId1">
-            <a:extLst>
-              <a:ext uri="{96DAC541-7B7A-43D3-8B79-37D633B846F1}">
-                <asvg:svgBlip xmlns:asvg="http://schemas.microsoft.com/office/drawing/2016/SVG/main" r:embed="rId2"/>
-              </a:ext>
-            </a:extLst>
-          </a:blip>
-          <a:stretch>
-            <a:fillRect/>
-          </a:stretch>
-        </p:blipFill>
-        <p:spPr>
-          <a:xfrm>
-            <a:off x="914400" y="1865376"/>
-            <a:ext cx="10241280" cy="1024128"/>
-          </a:xfrm>
-          <a:prstGeom prst="rect">
-            <a:avLst/>
-          </a:prstGeom>
-        </p:spPr>
-      </p:pic>
-      <p:sp>
-        <p:nvSpPr>
-          <p:cNvPr id="13" name="Shape 10"/>
-          <p:cNvSpPr/>
-          <p:nvPr/>
-        </p:nvSpPr>
-        <p:spPr>
-          <a:xfrm>
-            <a:off x="914400" y="1865376"/>
-            <a:ext cx="10241280" cy="1024128"/>
-          </a:xfrm>
-          <a:prstGeom prst="rect">
-            <a:avLst/>
-          </a:prstGeom>
-          <a:solidFill>
-            <a:srgbClr val="FBF8F3">
-              <a:alpha val="0"/>
-            </a:srgbClr>
-          </a:solidFill>
-          <a:ln w="12700">
-            <a:solidFill>
-              <a:srgbClr val="C6CCC9">
-                <a:alpha val="0"/>
-              </a:srgbClr>
-            </a:solidFill>
-            <a:prstDash val="solid"/>
-          </a:ln>
-          <a:effectLst>
-            <a:outerShdw sx="100000" sy="100000" kx="0" ky="0" algn="bl" rotWithShape="0" blurRad="12700" dist="50800" dir="2700000">
-              <a:srgbClr val="000000">
-                <a:alpha val="8000"/>
-              </a:srgbClr>
-            </a:outerShdw>
-          </a:effectLst>
-        </p:spPr>
-      </p:sp>
-      <p:pic>
-        <p:nvPicPr>
-          <p:cNvPr id="14" name="Image 1" descr="preencoded.png">    </p:cNvPr>
-          <p:cNvPicPr>
-            <a:picLocks noChangeAspect="1"/>
-          </p:cNvPicPr>
-          <p:nvPr/>
-        </p:nvPicPr>
-        <p:blipFill>
-          <a:blip r:embed="rId3">
-            <a:extLst>
-              <a:ext uri="{96DAC541-7B7A-43D3-8B79-37D633B846F1}">
-                <asvg:svgBlip xmlns:asvg="http://schemas.microsoft.com/office/drawing/2016/SVG/main" r:embed="rId4"/>
-              </a:ext>
-            </a:extLst>
-          </a:blip>
-          <a:stretch>
-            <a:fillRect/>
-          </a:stretch>
-        </p:blipFill>
-        <p:spPr>
-          <a:xfrm>
-            <a:off x="914400" y="3191256"/>
-            <a:ext cx="10241280" cy="1024128"/>
-          </a:xfrm>
-          <a:prstGeom prst="rect">
-            <a:avLst/>
-          </a:prstGeom>
-        </p:spPr>
-      </p:pic>
-      <p:sp>
-        <p:nvSpPr>
-          <p:cNvPr id="15" name="Shape 11"/>
-          <p:cNvSpPr/>
-          <p:nvPr/>
-        </p:nvSpPr>
-        <p:spPr>
-          <a:xfrm>
-            <a:off x="914400" y="3191256"/>
-            <a:ext cx="10241280" cy="1024128"/>
-          </a:xfrm>
-          <a:prstGeom prst="rect">
-            <a:avLst/>
-          </a:prstGeom>
-          <a:solidFill>
-            <a:srgbClr val="FBF8F3">
-              <a:alpha val="0"/>
-            </a:srgbClr>
-          </a:solidFill>
-          <a:ln w="12700">
-            <a:solidFill>
-              <a:srgbClr val="C6CCC9">
-                <a:alpha val="0"/>
-              </a:srgbClr>
-            </a:solidFill>
-            <a:prstDash val="solid"/>
-          </a:ln>
-          <a:effectLst>
-            <a:outerShdw sx="100000" sy="100000" kx="0" ky="0" algn="bl" rotWithShape="0" blurRad="12700" dist="50800" dir="2700000">
-              <a:srgbClr val="000000">
-                <a:alpha val="8000"/>
-              </a:srgbClr>
-            </a:outerShdw>
-          </a:effectLst>
-        </p:spPr>
-      </p:sp>
-      <p:pic>
-        <p:nvPicPr>
-          <p:cNvPr id="16" name="Image 2" descr="preencoded.png">    </p:cNvPr>
-          <p:cNvPicPr>
-            <a:picLocks noChangeAspect="1"/>
-          </p:cNvPicPr>
-          <p:nvPr/>
-        </p:nvPicPr>
-        <p:blipFill>
-          <a:blip r:embed="rId5">
-            <a:extLst>
-              <a:ext uri="{96DAC541-7B7A-43D3-8B79-37D633B846F1}">
-                <asvg:svgBlip xmlns:asvg="http://schemas.microsoft.com/office/drawing/2016/SVG/main" r:embed="rId6"/>
-              </a:ext>
-            </a:extLst>
-          </a:blip>
-          <a:stretch>
-            <a:fillRect/>
-          </a:stretch>
-        </p:blipFill>
-        <p:spPr>
-          <a:xfrm>
-            <a:off x="914400" y="4507992"/>
-            <a:ext cx="10241280" cy="1024128"/>
-          </a:xfrm>
-          <a:prstGeom prst="rect">
-            <a:avLst/>
-          </a:prstGeom>
-        </p:spPr>
-      </p:pic>
-      <p:sp>
-        <p:nvSpPr>
-          <p:cNvPr id="17" name="Shape 12"/>
-          <p:cNvSpPr/>
-          <p:nvPr/>
-        </p:nvSpPr>
-        <p:spPr>
-          <a:xfrm>
-            <a:off x="914400" y="4507992"/>
-            <a:ext cx="10241280" cy="1024128"/>
-          </a:xfrm>
-          <a:prstGeom prst="rect">
-            <a:avLst/>
-          </a:prstGeom>
-          <a:solidFill>
-            <a:srgbClr val="FBF8F3">
-              <a:alpha val="0"/>
-            </a:srgbClr>
-          </a:solidFill>
-          <a:ln w="12700">
-            <a:solidFill>
-              <a:srgbClr val="C6CCC9">
-                <a:alpha val="0"/>
-              </a:srgbClr>
-            </a:solidFill>
-            <a:prstDash val="solid"/>
-          </a:ln>
-          <a:effectLst>
-            <a:outerShdw sx="100000" sy="100000" kx="0" ky="0" algn="bl" rotWithShape="0" blurRad="12700" dist="50800" dir="2700000">
-              <a:srgbClr val="000000">
-                <a:alpha val="8000"/>
-              </a:srgbClr>
-            </a:outerShdw>
-          </a:effectLst>
-        </p:spPr>
-      </p:sp>
-      <p:sp>
-        <p:nvSpPr>
-          <p:cNvPr id="18" name="Text 13"/>
+      <p:sp>
+        <p:nvSpPr>
+          <p:cNvPr id="10" name="Text 8"/>
           <p:cNvSpPr txBox="1"/>
           <p:nvPr/>
         </p:nvSpPr>
@@ -11727,71 +11006,14 @@
       </p:sp>
       <p:sp>
         <p:nvSpPr>
-          <p:cNvPr id="19" name="Shape 14"/>
-          <p:cNvSpPr/>
-          <p:nvPr/>
-        </p:nvSpPr>
-        <p:spPr>
-          <a:xfrm>
-            <a:off x="1097280" y="2140428"/>
-            <a:ext cx="474025" cy="474025"/>
-          </a:xfrm>
-          <a:prstGeom prst="roundRect">
-            <a:avLst>
-              <a:gd name="adj" fmla="val 7716"/>
-            </a:avLst>
-          </a:prstGeom>
-          <a:solidFill>
-            <a:srgbClr val="F8F4EF"/>
-          </a:solidFill>
-          <a:ln w="12700">
-            <a:solidFill>
-              <a:srgbClr val="C6CCC9"/>
-            </a:solidFill>
-            <a:prstDash val="solid"/>
-          </a:ln>
-        </p:spPr>
-      </p:sp>
-      <p:pic>
-        <p:nvPicPr>
-          <p:cNvPr id="20" name="Image 3" descr="article icon from tabler-icons (MIT)">    </p:cNvPr>
-          <p:cNvPicPr>
-            <a:picLocks noChangeAspect="1"/>
-          </p:cNvPicPr>
-          <p:nvPr/>
-        </p:nvPicPr>
-        <p:blipFill>
-          <a:blip r:embed="rId7">
-            <a:extLst>
-              <a:ext uri="{96DAC541-7B7A-43D3-8B79-37D633B846F1}">
-                <asvg:svgBlip xmlns:asvg="http://schemas.microsoft.com/office/drawing/2016/SVG/main" r:embed="rId8"/>
-              </a:ext>
-            </a:extLst>
-          </a:blip>
-          <a:stretch>
-            <a:fillRect/>
-          </a:stretch>
-        </p:blipFill>
-        <p:spPr>
-          <a:xfrm>
-            <a:off x="1170432" y="2213580"/>
-            <a:ext cx="327721" cy="327721"/>
-          </a:xfrm>
-          <a:prstGeom prst="rect">
-            <a:avLst/>
-          </a:prstGeom>
-        </p:spPr>
-      </p:pic>
-      <p:sp>
-        <p:nvSpPr>
-          <p:cNvPr id="21" name="Text 15"/>
+          <p:cNvPr id="11" name="Text 9"/>
           <p:cNvSpPr txBox="1"/>
           <p:nvPr/>
         </p:nvSpPr>
         <p:spPr>
           <a:xfrm>
-            <a:off x="1699321" y="1957548"/>
-            <a:ext cx="9255191" cy="839785"/>
+            <a:off x="896112" y="1664208"/>
+            <a:ext cx="4791456" cy="4169664"/>
           </a:xfrm>
           <a:prstGeom prst="rect">
             <a:avLst/>
@@ -11800,7 +11022,7 @@
           <a:ln/>
         </p:spPr>
         <p:txBody>
-          <a:bodyPr wrap="square" lIns="0" tIns="25400" rIns="25400" bIns="0" rtlCol="0" anchor="ctr"/>
+          <a:bodyPr wrap="square" lIns="0" tIns="25400" rIns="25400" bIns="0" rtlCol="0" anchor="t"/>
           <a:lstStyle/>
           <a:p>
             <a:pPr algn="l" indent="0" marL="0">
@@ -11818,7 +11040,7 @@
                 <a:ea typeface="Pretendard" pitchFamily="34" charset="-122"/>
                 <a:cs typeface="Pretendard" pitchFamily="34" charset="-120"/>
               </a:rPr>
-              <a:t>Serious regressions from 5.9 (these must </a:t>
+              <a:t>- Serious regressions from 5.9 (these must </a:t>
             </a:r>
             <a:pPr algn="l" indent="0" marL="0">
               <a:lnSpc>
@@ -11894,71 +11116,14 @@
       </p:sp>
       <p:sp>
         <p:nvSpPr>
-          <p:cNvPr id="22" name="Shape 16"/>
-          <p:cNvSpPr/>
-          <p:nvPr/>
-        </p:nvSpPr>
-        <p:spPr>
-          <a:xfrm>
-            <a:off x="1097280" y="3466308"/>
-            <a:ext cx="474025" cy="474025"/>
-          </a:xfrm>
-          <a:prstGeom prst="roundRect">
-            <a:avLst>
-              <a:gd name="adj" fmla="val 7716"/>
-            </a:avLst>
-          </a:prstGeom>
-          <a:solidFill>
-            <a:srgbClr val="F8F4EF"/>
-          </a:solidFill>
-          <a:ln w="12700">
-            <a:solidFill>
-              <a:srgbClr val="C6CCC9"/>
-            </a:solidFill>
-            <a:prstDash val="solid"/>
-          </a:ln>
-        </p:spPr>
-      </p:sp>
-      <p:pic>
-        <p:nvPicPr>
-          <p:cNvPr id="23" name="Image 4" descr="verified icon from tabler-icons (MIT)">    </p:cNvPr>
-          <p:cNvPicPr>
-            <a:picLocks noChangeAspect="1"/>
-          </p:cNvPicPr>
-          <p:nvPr/>
-        </p:nvPicPr>
-        <p:blipFill>
-          <a:blip r:embed="rId9">
-            <a:extLst>
-              <a:ext uri="{96DAC541-7B7A-43D3-8B79-37D633B846F1}">
-                <asvg:svgBlip xmlns:asvg="http://schemas.microsoft.com/office/drawing/2016/SVG/main" r:embed="rId10"/>
-              </a:ext>
-            </a:extLst>
-          </a:blip>
-          <a:stretch>
-            <a:fillRect/>
-          </a:stretch>
-        </p:blipFill>
-        <p:spPr>
-          <a:xfrm>
-            <a:off x="1170432" y="3539460"/>
-            <a:ext cx="327721" cy="327721"/>
-          </a:xfrm>
-          <a:prstGeom prst="rect">
-            <a:avLst/>
-          </a:prstGeom>
-        </p:spPr>
-      </p:pic>
-      <p:sp>
-        <p:nvSpPr>
-          <p:cNvPr id="24" name="Text 17"/>
+          <p:cNvPr id="12" name="Text 10"/>
           <p:cNvSpPr txBox="1"/>
           <p:nvPr/>
         </p:nvSpPr>
         <p:spPr>
           <a:xfrm>
-            <a:off x="1699321" y="3489960"/>
-            <a:ext cx="9255191" cy="426720"/>
+            <a:off x="6473952" y="3368040"/>
+            <a:ext cx="4791456" cy="762000"/>
           </a:xfrm>
           <a:prstGeom prst="rect">
             <a:avLst/>
@@ -11970,7 +11135,7 @@
           <a:bodyPr wrap="square" lIns="0" tIns="25400" rIns="25400" bIns="0" rtlCol="0" anchor="ctr"/>
           <a:lstStyle/>
           <a:p>
-            <a:pPr algn="ctr" indent="0" marL="0">
+            <a:pPr algn="l" indent="0" marL="0">
               <a:lnSpc>
                 <a:spcPct val="120000"/>
               </a:lnSpc>
@@ -11985,106 +11150,7 @@
                 <a:ea typeface="Pretendard" pitchFamily="34" charset="-122"/>
                 <a:cs typeface="Pretendard" pitchFamily="34" charset="-120"/>
               </a:rPr>
-              <a:t>Submit bugs and help us verify fixes as they are checked in.</a:t>
-            </a:r>
-            <a:endParaRPr lang="en-US" sz="2200" dirty="0"/>
-          </a:p>
-        </p:txBody>
-      </p:sp>
-      <p:sp>
-        <p:nvSpPr>
-          <p:cNvPr id="25" name="Shape 18"/>
-          <p:cNvSpPr/>
-          <p:nvPr/>
-        </p:nvSpPr>
-        <p:spPr>
-          <a:xfrm>
-            <a:off x="1097280" y="4783044"/>
-            <a:ext cx="474025" cy="474025"/>
-          </a:xfrm>
-          <a:prstGeom prst="roundRect">
-            <a:avLst>
-              <a:gd name="adj" fmla="val 7716"/>
-            </a:avLst>
-          </a:prstGeom>
-          <a:solidFill>
-            <a:srgbClr val="F8F4EF"/>
-          </a:solidFill>
-          <a:ln w="12700">
-            <a:solidFill>
-              <a:srgbClr val="C6CCC9"/>
-            </a:solidFill>
-            <a:prstDash val="solid"/>
-          </a:ln>
-        </p:spPr>
-      </p:sp>
-      <p:pic>
-        <p:nvPicPr>
-          <p:cNvPr id="26" name="Image 5" descr="code icon from tabler-icons (MIT)">    </p:cNvPr>
-          <p:cNvPicPr>
-            <a:picLocks noChangeAspect="1"/>
-          </p:cNvPicPr>
-          <p:nvPr/>
-        </p:nvPicPr>
-        <p:blipFill>
-          <a:blip r:embed="rId11">
-            <a:extLst>
-              <a:ext uri="{96DAC541-7B7A-43D3-8B79-37D633B846F1}">
-                <asvg:svgBlip xmlns:asvg="http://schemas.microsoft.com/office/drawing/2016/SVG/main" r:embed="rId12"/>
-              </a:ext>
-            </a:extLst>
-          </a:blip>
-          <a:stretch>
-            <a:fillRect/>
-          </a:stretch>
-        </p:blipFill>
-        <p:spPr>
-          <a:xfrm>
-            <a:off x="1170432" y="4856196"/>
-            <a:ext cx="327721" cy="327721"/>
-          </a:xfrm>
-          <a:prstGeom prst="rect">
-            <a:avLst/>
-          </a:prstGeom>
-        </p:spPr>
-      </p:pic>
-      <p:sp>
-        <p:nvSpPr>
-          <p:cNvPr id="27" name="Text 19"/>
-          <p:cNvSpPr txBox="1"/>
-          <p:nvPr/>
-        </p:nvSpPr>
-        <p:spPr>
-          <a:xfrm>
-            <a:off x="1699321" y="4806696"/>
-            <a:ext cx="9255191" cy="426720"/>
-          </a:xfrm>
-          <a:prstGeom prst="rect">
-            <a:avLst/>
-          </a:prstGeom>
-          <a:noFill/>
-          <a:ln/>
-        </p:spPr>
-        <p:txBody>
-          <a:bodyPr wrap="square" lIns="0" tIns="25400" rIns="25400" bIns="0" rtlCol="0" anchor="ctr"/>
-          <a:lstStyle/>
-          <a:p>
-            <a:pPr algn="ctr" indent="0" marL="0">
-              <a:lnSpc>
-                <a:spcPct val="120000"/>
-              </a:lnSpc>
-              <a:buNone/>
-            </a:pPr>
-            <a:r>
-              <a:rPr lang="en-US" sz="2200" dirty="0">
-                <a:solidFill>
-                  <a:srgbClr val="18181B"/>
-                </a:solidFill>
-                <a:latin typeface="Pretendard" pitchFamily="34" charset="0"/>
-                <a:ea typeface="Pretendard" pitchFamily="34" charset="-122"/>
-                <a:cs typeface="Pretendard" pitchFamily="34" charset="-120"/>
-              </a:rPr>
-              <a:t>Review the source code changes.</a:t>
+              <a:t>- Submit bugs and help us verify fixes as they are checked in.</a:t>
             </a:r>
             <a:endParaRPr lang="en-US" sz="2200" dirty="0"/>
           </a:p>
@@ -13340,37 +12406,8 @@
         </p:nvSpPr>
         <p:spPr>
           <a:xfrm>
-            <a:off x="786384" y="1956816"/>
-            <a:ext cx="32004" cy="3483864"/>
-          </a:xfrm>
-          <a:prstGeom prst="rect">
-            <a:avLst/>
-          </a:prstGeom>
-          <a:solidFill>
-            <a:srgbClr val="9E0F62">
-              <a:alpha val="80000"/>
-            </a:srgbClr>
-          </a:solidFill>
-          <a:ln w="12700">
-            <a:solidFill>
-              <a:srgbClr val="9E0F62">
-                <a:alpha val="0"/>
-              </a:srgbClr>
-            </a:solidFill>
-            <a:prstDash val="solid"/>
-          </a:ln>
-        </p:spPr>
-      </p:sp>
-      <p:sp>
-        <p:nvSpPr>
-          <p:cNvPr id="9" name="Shape 7"/>
-          <p:cNvSpPr/>
-          <p:nvPr/>
-        </p:nvSpPr>
-        <p:spPr>
-          <a:xfrm>
-            <a:off x="914400" y="1865376"/>
-            <a:ext cx="73152" cy="1024128"/>
+            <a:off x="822960" y="1554480"/>
+            <a:ext cx="4937760" cy="73152"/>
           </a:xfrm>
           <a:prstGeom prst="rect">
             <a:avLst/>
@@ -13390,41 +12427,14 @@
       </p:sp>
       <p:sp>
         <p:nvSpPr>
-          <p:cNvPr id="10" name="Shape 8"/>
-          <p:cNvSpPr/>
-          <p:nvPr/>
-        </p:nvSpPr>
-        <p:spPr>
-          <a:xfrm>
-            <a:off x="914400" y="3191256"/>
-            <a:ext cx="73152" cy="1024128"/>
-          </a:xfrm>
-          <a:prstGeom prst="rect">
-            <a:avLst/>
-          </a:prstGeom>
-          <a:solidFill>
-            <a:srgbClr val="9E0F62"/>
-          </a:solidFill>
-          <a:ln w="12700">
-            <a:solidFill>
-              <a:srgbClr val="9E0F62">
-                <a:alpha val="0"/>
-              </a:srgbClr>
-            </a:solidFill>
-            <a:prstDash val="solid"/>
-          </a:ln>
-        </p:spPr>
-      </p:sp>
-      <p:sp>
-        <p:nvSpPr>
-          <p:cNvPr id="11" name="Shape 9"/>
-          <p:cNvSpPr/>
-          <p:nvPr/>
-        </p:nvSpPr>
-        <p:spPr>
-          <a:xfrm>
-            <a:off x="914400" y="4507992"/>
-            <a:ext cx="73152" cy="1024128"/>
+          <p:cNvPr id="9" name="Shape 7"/>
+          <p:cNvSpPr/>
+          <p:nvPr/>
+        </p:nvSpPr>
+        <p:spPr>
+          <a:xfrm>
+            <a:off x="6400800" y="1554480"/>
+            <a:ext cx="4937760" cy="73152"/>
           </a:xfrm>
           <a:prstGeom prst="rect">
             <a:avLst/>
@@ -13442,207 +12452,9 @@
           </a:ln>
         </p:spPr>
       </p:sp>
-      <p:pic>
-        <p:nvPicPr>
-          <p:cNvPr id="12" name="Image 0" descr="preencoded.png">    </p:cNvPr>
-          <p:cNvPicPr>
-            <a:picLocks noChangeAspect="1"/>
-          </p:cNvPicPr>
-          <p:nvPr/>
-        </p:nvPicPr>
-        <p:blipFill>
-          <a:blip r:embed="rId1">
-            <a:extLst>
-              <a:ext uri="{96DAC541-7B7A-43D3-8B79-37D633B846F1}">
-                <asvg:svgBlip xmlns:asvg="http://schemas.microsoft.com/office/drawing/2016/SVG/main" r:embed="rId2"/>
-              </a:ext>
-            </a:extLst>
-          </a:blip>
-          <a:stretch>
-            <a:fillRect/>
-          </a:stretch>
-        </p:blipFill>
-        <p:spPr>
-          <a:xfrm>
-            <a:off x="914400" y="1865376"/>
-            <a:ext cx="10241280" cy="1024128"/>
-          </a:xfrm>
-          <a:prstGeom prst="rect">
-            <a:avLst/>
-          </a:prstGeom>
-        </p:spPr>
-      </p:pic>
-      <p:sp>
-        <p:nvSpPr>
-          <p:cNvPr id="13" name="Shape 10"/>
-          <p:cNvSpPr/>
-          <p:nvPr/>
-        </p:nvSpPr>
-        <p:spPr>
-          <a:xfrm>
-            <a:off x="914400" y="1865376"/>
-            <a:ext cx="10241280" cy="1024128"/>
-          </a:xfrm>
-          <a:prstGeom prst="rect">
-            <a:avLst/>
-          </a:prstGeom>
-          <a:solidFill>
-            <a:srgbClr val="FBF8F3">
-              <a:alpha val="0"/>
-            </a:srgbClr>
-          </a:solidFill>
-          <a:ln w="12700">
-            <a:solidFill>
-              <a:srgbClr val="C6CCC9">
-                <a:alpha val="0"/>
-              </a:srgbClr>
-            </a:solidFill>
-            <a:prstDash val="solid"/>
-          </a:ln>
-          <a:effectLst>
-            <a:outerShdw sx="100000" sy="100000" kx="0" ky="0" algn="bl" rotWithShape="0" blurRad="12700" dist="50800" dir="2700000">
-              <a:srgbClr val="000000">
-                <a:alpha val="8000"/>
-              </a:srgbClr>
-            </a:outerShdw>
-          </a:effectLst>
-        </p:spPr>
-      </p:sp>
-      <p:pic>
-        <p:nvPicPr>
-          <p:cNvPr id="14" name="Image 1" descr="preencoded.png">    </p:cNvPr>
-          <p:cNvPicPr>
-            <a:picLocks noChangeAspect="1"/>
-          </p:cNvPicPr>
-          <p:nvPr/>
-        </p:nvPicPr>
-        <p:blipFill>
-          <a:blip r:embed="rId3">
-            <a:extLst>
-              <a:ext uri="{96DAC541-7B7A-43D3-8B79-37D633B846F1}">
-                <asvg:svgBlip xmlns:asvg="http://schemas.microsoft.com/office/drawing/2016/SVG/main" r:embed="rId4"/>
-              </a:ext>
-            </a:extLst>
-          </a:blip>
-          <a:stretch>
-            <a:fillRect/>
-          </a:stretch>
-        </p:blipFill>
-        <p:spPr>
-          <a:xfrm>
-            <a:off x="914400" y="3191256"/>
-            <a:ext cx="10241280" cy="1024128"/>
-          </a:xfrm>
-          <a:prstGeom prst="rect">
-            <a:avLst/>
-          </a:prstGeom>
-        </p:spPr>
-      </p:pic>
-      <p:sp>
-        <p:nvSpPr>
-          <p:cNvPr id="15" name="Shape 11"/>
-          <p:cNvSpPr/>
-          <p:nvPr/>
-        </p:nvSpPr>
-        <p:spPr>
-          <a:xfrm>
-            <a:off x="914400" y="3191256"/>
-            <a:ext cx="10241280" cy="1024128"/>
-          </a:xfrm>
-          <a:prstGeom prst="rect">
-            <a:avLst/>
-          </a:prstGeom>
-          <a:solidFill>
-            <a:srgbClr val="FBF8F3">
-              <a:alpha val="0"/>
-            </a:srgbClr>
-          </a:solidFill>
-          <a:ln w="12700">
-            <a:solidFill>
-              <a:srgbClr val="C6CCC9">
-                <a:alpha val="0"/>
-              </a:srgbClr>
-            </a:solidFill>
-            <a:prstDash val="solid"/>
-          </a:ln>
-          <a:effectLst>
-            <a:outerShdw sx="100000" sy="100000" kx="0" ky="0" algn="bl" rotWithShape="0" blurRad="12700" dist="50800" dir="2700000">
-              <a:srgbClr val="000000">
-                <a:alpha val="8000"/>
-              </a:srgbClr>
-            </a:outerShdw>
-          </a:effectLst>
-        </p:spPr>
-      </p:sp>
-      <p:pic>
-        <p:nvPicPr>
-          <p:cNvPr id="16" name="Image 2" descr="preencoded.png">    </p:cNvPr>
-          <p:cNvPicPr>
-            <a:picLocks noChangeAspect="1"/>
-          </p:cNvPicPr>
-          <p:nvPr/>
-        </p:nvPicPr>
-        <p:blipFill>
-          <a:blip r:embed="rId5">
-            <a:extLst>
-              <a:ext uri="{96DAC541-7B7A-43D3-8B79-37D633B846F1}">
-                <asvg:svgBlip xmlns:asvg="http://schemas.microsoft.com/office/drawing/2016/SVG/main" r:embed="rId6"/>
-              </a:ext>
-            </a:extLst>
-          </a:blip>
-          <a:stretch>
-            <a:fillRect/>
-          </a:stretch>
-        </p:blipFill>
-        <p:spPr>
-          <a:xfrm>
-            <a:off x="914400" y="4507992"/>
-            <a:ext cx="10241280" cy="1024128"/>
-          </a:xfrm>
-          <a:prstGeom prst="rect">
-            <a:avLst/>
-          </a:prstGeom>
-        </p:spPr>
-      </p:pic>
-      <p:sp>
-        <p:nvSpPr>
-          <p:cNvPr id="17" name="Shape 12"/>
-          <p:cNvSpPr/>
-          <p:nvPr/>
-        </p:nvSpPr>
-        <p:spPr>
-          <a:xfrm>
-            <a:off x="914400" y="4507992"/>
-            <a:ext cx="10241280" cy="1024128"/>
-          </a:xfrm>
-          <a:prstGeom prst="rect">
-            <a:avLst/>
-          </a:prstGeom>
-          <a:solidFill>
-            <a:srgbClr val="FBF8F3">
-              <a:alpha val="0"/>
-            </a:srgbClr>
-          </a:solidFill>
-          <a:ln w="12700">
-            <a:solidFill>
-              <a:srgbClr val="C6CCC9">
-                <a:alpha val="0"/>
-              </a:srgbClr>
-            </a:solidFill>
-            <a:prstDash val="solid"/>
-          </a:ln>
-          <a:effectLst>
-            <a:outerShdw sx="100000" sy="100000" kx="0" ky="0" algn="bl" rotWithShape="0" blurRad="12700" dist="50800" dir="2700000">
-              <a:srgbClr val="000000">
-                <a:alpha val="8000"/>
-              </a:srgbClr>
-            </a:outerShdw>
-          </a:effectLst>
-        </p:spPr>
-      </p:sp>
-      <p:sp>
-        <p:nvSpPr>
-          <p:cNvPr id="18" name="Text 13"/>
+      <p:sp>
+        <p:nvSpPr>
+          <p:cNvPr id="10" name="Text 8"/>
           <p:cNvSpPr txBox="1"/>
           <p:nvPr/>
         </p:nvSpPr>
@@ -13684,71 +12496,14 @@
       </p:sp>
       <p:sp>
         <p:nvSpPr>
-          <p:cNvPr id="19" name="Shape 14"/>
-          <p:cNvSpPr/>
-          <p:nvPr/>
-        </p:nvSpPr>
-        <p:spPr>
-          <a:xfrm>
-            <a:off x="1097280" y="2140428"/>
-            <a:ext cx="474025" cy="474025"/>
-          </a:xfrm>
-          <a:prstGeom prst="roundRect">
-            <a:avLst>
-              <a:gd name="adj" fmla="val 7716"/>
-            </a:avLst>
-          </a:prstGeom>
-          <a:solidFill>
-            <a:srgbClr val="F8F4EF"/>
-          </a:solidFill>
-          <a:ln w="12700">
-            <a:solidFill>
-              <a:srgbClr val="C6CCC9"/>
-            </a:solidFill>
-            <a:prstDash val="solid"/>
-          </a:ln>
-        </p:spPr>
-      </p:sp>
-      <p:pic>
-        <p:nvPicPr>
-          <p:cNvPr id="20" name="Image 3" descr="article icon from tabler-icons (MIT)">    </p:cNvPr>
-          <p:cNvPicPr>
-            <a:picLocks noChangeAspect="1"/>
-          </p:cNvPicPr>
-          <p:nvPr/>
-        </p:nvPicPr>
-        <p:blipFill>
-          <a:blip r:embed="rId7">
-            <a:extLst>
-              <a:ext uri="{96DAC541-7B7A-43D3-8B79-37D633B846F1}">
-                <asvg:svgBlip xmlns:asvg="http://schemas.microsoft.com/office/drawing/2016/SVG/main" r:embed="rId8"/>
-              </a:ext>
-            </a:extLst>
-          </a:blip>
-          <a:stretch>
-            <a:fillRect/>
-          </a:stretch>
-        </p:blipFill>
-        <p:spPr>
-          <a:xfrm>
-            <a:off x="1170432" y="2213580"/>
-            <a:ext cx="327721" cy="327721"/>
-          </a:xfrm>
-          <a:prstGeom prst="rect">
-            <a:avLst/>
-          </a:prstGeom>
-        </p:spPr>
-      </p:pic>
-      <p:sp>
-        <p:nvSpPr>
-          <p:cNvPr id="21" name="Text 15"/>
+          <p:cNvPr id="11" name="Text 9"/>
           <p:cNvSpPr txBox="1"/>
           <p:nvPr/>
         </p:nvSpPr>
         <p:spPr>
           <a:xfrm>
-            <a:off x="1699321" y="2164080"/>
-            <a:ext cx="9255191" cy="426720"/>
+            <a:off x="896112" y="3535680"/>
+            <a:ext cx="4791456" cy="426720"/>
           </a:xfrm>
           <a:prstGeom prst="rect">
             <a:avLst/>
@@ -13760,221 +12515,6 @@
           <a:bodyPr wrap="square" lIns="0" tIns="25400" rIns="25400" bIns="0" rtlCol="0" anchor="ctr"/>
           <a:lstStyle/>
           <a:p>
-            <a:pPr algn="ctr" indent="0" marL="0">
-              <a:lnSpc>
-                <a:spcPct val="120000"/>
-              </a:lnSpc>
-              <a:buNone/>
-            </a:pPr>
-            <a:r>
-              <a:rPr lang="en-US" sz="2200" dirty="0">
-                <a:solidFill>
-                  <a:srgbClr val="18181B"/>
-                </a:solidFill>
-                <a:latin typeface="Pretendard" pitchFamily="34" charset="0"/>
-                <a:ea typeface="Pretendard" pitchFamily="34" charset="-122"/>
-                <a:cs typeface="Pretendard" pitchFamily="34" charset="-120"/>
-              </a:rPr>
-              <a:t>Current project team members</a:t>
-            </a:r>
-            <a:endParaRPr lang="en-US" sz="2200" dirty="0"/>
-          </a:p>
-        </p:txBody>
-      </p:sp>
-      <p:sp>
-        <p:nvSpPr>
-          <p:cNvPr id="22" name="Shape 16"/>
-          <p:cNvSpPr/>
-          <p:nvPr/>
-        </p:nvSpPr>
-        <p:spPr>
-          <a:xfrm>
-            <a:off x="1097280" y="3466308"/>
-            <a:ext cx="474025" cy="474025"/>
-          </a:xfrm>
-          <a:prstGeom prst="roundRect">
-            <a:avLst>
-              <a:gd name="adj" fmla="val 7716"/>
-            </a:avLst>
-          </a:prstGeom>
-          <a:solidFill>
-            <a:srgbClr val="F8F4EF"/>
-          </a:solidFill>
-          <a:ln w="12700">
-            <a:solidFill>
-              <a:srgbClr val="C6CCC9"/>
-            </a:solidFill>
-            <a:prstDash val="solid"/>
-          </a:ln>
-        </p:spPr>
-      </p:sp>
-      <p:pic>
-        <p:nvPicPr>
-          <p:cNvPr id="23" name="Image 4" descr="github icon from simple-icons (CC0-1.0 with brand guidelines)">    </p:cNvPr>
-          <p:cNvPicPr>
-            <a:picLocks noChangeAspect="1"/>
-          </p:cNvPicPr>
-          <p:nvPr/>
-        </p:nvPicPr>
-        <p:blipFill>
-          <a:blip r:embed="rId9">
-            <a:extLst>
-              <a:ext uri="{96DAC541-7B7A-43D3-8B79-37D633B846F1}">
-                <asvg:svgBlip xmlns:asvg="http://schemas.microsoft.com/office/drawing/2016/SVG/main" r:embed="rId10"/>
-              </a:ext>
-            </a:extLst>
-          </a:blip>
-          <a:stretch>
-            <a:fillRect/>
-          </a:stretch>
-        </p:blipFill>
-        <p:spPr>
-          <a:xfrm>
-            <a:off x="1170432" y="3539460"/>
-            <a:ext cx="327721" cy="327721"/>
-          </a:xfrm>
-          <a:prstGeom prst="rect">
-            <a:avLst/>
-          </a:prstGeom>
-        </p:spPr>
-      </p:pic>
-      <p:sp>
-        <p:nvSpPr>
-          <p:cNvPr id="24" name="Text 17"/>
-          <p:cNvSpPr txBox="1"/>
-          <p:nvPr/>
-        </p:nvSpPr>
-        <p:spPr>
-          <a:xfrm>
-            <a:off x="1699321" y="3489960"/>
-            <a:ext cx="9255191" cy="426720"/>
-          </a:xfrm>
-          <a:prstGeom prst="rect">
-            <a:avLst/>
-          </a:prstGeom>
-          <a:noFill/>
-          <a:ln/>
-        </p:spPr>
-        <p:txBody>
-          <a:bodyPr wrap="square" lIns="0" tIns="25400" rIns="25400" bIns="0" rtlCol="0" anchor="ctr"/>
-          <a:lstStyle/>
-          <a:p>
-            <a:pPr algn="ctr" indent="0" marL="0">
-              <a:lnSpc>
-                <a:spcPct val="120000"/>
-              </a:lnSpc>
-              <a:buNone/>
-            </a:pPr>
-            <a:r>
-              <a:rPr lang="en-US" sz="2200" dirty="0">
-                <a:solidFill>
-                  <a:srgbClr val="18181B"/>
-                </a:solidFill>
-                <a:latin typeface="Pretendard" pitchFamily="34" charset="0"/>
-                <a:ea typeface="Pretendard" pitchFamily="34" charset="-122"/>
-                <a:cs typeface="Pretendard" pitchFamily="34" charset="-120"/>
-              </a:rPr>
-              <a:t>TSC (Technical Steering Committee)</a:t>
-            </a:r>
-            <a:endParaRPr lang="en-US" sz="2200" dirty="0"/>
-          </a:p>
-        </p:txBody>
-      </p:sp>
-      <p:sp>
-        <p:nvSpPr>
-          <p:cNvPr id="25" name="Shape 18"/>
-          <p:cNvSpPr/>
-          <p:nvPr/>
-        </p:nvSpPr>
-        <p:spPr>
-          <a:xfrm>
-            <a:off x="1097280" y="4783044"/>
-            <a:ext cx="474025" cy="474025"/>
-          </a:xfrm>
-          <a:prstGeom prst="roundRect">
-            <a:avLst>
-              <a:gd name="adj" fmla="val 7716"/>
-            </a:avLst>
-          </a:prstGeom>
-          <a:solidFill>
-            <a:srgbClr val="F8F4EF"/>
-          </a:solidFill>
-          <a:ln w="12700">
-            <a:solidFill>
-              <a:srgbClr val="C6CCC9"/>
-            </a:solidFill>
-            <a:prstDash val="solid"/>
-          </a:ln>
-        </p:spPr>
-      </p:sp>
-      <p:pic>
-        <p:nvPicPr>
-          <p:cNvPr id="26" name="Image 5" descr="code icon from tabler-icons (MIT)">    </p:cNvPr>
-          <p:cNvPicPr>
-            <a:picLocks noChangeAspect="1"/>
-          </p:cNvPicPr>
-          <p:nvPr/>
-        </p:nvPicPr>
-        <p:blipFill>
-          <a:blip r:embed="rId11">
-            <a:extLst>
-              <a:ext uri="{96DAC541-7B7A-43D3-8B79-37D633B846F1}">
-                <asvg:svgBlip xmlns:asvg="http://schemas.microsoft.com/office/drawing/2016/SVG/main" r:embed="rId12"/>
-              </a:ext>
-            </a:extLst>
-          </a:blip>
-          <a:stretch>
-            <a:fillRect/>
-          </a:stretch>
-        </p:blipFill>
-        <p:spPr>
-          <a:xfrm>
-            <a:off x="1170432" y="4856196"/>
-            <a:ext cx="327721" cy="327721"/>
-          </a:xfrm>
-          <a:prstGeom prst="rect">
-            <a:avLst/>
-          </a:prstGeom>
-        </p:spPr>
-      </p:pic>
-      <p:sp>
-        <p:nvSpPr>
-          <p:cNvPr id="27" name="Text 19"/>
-          <p:cNvSpPr txBox="1"/>
-          <p:nvPr/>
-        </p:nvSpPr>
-        <p:spPr>
-          <a:xfrm>
-            <a:off x="1699321" y="4600164"/>
-            <a:ext cx="9255191" cy="839785"/>
-          </a:xfrm>
-          <a:prstGeom prst="rect">
-            <a:avLst/>
-          </a:prstGeom>
-          <a:noFill/>
-          <a:ln/>
-        </p:spPr>
-        <p:txBody>
-          <a:bodyPr wrap="square" lIns="0" tIns="25400" rIns="25400" bIns="0" rtlCol="0" anchor="ctr"/>
-          <a:lstStyle/>
-          <a:p>
-            <a:pPr algn="l" indent="0" marL="0">
-              <a:lnSpc>
-                <a:spcPct val="120000"/>
-              </a:lnSpc>
-              <a:buNone/>
-            </a:pPr>
-            <a:r>
-              <a:rPr lang="en-US" sz="2200" b="1" dirty="0">
-                <a:solidFill>
-                  <a:srgbClr val="0F766E"/>
-                </a:solidFill>
-                <a:latin typeface="Pretendard" pitchFamily="34" charset="0"/>
-                <a:ea typeface="Pretendard" pitchFamily="34" charset="-122"/>
-                <a:cs typeface="Pretendard" pitchFamily="34" charset="-120"/>
-              </a:rPr>
-              <a:t>Current</a:t>
-            </a:r>
             <a:pPr algn="l" indent="0" marL="0">
               <a:lnSpc>
                 <a:spcPct val="120000"/>
@@ -13990,7 +12530,49 @@
                 <a:ea typeface="Pretendard" pitchFamily="34" charset="-122"/>
                 <a:cs typeface="Pretendard" pitchFamily="34" charset="-120"/>
               </a:rPr>
-              <a:t>  Under active development. Code for the Current release is in the</a:t>
+              <a:t>- Current project team members</a:t>
+            </a:r>
+            <a:endParaRPr lang="en-US" sz="2200" dirty="0"/>
+          </a:p>
+        </p:txBody>
+      </p:sp>
+      <p:sp>
+        <p:nvSpPr>
+          <p:cNvPr id="12" name="Text 10"/>
+          <p:cNvSpPr txBox="1"/>
+          <p:nvPr/>
+        </p:nvSpPr>
+        <p:spPr>
+          <a:xfrm>
+            <a:off x="6473952" y="3368040"/>
+            <a:ext cx="4791456" cy="762000"/>
+          </a:xfrm>
+          <a:prstGeom prst="rect">
+            <a:avLst/>
+          </a:prstGeom>
+          <a:noFill/>
+          <a:ln/>
+        </p:spPr>
+        <p:txBody>
+          <a:bodyPr wrap="square" lIns="0" tIns="25400" rIns="25400" bIns="0" rtlCol="0" anchor="ctr"/>
+          <a:lstStyle/>
+          <a:p>
+            <a:pPr algn="l" indent="0" marL="0">
+              <a:lnSpc>
+                <a:spcPct val="120000"/>
+              </a:lnSpc>
+              <a:buNone/>
+            </a:pPr>
+            <a:r>
+              <a:rPr lang="en-US" sz="2200" dirty="0">
+                <a:solidFill>
+                  <a:srgbClr val="18181B"/>
+                </a:solidFill>
+                <a:latin typeface="Pretendard" pitchFamily="34" charset="0"/>
+                <a:ea typeface="Pretendard" pitchFamily="34" charset="-122"/>
+                <a:cs typeface="Pretendard" pitchFamily="34" charset="-120"/>
+              </a:rPr>
+              <a:t>- TSC (Technical Steering Committee)</a:t>
             </a:r>
             <a:endParaRPr lang="en-US" sz="2200" dirty="0"/>
           </a:p>
@@ -15028,7 +13610,7 @@
                 <a:ea typeface="Pretendard" pitchFamily="34" charset="-122"/>
                 <a:cs typeface="Pretendard" pitchFamily="34" charset="-120"/>
               </a:rPr>
-              <a:t>08  03. vuejs/core</a:t>
+              <a:t>08  03. Vue</a:t>
             </a:r>
             <a:endParaRPr lang="en-US" sz="1800" dirty="0"/>
           </a:p>
@@ -16536,37 +15118,8 @@
         </p:nvSpPr>
         <p:spPr>
           <a:xfrm>
-            <a:off x="786384" y="1956816"/>
-            <a:ext cx="32004" cy="3483864"/>
-          </a:xfrm>
-          <a:prstGeom prst="rect">
-            <a:avLst/>
-          </a:prstGeom>
-          <a:solidFill>
-            <a:srgbClr val="9E0F62">
-              <a:alpha val="80000"/>
-            </a:srgbClr>
-          </a:solidFill>
-          <a:ln w="12700">
-            <a:solidFill>
-              <a:srgbClr val="9E0F62">
-                <a:alpha val="0"/>
-              </a:srgbClr>
-            </a:solidFill>
-            <a:prstDash val="solid"/>
-          </a:ln>
-        </p:spPr>
-      </p:sp>
-      <p:sp>
-        <p:nvSpPr>
-          <p:cNvPr id="9" name="Shape 7"/>
-          <p:cNvSpPr/>
-          <p:nvPr/>
-        </p:nvSpPr>
-        <p:spPr>
-          <a:xfrm>
-            <a:off x="914400" y="1865376"/>
-            <a:ext cx="73152" cy="1024128"/>
+            <a:off x="822960" y="1554480"/>
+            <a:ext cx="4937760" cy="73152"/>
           </a:xfrm>
           <a:prstGeom prst="rect">
             <a:avLst/>
@@ -16586,41 +15139,14 @@
       </p:sp>
       <p:sp>
         <p:nvSpPr>
-          <p:cNvPr id="10" name="Shape 8"/>
-          <p:cNvSpPr/>
-          <p:nvPr/>
-        </p:nvSpPr>
-        <p:spPr>
-          <a:xfrm>
-            <a:off x="914400" y="3191256"/>
-            <a:ext cx="73152" cy="1024128"/>
-          </a:xfrm>
-          <a:prstGeom prst="rect">
-            <a:avLst/>
-          </a:prstGeom>
-          <a:solidFill>
-            <a:srgbClr val="9E0F62"/>
-          </a:solidFill>
-          <a:ln w="12700">
-            <a:solidFill>
-              <a:srgbClr val="9E0F62">
-                <a:alpha val="0"/>
-              </a:srgbClr>
-            </a:solidFill>
-            <a:prstDash val="solid"/>
-          </a:ln>
-        </p:spPr>
-      </p:sp>
-      <p:sp>
-        <p:nvSpPr>
-          <p:cNvPr id="11" name="Shape 9"/>
-          <p:cNvSpPr/>
-          <p:nvPr/>
-        </p:nvSpPr>
-        <p:spPr>
-          <a:xfrm>
-            <a:off x="914400" y="4507992"/>
-            <a:ext cx="73152" cy="1024128"/>
+          <p:cNvPr id="9" name="Shape 7"/>
+          <p:cNvSpPr/>
+          <p:nvPr/>
+        </p:nvSpPr>
+        <p:spPr>
+          <a:xfrm>
+            <a:off x="6400800" y="1554480"/>
+            <a:ext cx="4937760" cy="73152"/>
           </a:xfrm>
           <a:prstGeom prst="rect">
             <a:avLst/>
@@ -16638,207 +15164,9 @@
           </a:ln>
         </p:spPr>
       </p:sp>
-      <p:pic>
-        <p:nvPicPr>
-          <p:cNvPr id="12" name="Image 0" descr="preencoded.png">    </p:cNvPr>
-          <p:cNvPicPr>
-            <a:picLocks noChangeAspect="1"/>
-          </p:cNvPicPr>
-          <p:nvPr/>
-        </p:nvPicPr>
-        <p:blipFill>
-          <a:blip r:embed="rId1">
-            <a:extLst>
-              <a:ext uri="{96DAC541-7B7A-43D3-8B79-37D633B846F1}">
-                <asvg:svgBlip xmlns:asvg="http://schemas.microsoft.com/office/drawing/2016/SVG/main" r:embed="rId2"/>
-              </a:ext>
-            </a:extLst>
-          </a:blip>
-          <a:stretch>
-            <a:fillRect/>
-          </a:stretch>
-        </p:blipFill>
-        <p:spPr>
-          <a:xfrm>
-            <a:off x="914400" y="1865376"/>
-            <a:ext cx="10241280" cy="1024128"/>
-          </a:xfrm>
-          <a:prstGeom prst="rect">
-            <a:avLst/>
-          </a:prstGeom>
-        </p:spPr>
-      </p:pic>
-      <p:sp>
-        <p:nvSpPr>
-          <p:cNvPr id="13" name="Shape 10"/>
-          <p:cNvSpPr/>
-          <p:nvPr/>
-        </p:nvSpPr>
-        <p:spPr>
-          <a:xfrm>
-            <a:off x="914400" y="1865376"/>
-            <a:ext cx="10241280" cy="1024128"/>
-          </a:xfrm>
-          <a:prstGeom prst="rect">
-            <a:avLst/>
-          </a:prstGeom>
-          <a:solidFill>
-            <a:srgbClr val="FBF8F3">
-              <a:alpha val="0"/>
-            </a:srgbClr>
-          </a:solidFill>
-          <a:ln w="12700">
-            <a:solidFill>
-              <a:srgbClr val="C6CCC9">
-                <a:alpha val="0"/>
-              </a:srgbClr>
-            </a:solidFill>
-            <a:prstDash val="solid"/>
-          </a:ln>
-          <a:effectLst>
-            <a:outerShdw sx="100000" sy="100000" kx="0" ky="0" algn="bl" rotWithShape="0" blurRad="12700" dist="50800" dir="2700000">
-              <a:srgbClr val="000000">
-                <a:alpha val="8000"/>
-              </a:srgbClr>
-            </a:outerShdw>
-          </a:effectLst>
-        </p:spPr>
-      </p:sp>
-      <p:pic>
-        <p:nvPicPr>
-          <p:cNvPr id="14" name="Image 1" descr="preencoded.png">    </p:cNvPr>
-          <p:cNvPicPr>
-            <a:picLocks noChangeAspect="1"/>
-          </p:cNvPicPr>
-          <p:nvPr/>
-        </p:nvPicPr>
-        <p:blipFill>
-          <a:blip r:embed="rId3">
-            <a:extLst>
-              <a:ext uri="{96DAC541-7B7A-43D3-8B79-37D633B846F1}">
-                <asvg:svgBlip xmlns:asvg="http://schemas.microsoft.com/office/drawing/2016/SVG/main" r:embed="rId4"/>
-              </a:ext>
-            </a:extLst>
-          </a:blip>
-          <a:stretch>
-            <a:fillRect/>
-          </a:stretch>
-        </p:blipFill>
-        <p:spPr>
-          <a:xfrm>
-            <a:off x="914400" y="3191256"/>
-            <a:ext cx="10241280" cy="1024128"/>
-          </a:xfrm>
-          <a:prstGeom prst="rect">
-            <a:avLst/>
-          </a:prstGeom>
-        </p:spPr>
-      </p:pic>
-      <p:sp>
-        <p:nvSpPr>
-          <p:cNvPr id="15" name="Shape 11"/>
-          <p:cNvSpPr/>
-          <p:nvPr/>
-        </p:nvSpPr>
-        <p:spPr>
-          <a:xfrm>
-            <a:off x="914400" y="3191256"/>
-            <a:ext cx="10241280" cy="1024128"/>
-          </a:xfrm>
-          <a:prstGeom prst="rect">
-            <a:avLst/>
-          </a:prstGeom>
-          <a:solidFill>
-            <a:srgbClr val="FBF8F3">
-              <a:alpha val="0"/>
-            </a:srgbClr>
-          </a:solidFill>
-          <a:ln w="12700">
-            <a:solidFill>
-              <a:srgbClr val="C6CCC9">
-                <a:alpha val="0"/>
-              </a:srgbClr>
-            </a:solidFill>
-            <a:prstDash val="solid"/>
-          </a:ln>
-          <a:effectLst>
-            <a:outerShdw sx="100000" sy="100000" kx="0" ky="0" algn="bl" rotWithShape="0" blurRad="12700" dist="50800" dir="2700000">
-              <a:srgbClr val="000000">
-                <a:alpha val="8000"/>
-              </a:srgbClr>
-            </a:outerShdw>
-          </a:effectLst>
-        </p:spPr>
-      </p:sp>
-      <p:pic>
-        <p:nvPicPr>
-          <p:cNvPr id="16" name="Image 2" descr="preencoded.png">    </p:cNvPr>
-          <p:cNvPicPr>
-            <a:picLocks noChangeAspect="1"/>
-          </p:cNvPicPr>
-          <p:nvPr/>
-        </p:nvPicPr>
-        <p:blipFill>
-          <a:blip r:embed="rId5">
-            <a:extLst>
-              <a:ext uri="{96DAC541-7B7A-43D3-8B79-37D633B846F1}">
-                <asvg:svgBlip xmlns:asvg="http://schemas.microsoft.com/office/drawing/2016/SVG/main" r:embed="rId6"/>
-              </a:ext>
-            </a:extLst>
-          </a:blip>
-          <a:stretch>
-            <a:fillRect/>
-          </a:stretch>
-        </p:blipFill>
-        <p:spPr>
-          <a:xfrm>
-            <a:off x="914400" y="4507992"/>
-            <a:ext cx="10241280" cy="1024128"/>
-          </a:xfrm>
-          <a:prstGeom prst="rect">
-            <a:avLst/>
-          </a:prstGeom>
-        </p:spPr>
-      </p:pic>
-      <p:sp>
-        <p:nvSpPr>
-          <p:cNvPr id="17" name="Shape 12"/>
-          <p:cNvSpPr/>
-          <p:nvPr/>
-        </p:nvSpPr>
-        <p:spPr>
-          <a:xfrm>
-            <a:off x="914400" y="4507992"/>
-            <a:ext cx="10241280" cy="1024128"/>
-          </a:xfrm>
-          <a:prstGeom prst="rect">
-            <a:avLst/>
-          </a:prstGeom>
-          <a:solidFill>
-            <a:srgbClr val="FBF8F3">
-              <a:alpha val="0"/>
-            </a:srgbClr>
-          </a:solidFill>
-          <a:ln w="12700">
-            <a:solidFill>
-              <a:srgbClr val="C6CCC9">
-                <a:alpha val="0"/>
-              </a:srgbClr>
-            </a:solidFill>
-            <a:prstDash val="solid"/>
-          </a:ln>
-          <a:effectLst>
-            <a:outerShdw sx="100000" sy="100000" kx="0" ky="0" algn="bl" rotWithShape="0" blurRad="12700" dist="50800" dir="2700000">
-              <a:srgbClr val="000000">
-                <a:alpha val="8000"/>
-              </a:srgbClr>
-            </a:outerShdw>
-          </a:effectLst>
-        </p:spPr>
-      </p:sp>
-      <p:sp>
-        <p:nvSpPr>
-          <p:cNvPr id="18" name="Text 13"/>
+      <p:sp>
+        <p:nvSpPr>
+          <p:cNvPr id="10" name="Text 8"/>
           <p:cNvSpPr txBox="1"/>
           <p:nvPr/>
         </p:nvSpPr>
@@ -16880,71 +15208,14 @@
       </p:sp>
       <p:sp>
         <p:nvSpPr>
-          <p:cNvPr id="19" name="Shape 14"/>
-          <p:cNvSpPr/>
-          <p:nvPr/>
-        </p:nvSpPr>
-        <p:spPr>
-          <a:xfrm>
-            <a:off x="1097280" y="2140428"/>
-            <a:ext cx="474025" cy="474025"/>
-          </a:xfrm>
-          <a:prstGeom prst="roundRect">
-            <a:avLst>
-              <a:gd name="adj" fmla="val 7716"/>
-            </a:avLst>
-          </a:prstGeom>
-          <a:solidFill>
-            <a:srgbClr val="F8F4EF"/>
-          </a:solidFill>
-          <a:ln w="12700">
-            <a:solidFill>
-              <a:srgbClr val="C6CCC9"/>
-            </a:solidFill>
-            <a:prstDash val="solid"/>
-          </a:ln>
-        </p:spPr>
-      </p:sp>
-      <p:pic>
-        <p:nvPicPr>
-          <p:cNvPr id="20" name="Image 3" descr="article icon from tabler-icons (MIT)">    </p:cNvPr>
-          <p:cNvPicPr>
-            <a:picLocks noChangeAspect="1"/>
-          </p:cNvPicPr>
-          <p:nvPr/>
-        </p:nvPicPr>
-        <p:blipFill>
-          <a:blip r:embed="rId7">
-            <a:extLst>
-              <a:ext uri="{96DAC541-7B7A-43D3-8B79-37D633B846F1}">
-                <asvg:svgBlip xmlns:asvg="http://schemas.microsoft.com/office/drawing/2016/SVG/main" r:embed="rId8"/>
-              </a:ext>
-            </a:extLst>
-          </a:blip>
-          <a:stretch>
-            <a:fillRect/>
-          </a:stretch>
-        </p:blipFill>
-        <p:spPr>
-          <a:xfrm>
-            <a:off x="1170432" y="2213580"/>
-            <a:ext cx="327721" cy="327721"/>
-          </a:xfrm>
-          <a:prstGeom prst="rect">
-            <a:avLst/>
-          </a:prstGeom>
-        </p:spPr>
-      </p:pic>
-      <p:sp>
-        <p:nvSpPr>
-          <p:cNvPr id="21" name="Text 15"/>
+          <p:cNvPr id="11" name="Text 9"/>
           <p:cNvSpPr txBox="1"/>
           <p:nvPr/>
         </p:nvSpPr>
         <p:spPr>
           <a:xfrm>
-            <a:off x="1699321" y="2164080"/>
-            <a:ext cx="9255191" cy="426720"/>
+            <a:off x="896112" y="3535680"/>
+            <a:ext cx="4791456" cy="426720"/>
           </a:xfrm>
           <a:prstGeom prst="rect">
             <a:avLst/>
@@ -16956,7 +15227,7 @@
           <a:bodyPr wrap="square" lIns="0" tIns="25400" rIns="25400" bIns="0" rtlCol="0" anchor="ctr"/>
           <a:lstStyle/>
           <a:p>
-            <a:pPr algn="ctr" indent="0" marL="0">
+            <a:pPr algn="l" indent="0" marL="0">
               <a:lnSpc>
                 <a:spcPct val="120000"/>
               </a:lnSpc>
@@ -16971,7 +15242,7 @@
                 <a:ea typeface="Pretendard" pitchFamily="34" charset="-122"/>
                 <a:cs typeface="Pretendard" pitchFamily="34" charset="-120"/>
               </a:rPr>
-              <a:t>Focus on high performance</a:t>
+              <a:t>- Focus on high performance</a:t>
             </a:r>
             <a:endParaRPr lang="en-US" sz="2200" dirty="0"/>
           </a:p>
@@ -16979,71 +15250,14 @@
       </p:sp>
       <p:sp>
         <p:nvSpPr>
-          <p:cNvPr id="22" name="Shape 16"/>
-          <p:cNvSpPr/>
-          <p:nvPr/>
-        </p:nvSpPr>
-        <p:spPr>
-          <a:xfrm>
-            <a:off x="1097280" y="3466308"/>
-            <a:ext cx="474025" cy="474025"/>
-          </a:xfrm>
-          <a:prstGeom prst="roundRect">
-            <a:avLst>
-              <a:gd name="adj" fmla="val 7716"/>
-            </a:avLst>
-          </a:prstGeom>
-          <a:solidFill>
-            <a:srgbClr val="F8F4EF"/>
-          </a:solidFill>
-          <a:ln w="12700">
-            <a:solidFill>
-              <a:srgbClr val="C6CCC9"/>
-            </a:solidFill>
-            <a:prstDash val="solid"/>
-          </a:ln>
-        </p:spPr>
-      </p:sp>
-      <p:pic>
-        <p:nvPicPr>
-          <p:cNvPr id="23" name="Image 4" descr="verified icon from tabler-icons (MIT)">    </p:cNvPr>
-          <p:cNvPicPr>
-            <a:picLocks noChangeAspect="1"/>
-          </p:cNvPicPr>
-          <p:nvPr/>
-        </p:nvPicPr>
-        <p:blipFill>
-          <a:blip r:embed="rId9">
-            <a:extLst>
-              <a:ext uri="{96DAC541-7B7A-43D3-8B79-37D633B846F1}">
-                <asvg:svgBlip xmlns:asvg="http://schemas.microsoft.com/office/drawing/2016/SVG/main" r:embed="rId10"/>
-              </a:ext>
-            </a:extLst>
-          </a:blip>
-          <a:stretch>
-            <a:fillRect/>
-          </a:stretch>
-        </p:blipFill>
-        <p:spPr>
-          <a:xfrm>
-            <a:off x="1170432" y="3539460"/>
-            <a:ext cx="327721" cy="327721"/>
-          </a:xfrm>
-          <a:prstGeom prst="rect">
-            <a:avLst/>
-          </a:prstGeom>
-        </p:spPr>
-      </p:pic>
-      <p:sp>
-        <p:nvSpPr>
-          <p:cNvPr id="24" name="Text 17"/>
+          <p:cNvPr id="12" name="Text 10"/>
           <p:cNvSpPr txBox="1"/>
           <p:nvPr/>
         </p:nvSpPr>
         <p:spPr>
           <a:xfrm>
-            <a:off x="1699321" y="3489960"/>
-            <a:ext cx="9255191" cy="426720"/>
+            <a:off x="6473952" y="3535680"/>
+            <a:ext cx="4791456" cy="426720"/>
           </a:xfrm>
           <a:prstGeom prst="rect">
             <a:avLst/>
@@ -17055,7 +15269,7 @@
           <a:bodyPr wrap="square" lIns="0" tIns="25400" rIns="25400" bIns="0" rtlCol="0" anchor="ctr"/>
           <a:lstStyle/>
           <a:p>
-            <a:pPr algn="ctr" indent="0" marL="0">
+            <a:pPr algn="l" indent="0" marL="0">
               <a:lnSpc>
                 <a:spcPct val="120000"/>
               </a:lnSpc>
@@ -17070,106 +15284,7 @@
                 <a:ea typeface="Pretendard" pitchFamily="34" charset="-122"/>
                 <a:cs typeface="Pretendard" pitchFamily="34" charset="-120"/>
               </a:rPr>
-              <a:t>Super-high test coverage</a:t>
-            </a:r>
-            <a:endParaRPr lang="en-US" sz="2200" dirty="0"/>
-          </a:p>
-        </p:txBody>
-      </p:sp>
-      <p:sp>
-        <p:nvSpPr>
-          <p:cNvPr id="25" name="Shape 18"/>
-          <p:cNvSpPr/>
-          <p:nvPr/>
-        </p:nvSpPr>
-        <p:spPr>
-          <a:xfrm>
-            <a:off x="1097280" y="4783044"/>
-            <a:ext cx="474025" cy="474025"/>
-          </a:xfrm>
-          <a:prstGeom prst="roundRect">
-            <a:avLst>
-              <a:gd name="adj" fmla="val 7716"/>
-            </a:avLst>
-          </a:prstGeom>
-          <a:solidFill>
-            <a:srgbClr val="F8F4EF"/>
-          </a:solidFill>
-          <a:ln w="12700">
-            <a:solidFill>
-              <a:srgbClr val="C6CCC9"/>
-            </a:solidFill>
-            <a:prstDash val="solid"/>
-          </a:ln>
-        </p:spPr>
-      </p:sp>
-      <p:pic>
-        <p:nvPicPr>
-          <p:cNvPr id="26" name="Image 5" descr="server icon from svgrepo (open-license catalog pattern)">    </p:cNvPr>
-          <p:cNvPicPr>
-            <a:picLocks noChangeAspect="1"/>
-          </p:cNvPicPr>
-          <p:nvPr/>
-        </p:nvPicPr>
-        <p:blipFill>
-          <a:blip r:embed="rId11">
-            <a:extLst>
-              <a:ext uri="{96DAC541-7B7A-43D3-8B79-37D633B846F1}">
-                <asvg:svgBlip xmlns:asvg="http://schemas.microsoft.com/office/drawing/2016/SVG/main" r:embed="rId12"/>
-              </a:ext>
-            </a:extLst>
-          </a:blip>
-          <a:stretch>
-            <a:fillRect/>
-          </a:stretch>
-        </p:blipFill>
-        <p:spPr>
-          <a:xfrm>
-            <a:off x="1170432" y="4856196"/>
-            <a:ext cx="327721" cy="327721"/>
-          </a:xfrm>
-          <a:prstGeom prst="rect">
-            <a:avLst/>
-          </a:prstGeom>
-        </p:spPr>
-      </p:pic>
-      <p:sp>
-        <p:nvSpPr>
-          <p:cNvPr id="27" name="Text 19"/>
-          <p:cNvSpPr txBox="1"/>
-          <p:nvPr/>
-        </p:nvSpPr>
-        <p:spPr>
-          <a:xfrm>
-            <a:off x="1699321" y="4806696"/>
-            <a:ext cx="9255191" cy="426720"/>
-          </a:xfrm>
-          <a:prstGeom prst="rect">
-            <a:avLst/>
-          </a:prstGeom>
-          <a:noFill/>
-          <a:ln/>
-        </p:spPr>
-        <p:txBody>
-          <a:bodyPr wrap="square" lIns="0" tIns="25400" rIns="25400" bIns="0" rtlCol="0" anchor="ctr"/>
-          <a:lstStyle/>
-          <a:p>
-            <a:pPr algn="ctr" indent="0" marL="0">
-              <a:lnSpc>
-                <a:spcPct val="120000"/>
-              </a:lnSpc>
-              <a:buNone/>
-            </a:pPr>
-            <a:r>
-              <a:rPr lang="en-US" sz="2200" dirty="0">
-                <a:solidFill>
-                  <a:srgbClr val="18181B"/>
-                </a:solidFill>
-                <a:latin typeface="Pretendard" pitchFamily="34" charset="0"/>
-                <a:ea typeface="Pretendard" pitchFamily="34" charset="-122"/>
-                <a:cs typeface="Pretendard" pitchFamily="34" charset="-120"/>
-              </a:rPr>
-              <a:t>View system supporting 14+ template engines</a:t>
+              <a:t>- Super-high test coverage</a:t>
             </a:r>
             <a:endParaRPr lang="en-US" sz="2200" dirty="0"/>
           </a:p>
@@ -18459,37 +16574,8 @@
         </p:nvSpPr>
         <p:spPr>
           <a:xfrm>
-            <a:off x="786384" y="1956816"/>
-            <a:ext cx="32004" cy="3483864"/>
-          </a:xfrm>
-          <a:prstGeom prst="rect">
-            <a:avLst/>
-          </a:prstGeom>
-          <a:solidFill>
-            <a:srgbClr val="9E0F62">
-              <a:alpha val="80000"/>
-            </a:srgbClr>
-          </a:solidFill>
-          <a:ln w="12700">
-            <a:solidFill>
-              <a:srgbClr val="9E0F62">
-                <a:alpha val="0"/>
-              </a:srgbClr>
-            </a:solidFill>
-            <a:prstDash val="solid"/>
-          </a:ln>
-        </p:spPr>
-      </p:sp>
-      <p:sp>
-        <p:nvSpPr>
-          <p:cNvPr id="9" name="Shape 7"/>
-          <p:cNvSpPr/>
-          <p:nvPr/>
-        </p:nvSpPr>
-        <p:spPr>
-          <a:xfrm>
-            <a:off x="914400" y="1865376"/>
-            <a:ext cx="73152" cy="1024128"/>
+            <a:off x="822960" y="1554480"/>
+            <a:ext cx="4937760" cy="73152"/>
           </a:xfrm>
           <a:prstGeom prst="rect">
             <a:avLst/>
@@ -18509,41 +16595,14 @@
       </p:sp>
       <p:sp>
         <p:nvSpPr>
-          <p:cNvPr id="10" name="Shape 8"/>
-          <p:cNvSpPr/>
-          <p:nvPr/>
-        </p:nvSpPr>
-        <p:spPr>
-          <a:xfrm>
-            <a:off x="914400" y="3191256"/>
-            <a:ext cx="73152" cy="1024128"/>
-          </a:xfrm>
-          <a:prstGeom prst="rect">
-            <a:avLst/>
-          </a:prstGeom>
-          <a:solidFill>
-            <a:srgbClr val="9E0F62"/>
-          </a:solidFill>
-          <a:ln w="12700">
-            <a:solidFill>
-              <a:srgbClr val="9E0F62">
-                <a:alpha val="0"/>
-              </a:srgbClr>
-            </a:solidFill>
-            <a:prstDash val="solid"/>
-          </a:ln>
-        </p:spPr>
-      </p:sp>
-      <p:sp>
-        <p:nvSpPr>
-          <p:cNvPr id="11" name="Shape 9"/>
-          <p:cNvSpPr/>
-          <p:nvPr/>
-        </p:nvSpPr>
-        <p:spPr>
-          <a:xfrm>
-            <a:off x="914400" y="4507992"/>
-            <a:ext cx="73152" cy="1024128"/>
+          <p:cNvPr id="9" name="Shape 7"/>
+          <p:cNvSpPr/>
+          <p:nvPr/>
+        </p:nvSpPr>
+        <p:spPr>
+          <a:xfrm>
+            <a:off x="6400800" y="1554480"/>
+            <a:ext cx="4937760" cy="73152"/>
           </a:xfrm>
           <a:prstGeom prst="rect">
             <a:avLst/>
@@ -18561,207 +16620,9 @@
           </a:ln>
         </p:spPr>
       </p:sp>
-      <p:pic>
-        <p:nvPicPr>
-          <p:cNvPr id="12" name="Image 0" descr="preencoded.png">    </p:cNvPr>
-          <p:cNvPicPr>
-            <a:picLocks noChangeAspect="1"/>
-          </p:cNvPicPr>
-          <p:nvPr/>
-        </p:nvPicPr>
-        <p:blipFill>
-          <a:blip r:embed="rId1">
-            <a:extLst>
-              <a:ext uri="{96DAC541-7B7A-43D3-8B79-37D633B846F1}">
-                <asvg:svgBlip xmlns:asvg="http://schemas.microsoft.com/office/drawing/2016/SVG/main" r:embed="rId2"/>
-              </a:ext>
-            </a:extLst>
-          </a:blip>
-          <a:stretch>
-            <a:fillRect/>
-          </a:stretch>
-        </p:blipFill>
-        <p:spPr>
-          <a:xfrm>
-            <a:off x="914400" y="1865376"/>
-            <a:ext cx="10241280" cy="1024128"/>
-          </a:xfrm>
-          <a:prstGeom prst="rect">
-            <a:avLst/>
-          </a:prstGeom>
-        </p:spPr>
-      </p:pic>
-      <p:sp>
-        <p:nvSpPr>
-          <p:cNvPr id="13" name="Shape 10"/>
-          <p:cNvSpPr/>
-          <p:nvPr/>
-        </p:nvSpPr>
-        <p:spPr>
-          <a:xfrm>
-            <a:off x="914400" y="1865376"/>
-            <a:ext cx="10241280" cy="1024128"/>
-          </a:xfrm>
-          <a:prstGeom prst="rect">
-            <a:avLst/>
-          </a:prstGeom>
-          <a:solidFill>
-            <a:srgbClr val="FBF8F3">
-              <a:alpha val="0"/>
-            </a:srgbClr>
-          </a:solidFill>
-          <a:ln w="12700">
-            <a:solidFill>
-              <a:srgbClr val="C6CCC9">
-                <a:alpha val="0"/>
-              </a:srgbClr>
-            </a:solidFill>
-            <a:prstDash val="solid"/>
-          </a:ln>
-          <a:effectLst>
-            <a:outerShdw sx="100000" sy="100000" kx="0" ky="0" algn="bl" rotWithShape="0" blurRad="12700" dist="50800" dir="2700000">
-              <a:srgbClr val="000000">
-                <a:alpha val="8000"/>
-              </a:srgbClr>
-            </a:outerShdw>
-          </a:effectLst>
-        </p:spPr>
-      </p:sp>
-      <p:pic>
-        <p:nvPicPr>
-          <p:cNvPr id="14" name="Image 1" descr="preencoded.png">    </p:cNvPr>
-          <p:cNvPicPr>
-            <a:picLocks noChangeAspect="1"/>
-          </p:cNvPicPr>
-          <p:nvPr/>
-        </p:nvPicPr>
-        <p:blipFill>
-          <a:blip r:embed="rId3">
-            <a:extLst>
-              <a:ext uri="{96DAC541-7B7A-43D3-8B79-37D633B846F1}">
-                <asvg:svgBlip xmlns:asvg="http://schemas.microsoft.com/office/drawing/2016/SVG/main" r:embed="rId4"/>
-              </a:ext>
-            </a:extLst>
-          </a:blip>
-          <a:stretch>
-            <a:fillRect/>
-          </a:stretch>
-        </p:blipFill>
-        <p:spPr>
-          <a:xfrm>
-            <a:off x="914400" y="3191256"/>
-            <a:ext cx="10241280" cy="1024128"/>
-          </a:xfrm>
-          <a:prstGeom prst="rect">
-            <a:avLst/>
-          </a:prstGeom>
-        </p:spPr>
-      </p:pic>
-      <p:sp>
-        <p:nvSpPr>
-          <p:cNvPr id="15" name="Shape 11"/>
-          <p:cNvSpPr/>
-          <p:nvPr/>
-        </p:nvSpPr>
-        <p:spPr>
-          <a:xfrm>
-            <a:off x="914400" y="3191256"/>
-            <a:ext cx="10241280" cy="1024128"/>
-          </a:xfrm>
-          <a:prstGeom prst="rect">
-            <a:avLst/>
-          </a:prstGeom>
-          <a:solidFill>
-            <a:srgbClr val="FBF8F3">
-              <a:alpha val="0"/>
-            </a:srgbClr>
-          </a:solidFill>
-          <a:ln w="12700">
-            <a:solidFill>
-              <a:srgbClr val="C6CCC9">
-                <a:alpha val="0"/>
-              </a:srgbClr>
-            </a:solidFill>
-            <a:prstDash val="solid"/>
-          </a:ln>
-          <a:effectLst>
-            <a:outerShdw sx="100000" sy="100000" kx="0" ky="0" algn="bl" rotWithShape="0" blurRad="12700" dist="50800" dir="2700000">
-              <a:srgbClr val="000000">
-                <a:alpha val="8000"/>
-              </a:srgbClr>
-            </a:outerShdw>
-          </a:effectLst>
-        </p:spPr>
-      </p:sp>
-      <p:pic>
-        <p:nvPicPr>
-          <p:cNvPr id="16" name="Image 2" descr="preencoded.png">    </p:cNvPr>
-          <p:cNvPicPr>
-            <a:picLocks noChangeAspect="1"/>
-          </p:cNvPicPr>
-          <p:nvPr/>
-        </p:nvPicPr>
-        <p:blipFill>
-          <a:blip r:embed="rId5">
-            <a:extLst>
-              <a:ext uri="{96DAC541-7B7A-43D3-8B79-37D633B846F1}">
-                <asvg:svgBlip xmlns:asvg="http://schemas.microsoft.com/office/drawing/2016/SVG/main" r:embed="rId6"/>
-              </a:ext>
-            </a:extLst>
-          </a:blip>
-          <a:stretch>
-            <a:fillRect/>
-          </a:stretch>
-        </p:blipFill>
-        <p:spPr>
-          <a:xfrm>
-            <a:off x="914400" y="4507992"/>
-            <a:ext cx="10241280" cy="1024128"/>
-          </a:xfrm>
-          <a:prstGeom prst="rect">
-            <a:avLst/>
-          </a:prstGeom>
-        </p:spPr>
-      </p:pic>
-      <p:sp>
-        <p:nvSpPr>
-          <p:cNvPr id="17" name="Shape 12"/>
-          <p:cNvSpPr/>
-          <p:nvPr/>
-        </p:nvSpPr>
-        <p:spPr>
-          <a:xfrm>
-            <a:off x="914400" y="4507992"/>
-            <a:ext cx="10241280" cy="1024128"/>
-          </a:xfrm>
-          <a:prstGeom prst="rect">
-            <a:avLst/>
-          </a:prstGeom>
-          <a:solidFill>
-            <a:srgbClr val="FBF8F3">
-              <a:alpha val="0"/>
-            </a:srgbClr>
-          </a:solidFill>
-          <a:ln w="12700">
-            <a:solidFill>
-              <a:srgbClr val="C6CCC9">
-                <a:alpha val="0"/>
-              </a:srgbClr>
-            </a:solidFill>
-            <a:prstDash val="solid"/>
-          </a:ln>
-          <a:effectLst>
-            <a:outerShdw sx="100000" sy="100000" kx="0" ky="0" algn="bl" rotWithShape="0" blurRad="12700" dist="50800" dir="2700000">
-              <a:srgbClr val="000000">
-                <a:alpha val="8000"/>
-              </a:srgbClr>
-            </a:outerShdw>
-          </a:effectLst>
-        </p:spPr>
-      </p:sp>
-      <p:sp>
-        <p:nvSpPr>
-          <p:cNvPr id="18" name="Text 13"/>
+      <p:sp>
+        <p:nvSpPr>
+          <p:cNvPr id="10" name="Text 8"/>
           <p:cNvSpPr txBox="1"/>
           <p:nvPr/>
         </p:nvSpPr>
@@ -18803,71 +16664,14 @@
       </p:sp>
       <p:sp>
         <p:nvSpPr>
-          <p:cNvPr id="19" name="Shape 14"/>
-          <p:cNvSpPr/>
-          <p:nvPr/>
-        </p:nvSpPr>
-        <p:spPr>
-          <a:xfrm>
-            <a:off x="1097280" y="2140428"/>
-            <a:ext cx="474025" cy="474025"/>
-          </a:xfrm>
-          <a:prstGeom prst="roundRect">
-            <a:avLst>
-              <a:gd name="adj" fmla="val 7716"/>
-            </a:avLst>
-          </a:prstGeom>
-          <a:solidFill>
-            <a:srgbClr val="F8F4EF"/>
-          </a:solidFill>
-          <a:ln w="12700">
-            <a:solidFill>
-              <a:srgbClr val="C6CCC9"/>
-            </a:solidFill>
-            <a:prstDash val="solid"/>
-          </a:ln>
-        </p:spPr>
-      </p:sp>
-      <p:pic>
-        <p:nvPicPr>
-          <p:cNvPr id="20" name="Image 3" descr="article icon from tabler-icons (MIT)">    </p:cNvPr>
-          <p:cNvPicPr>
-            <a:picLocks noChangeAspect="1"/>
-          </p:cNvPicPr>
-          <p:nvPr/>
-        </p:nvPicPr>
-        <p:blipFill>
-          <a:blip r:embed="rId7">
-            <a:extLst>
-              <a:ext uri="{96DAC541-7B7A-43D3-8B79-37D633B846F1}">
-                <asvg:svgBlip xmlns:asvg="http://schemas.microsoft.com/office/drawing/2016/SVG/main" r:embed="rId8"/>
-              </a:ext>
-            </a:extLst>
-          </a:blip>
-          <a:stretch>
-            <a:fillRect/>
-          </a:stretch>
-        </p:blipFill>
-        <p:spPr>
-          <a:xfrm>
-            <a:off x="1170432" y="2213580"/>
-            <a:ext cx="327721" cy="327721"/>
-          </a:xfrm>
-          <a:prstGeom prst="rect">
-            <a:avLst/>
-          </a:prstGeom>
-        </p:spPr>
-      </p:pic>
-      <p:sp>
-        <p:nvSpPr>
-          <p:cNvPr id="21" name="Text 15"/>
+          <p:cNvPr id="11" name="Text 9"/>
           <p:cNvSpPr txBox="1"/>
           <p:nvPr/>
         </p:nvSpPr>
         <p:spPr>
           <a:xfrm>
-            <a:off x="1699321" y="1957548"/>
-            <a:ext cx="9255191" cy="839785"/>
+            <a:off x="896112" y="1664208"/>
+            <a:ext cx="4791456" cy="4169664"/>
           </a:xfrm>
           <a:prstGeom prst="rect">
             <a:avLst/>
@@ -18876,7 +16680,7 @@
           <a:ln/>
         </p:spPr>
         <p:txBody>
-          <a:bodyPr wrap="square" lIns="0" tIns="25400" rIns="25400" bIns="0" rtlCol="0" anchor="ctr"/>
+          <a:bodyPr wrap="square" lIns="0" tIns="25400" rIns="25400" bIns="0" rtlCol="0" anchor="t"/>
           <a:lstStyle/>
           <a:p>
             <a:pPr algn="l" indent="0" marL="0">
@@ -18894,7 +16698,7 @@
                 <a:ea typeface="Pretendard" pitchFamily="34" charset="-122"/>
                 <a:cs typeface="Pretendard" pitchFamily="34" charset="-120"/>
               </a:rPr>
-              <a:t>Fewer bugs</a:t>
+              <a:t>- Fewer bugs</a:t>
             </a:r>
             <a:pPr algn="l" indent="0" marL="0">
               <a:lnSpc>
@@ -18919,71 +16723,14 @@
       </p:sp>
       <p:sp>
         <p:nvSpPr>
-          <p:cNvPr id="22" name="Shape 16"/>
-          <p:cNvSpPr/>
-          <p:nvPr/>
-        </p:nvSpPr>
-        <p:spPr>
-          <a:xfrm>
-            <a:off x="1097280" y="3466308"/>
-            <a:ext cx="474025" cy="474025"/>
-          </a:xfrm>
-          <a:prstGeom prst="roundRect">
-            <a:avLst>
-              <a:gd name="adj" fmla="val 7716"/>
-            </a:avLst>
-          </a:prstGeom>
-          <a:solidFill>
-            <a:srgbClr val="F8F4EF"/>
-          </a:solidFill>
-          <a:ln w="12700">
-            <a:solidFill>
-              <a:srgbClr val="C6CCC9"/>
-            </a:solidFill>
-            <a:prstDash val="solid"/>
-          </a:ln>
-        </p:spPr>
-      </p:sp>
-      <p:pic>
-        <p:nvPicPr>
-          <p:cNvPr id="23" name="Image 4" descr="article icon from tabler-icons (MIT)">    </p:cNvPr>
-          <p:cNvPicPr>
-            <a:picLocks noChangeAspect="1"/>
-          </p:cNvPicPr>
-          <p:nvPr/>
-        </p:nvPicPr>
-        <p:blipFill>
-          <a:blip r:embed="rId9">
-            <a:extLst>
-              <a:ext uri="{96DAC541-7B7A-43D3-8B79-37D633B846F1}">
-                <asvg:svgBlip xmlns:asvg="http://schemas.microsoft.com/office/drawing/2016/SVG/main" r:embed="rId10"/>
-              </a:ext>
-            </a:extLst>
-          </a:blip>
-          <a:stretch>
-            <a:fillRect/>
-          </a:stretch>
-        </p:blipFill>
-        <p:spPr>
-          <a:xfrm>
-            <a:off x="1170432" y="3539460"/>
-            <a:ext cx="327721" cy="327721"/>
-          </a:xfrm>
-          <a:prstGeom prst="rect">
-            <a:avLst/>
-          </a:prstGeom>
-        </p:spPr>
-      </p:pic>
-      <p:sp>
-        <p:nvSpPr>
-          <p:cNvPr id="24" name="Text 17"/>
+          <p:cNvPr id="12" name="Text 10"/>
           <p:cNvSpPr txBox="1"/>
           <p:nvPr/>
         </p:nvSpPr>
         <p:spPr>
           <a:xfrm>
-            <a:off x="1699321" y="3283428"/>
-            <a:ext cx="9255191" cy="839785"/>
+            <a:off x="6473952" y="1664208"/>
+            <a:ext cx="4791456" cy="4169664"/>
           </a:xfrm>
           <a:prstGeom prst="rect">
             <a:avLst/>
@@ -18992,7 +16739,7 @@
           <a:ln/>
         </p:spPr>
         <p:txBody>
-          <a:bodyPr wrap="square" lIns="0" tIns="25400" rIns="25400" bIns="0" rtlCol="0" anchor="ctr"/>
+          <a:bodyPr wrap="square" lIns="0" tIns="25400" rIns="25400" bIns="0" rtlCol="0" anchor="t"/>
           <a:lstStyle/>
           <a:p>
             <a:pPr algn="l" indent="0" marL="0">
@@ -19010,7 +16757,7 @@
                 <a:ea typeface="Pretendard" pitchFamily="34" charset="-122"/>
                 <a:cs typeface="Pretendard" pitchFamily="34" charset="-120"/>
               </a:rPr>
-              <a:t>Intuitive</a:t>
+              <a:t>- Intuitive</a:t>
             </a:r>
             <a:pPr algn="l" indent="0" marL="0">
               <a:lnSpc>
@@ -19028,122 +16775,6 @@
                 <a:cs typeface="Pretendard" pitchFamily="34" charset="-120"/>
               </a:rPr>
               <a:t>  Great editor support. Completion everywhere. Less time debugging.</a:t>
-            </a:r>
-            <a:endParaRPr lang="en-US" sz="2200" dirty="0"/>
-          </a:p>
-        </p:txBody>
-      </p:sp>
-      <p:sp>
-        <p:nvSpPr>
-          <p:cNvPr id="25" name="Shape 18"/>
-          <p:cNvSpPr/>
-          <p:nvPr/>
-        </p:nvSpPr>
-        <p:spPr>
-          <a:xfrm>
-            <a:off x="1097280" y="4783044"/>
-            <a:ext cx="474025" cy="474025"/>
-          </a:xfrm>
-          <a:prstGeom prst="roundRect">
-            <a:avLst>
-              <a:gd name="adj" fmla="val 7716"/>
-            </a:avLst>
-          </a:prstGeom>
-          <a:solidFill>
-            <a:srgbClr val="F8F4EF"/>
-          </a:solidFill>
-          <a:ln w="12700">
-            <a:solidFill>
-              <a:srgbClr val="C6CCC9"/>
-            </a:solidFill>
-            <a:prstDash val="solid"/>
-          </a:ln>
-        </p:spPr>
-      </p:sp>
-      <p:pic>
-        <p:nvPicPr>
-          <p:cNvPr id="26" name="Image 5" descr="palette icon from tabler-icons (MIT)">    </p:cNvPr>
-          <p:cNvPicPr>
-            <a:picLocks noChangeAspect="1"/>
-          </p:cNvPicPr>
-          <p:nvPr/>
-        </p:nvPicPr>
-        <p:blipFill>
-          <a:blip r:embed="rId11">
-            <a:extLst>
-              <a:ext uri="{96DAC541-7B7A-43D3-8B79-37D633B846F1}">
-                <asvg:svgBlip xmlns:asvg="http://schemas.microsoft.com/office/drawing/2016/SVG/main" r:embed="rId12"/>
-              </a:ext>
-            </a:extLst>
-          </a:blip>
-          <a:stretch>
-            <a:fillRect/>
-          </a:stretch>
-        </p:blipFill>
-        <p:spPr>
-          <a:xfrm>
-            <a:off x="1170432" y="4856196"/>
-            <a:ext cx="327721" cy="327721"/>
-          </a:xfrm>
-          <a:prstGeom prst="rect">
-            <a:avLst/>
-          </a:prstGeom>
-        </p:spPr>
-      </p:pic>
-      <p:sp>
-        <p:nvSpPr>
-          <p:cNvPr id="27" name="Text 19"/>
-          <p:cNvSpPr txBox="1"/>
-          <p:nvPr/>
-        </p:nvSpPr>
-        <p:spPr>
-          <a:xfrm>
-            <a:off x="1699321" y="4600164"/>
-            <a:ext cx="9255191" cy="839785"/>
-          </a:xfrm>
-          <a:prstGeom prst="rect">
-            <a:avLst/>
-          </a:prstGeom>
-          <a:noFill/>
-          <a:ln/>
-        </p:spPr>
-        <p:txBody>
-          <a:bodyPr wrap="square" lIns="0" tIns="25400" rIns="25400" bIns="0" rtlCol="0" anchor="ctr"/>
-          <a:lstStyle/>
-          <a:p>
-            <a:pPr algn="l" indent="0" marL="0">
-              <a:lnSpc>
-                <a:spcPct val="120000"/>
-              </a:lnSpc>
-              <a:buNone/>
-            </a:pPr>
-            <a:r>
-              <a:rPr lang="en-US" sz="2200" b="1" dirty="0">
-                <a:solidFill>
-                  <a:srgbClr val="0F766E"/>
-                </a:solidFill>
-                <a:latin typeface="Pretendard" pitchFamily="34" charset="0"/>
-                <a:ea typeface="Pretendard" pitchFamily="34" charset="-122"/>
-                <a:cs typeface="Pretendard" pitchFamily="34" charset="-120"/>
-              </a:rPr>
-              <a:t>Easy</a:t>
-            </a:r>
-            <a:pPr algn="l" indent="0" marL="0">
-              <a:lnSpc>
-                <a:spcPct val="120000"/>
-              </a:lnSpc>
-              <a:buNone/>
-            </a:pPr>
-            <a:r>
-              <a:rPr lang="en-US" sz="2200" dirty="0">
-                <a:solidFill>
-                  <a:srgbClr val="18181B"/>
-                </a:solidFill>
-                <a:latin typeface="Pretendard" pitchFamily="34" charset="0"/>
-                <a:ea typeface="Pretendard" pitchFamily="34" charset="-122"/>
-                <a:cs typeface="Pretendard" pitchFamily="34" charset="-120"/>
-              </a:rPr>
-              <a:t>  Designed to be easy to use and learn. Less time reading docs.</a:t>
             </a:r>
             <a:endParaRPr lang="en-US" sz="2200" dirty="0"/>
           </a:p>
@@ -20399,37 +18030,8 @@
         </p:nvSpPr>
         <p:spPr>
           <a:xfrm>
-            <a:off x="786384" y="1956816"/>
-            <a:ext cx="32004" cy="3483864"/>
-          </a:xfrm>
-          <a:prstGeom prst="rect">
-            <a:avLst/>
-          </a:prstGeom>
-          <a:solidFill>
-            <a:srgbClr val="9E0F62">
-              <a:alpha val="80000"/>
-            </a:srgbClr>
-          </a:solidFill>
-          <a:ln w="12700">
-            <a:solidFill>
-              <a:srgbClr val="9E0F62">
-                <a:alpha val="0"/>
-              </a:srgbClr>
-            </a:solidFill>
-            <a:prstDash val="solid"/>
-          </a:ln>
-        </p:spPr>
-      </p:sp>
-      <p:sp>
-        <p:nvSpPr>
-          <p:cNvPr id="9" name="Shape 7"/>
-          <p:cNvSpPr/>
-          <p:nvPr/>
-        </p:nvSpPr>
-        <p:spPr>
-          <a:xfrm>
-            <a:off x="914400" y="1865376"/>
-            <a:ext cx="73152" cy="1024128"/>
+            <a:off x="822960" y="1554480"/>
+            <a:ext cx="4937760" cy="73152"/>
           </a:xfrm>
           <a:prstGeom prst="rect">
             <a:avLst/>
@@ -20449,41 +18051,14 @@
       </p:sp>
       <p:sp>
         <p:nvSpPr>
-          <p:cNvPr id="10" name="Shape 8"/>
-          <p:cNvSpPr/>
-          <p:nvPr/>
-        </p:nvSpPr>
-        <p:spPr>
-          <a:xfrm>
-            <a:off x="914400" y="3191256"/>
-            <a:ext cx="73152" cy="1024128"/>
-          </a:xfrm>
-          <a:prstGeom prst="rect">
-            <a:avLst/>
-          </a:prstGeom>
-          <a:solidFill>
-            <a:srgbClr val="9E0F62"/>
-          </a:solidFill>
-          <a:ln w="12700">
-            <a:solidFill>
-              <a:srgbClr val="9E0F62">
-                <a:alpha val="0"/>
-              </a:srgbClr>
-            </a:solidFill>
-            <a:prstDash val="solid"/>
-          </a:ln>
-        </p:spPr>
-      </p:sp>
-      <p:sp>
-        <p:nvSpPr>
-          <p:cNvPr id="11" name="Shape 9"/>
-          <p:cNvSpPr/>
-          <p:nvPr/>
-        </p:nvSpPr>
-        <p:spPr>
-          <a:xfrm>
-            <a:off x="914400" y="4507992"/>
-            <a:ext cx="73152" cy="1024128"/>
+          <p:cNvPr id="9" name="Shape 7"/>
+          <p:cNvSpPr/>
+          <p:nvPr/>
+        </p:nvSpPr>
+        <p:spPr>
+          <a:xfrm>
+            <a:off x="6400800" y="1554480"/>
+            <a:ext cx="4937760" cy="73152"/>
           </a:xfrm>
           <a:prstGeom prst="rect">
             <a:avLst/>
@@ -20501,207 +18076,9 @@
           </a:ln>
         </p:spPr>
       </p:sp>
-      <p:pic>
-        <p:nvPicPr>
-          <p:cNvPr id="12" name="Image 0" descr="preencoded.png">    </p:cNvPr>
-          <p:cNvPicPr>
-            <a:picLocks noChangeAspect="1"/>
-          </p:cNvPicPr>
-          <p:nvPr/>
-        </p:nvPicPr>
-        <p:blipFill>
-          <a:blip r:embed="rId1">
-            <a:extLst>
-              <a:ext uri="{96DAC541-7B7A-43D3-8B79-37D633B846F1}">
-                <asvg:svgBlip xmlns:asvg="http://schemas.microsoft.com/office/drawing/2016/SVG/main" r:embed="rId2"/>
-              </a:ext>
-            </a:extLst>
-          </a:blip>
-          <a:stretch>
-            <a:fillRect/>
-          </a:stretch>
-        </p:blipFill>
-        <p:spPr>
-          <a:xfrm>
-            <a:off x="914400" y="1865376"/>
-            <a:ext cx="10241280" cy="1024128"/>
-          </a:xfrm>
-          <a:prstGeom prst="rect">
-            <a:avLst/>
-          </a:prstGeom>
-        </p:spPr>
-      </p:pic>
-      <p:sp>
-        <p:nvSpPr>
-          <p:cNvPr id="13" name="Shape 10"/>
-          <p:cNvSpPr/>
-          <p:nvPr/>
-        </p:nvSpPr>
-        <p:spPr>
-          <a:xfrm>
-            <a:off x="914400" y="1865376"/>
-            <a:ext cx="10241280" cy="1024128"/>
-          </a:xfrm>
-          <a:prstGeom prst="rect">
-            <a:avLst/>
-          </a:prstGeom>
-          <a:solidFill>
-            <a:srgbClr val="FBF8F3">
-              <a:alpha val="0"/>
-            </a:srgbClr>
-          </a:solidFill>
-          <a:ln w="12700">
-            <a:solidFill>
-              <a:srgbClr val="C6CCC9">
-                <a:alpha val="0"/>
-              </a:srgbClr>
-            </a:solidFill>
-            <a:prstDash val="solid"/>
-          </a:ln>
-          <a:effectLst>
-            <a:outerShdw sx="100000" sy="100000" kx="0" ky="0" algn="bl" rotWithShape="0" blurRad="12700" dist="50800" dir="2700000">
-              <a:srgbClr val="000000">
-                <a:alpha val="8000"/>
-              </a:srgbClr>
-            </a:outerShdw>
-          </a:effectLst>
-        </p:spPr>
-      </p:sp>
-      <p:pic>
-        <p:nvPicPr>
-          <p:cNvPr id="14" name="Image 1" descr="preencoded.png">    </p:cNvPr>
-          <p:cNvPicPr>
-            <a:picLocks noChangeAspect="1"/>
-          </p:cNvPicPr>
-          <p:nvPr/>
-        </p:nvPicPr>
-        <p:blipFill>
-          <a:blip r:embed="rId3">
-            <a:extLst>
-              <a:ext uri="{96DAC541-7B7A-43D3-8B79-37D633B846F1}">
-                <asvg:svgBlip xmlns:asvg="http://schemas.microsoft.com/office/drawing/2016/SVG/main" r:embed="rId4"/>
-              </a:ext>
-            </a:extLst>
-          </a:blip>
-          <a:stretch>
-            <a:fillRect/>
-          </a:stretch>
-        </p:blipFill>
-        <p:spPr>
-          <a:xfrm>
-            <a:off x="914400" y="3191256"/>
-            <a:ext cx="10241280" cy="1024128"/>
-          </a:xfrm>
-          <a:prstGeom prst="rect">
-            <a:avLst/>
-          </a:prstGeom>
-        </p:spPr>
-      </p:pic>
-      <p:sp>
-        <p:nvSpPr>
-          <p:cNvPr id="15" name="Shape 11"/>
-          <p:cNvSpPr/>
-          <p:nvPr/>
-        </p:nvSpPr>
-        <p:spPr>
-          <a:xfrm>
-            <a:off x="914400" y="3191256"/>
-            <a:ext cx="10241280" cy="1024128"/>
-          </a:xfrm>
-          <a:prstGeom prst="rect">
-            <a:avLst/>
-          </a:prstGeom>
-          <a:solidFill>
-            <a:srgbClr val="FBF8F3">
-              <a:alpha val="0"/>
-            </a:srgbClr>
-          </a:solidFill>
-          <a:ln w="12700">
-            <a:solidFill>
-              <a:srgbClr val="C6CCC9">
-                <a:alpha val="0"/>
-              </a:srgbClr>
-            </a:solidFill>
-            <a:prstDash val="solid"/>
-          </a:ln>
-          <a:effectLst>
-            <a:outerShdw sx="100000" sy="100000" kx="0" ky="0" algn="bl" rotWithShape="0" blurRad="12700" dist="50800" dir="2700000">
-              <a:srgbClr val="000000">
-                <a:alpha val="8000"/>
-              </a:srgbClr>
-            </a:outerShdw>
-          </a:effectLst>
-        </p:spPr>
-      </p:sp>
-      <p:pic>
-        <p:nvPicPr>
-          <p:cNvPr id="16" name="Image 2" descr="preencoded.png">    </p:cNvPr>
-          <p:cNvPicPr>
-            <a:picLocks noChangeAspect="1"/>
-          </p:cNvPicPr>
-          <p:nvPr/>
-        </p:nvPicPr>
-        <p:blipFill>
-          <a:blip r:embed="rId5">
-            <a:extLst>
-              <a:ext uri="{96DAC541-7B7A-43D3-8B79-37D633B846F1}">
-                <asvg:svgBlip xmlns:asvg="http://schemas.microsoft.com/office/drawing/2016/SVG/main" r:embed="rId6"/>
-              </a:ext>
-            </a:extLst>
-          </a:blip>
-          <a:stretch>
-            <a:fillRect/>
-          </a:stretch>
-        </p:blipFill>
-        <p:spPr>
-          <a:xfrm>
-            <a:off x="914400" y="4507992"/>
-            <a:ext cx="10241280" cy="1024128"/>
-          </a:xfrm>
-          <a:prstGeom prst="rect">
-            <a:avLst/>
-          </a:prstGeom>
-        </p:spPr>
-      </p:pic>
-      <p:sp>
-        <p:nvSpPr>
-          <p:cNvPr id="17" name="Shape 12"/>
-          <p:cNvSpPr/>
-          <p:nvPr/>
-        </p:nvSpPr>
-        <p:spPr>
-          <a:xfrm>
-            <a:off x="914400" y="4507992"/>
-            <a:ext cx="10241280" cy="1024128"/>
-          </a:xfrm>
-          <a:prstGeom prst="rect">
-            <a:avLst/>
-          </a:prstGeom>
-          <a:solidFill>
-            <a:srgbClr val="FBF8F3">
-              <a:alpha val="0"/>
-            </a:srgbClr>
-          </a:solidFill>
-          <a:ln w="12700">
-            <a:solidFill>
-              <a:srgbClr val="C6CCC9">
-                <a:alpha val="0"/>
-              </a:srgbClr>
-            </a:solidFill>
-            <a:prstDash val="solid"/>
-          </a:ln>
-          <a:effectLst>
-            <a:outerShdw sx="100000" sy="100000" kx="0" ky="0" algn="bl" rotWithShape="0" blurRad="12700" dist="50800" dir="2700000">
-              <a:srgbClr val="000000">
-                <a:alpha val="8000"/>
-              </a:srgbClr>
-            </a:outerShdw>
-          </a:effectLst>
-        </p:spPr>
-      </p:sp>
-      <p:sp>
-        <p:nvSpPr>
-          <p:cNvPr id="18" name="Text 13"/>
+      <p:sp>
+        <p:nvSpPr>
+          <p:cNvPr id="10" name="Text 8"/>
           <p:cNvSpPr txBox="1"/>
           <p:nvPr/>
         </p:nvSpPr>
@@ -20743,170 +18120,14 @@
       </p:sp>
       <p:sp>
         <p:nvSpPr>
-          <p:cNvPr id="19" name="Shape 14"/>
-          <p:cNvSpPr/>
-          <p:nvPr/>
-        </p:nvSpPr>
-        <p:spPr>
-          <a:xfrm>
-            <a:off x="1097280" y="2140428"/>
-            <a:ext cx="474025" cy="474025"/>
-          </a:xfrm>
-          <a:prstGeom prst="roundRect">
-            <a:avLst>
-              <a:gd name="adj" fmla="val 7716"/>
-            </a:avLst>
-          </a:prstGeom>
-          <a:solidFill>
-            <a:srgbClr val="F8F4EF"/>
-          </a:solidFill>
-          <a:ln w="12700">
-            <a:solidFill>
-              <a:srgbClr val="C6CCC9"/>
-            </a:solidFill>
-            <a:prstDash val="solid"/>
-          </a:ln>
-        </p:spPr>
-      </p:sp>
-      <p:pic>
-        <p:nvPicPr>
-          <p:cNvPr id="20" name="Image 3" descr="article icon from tabler-icons (MIT)">    </p:cNvPr>
-          <p:cNvPicPr>
-            <a:picLocks noChangeAspect="1"/>
-          </p:cNvPicPr>
-          <p:nvPr/>
-        </p:nvPicPr>
-        <p:blipFill>
-          <a:blip r:embed="rId7">
-            <a:extLst>
-              <a:ext uri="{96DAC541-7B7A-43D3-8B79-37D633B846F1}">
-                <asvg:svgBlip xmlns:asvg="http://schemas.microsoft.com/office/drawing/2016/SVG/main" r:embed="rId8"/>
-              </a:ext>
-            </a:extLst>
-          </a:blip>
-          <a:stretch>
-            <a:fillRect/>
-          </a:stretch>
-        </p:blipFill>
-        <p:spPr>
-          <a:xfrm>
-            <a:off x="1170432" y="2213580"/>
-            <a:ext cx="327721" cy="327721"/>
-          </a:xfrm>
-          <a:prstGeom prst="rect">
-            <a:avLst/>
-          </a:prstGeom>
-        </p:spPr>
-      </p:pic>
-      <p:sp>
-        <p:nvSpPr>
-          <p:cNvPr id="21" name="Text 15"/>
+          <p:cNvPr id="11" name="Text 9"/>
           <p:cNvSpPr txBox="1"/>
           <p:nvPr/>
         </p:nvSpPr>
         <p:spPr>
           <a:xfrm>
-            <a:off x="1699321" y="2164080"/>
-            <a:ext cx="9255191" cy="426720"/>
-          </a:xfrm>
-          <a:prstGeom prst="rect">
-            <a:avLst/>
-          </a:prstGeom>
-          <a:noFill/>
-          <a:ln/>
-        </p:spPr>
-        <p:txBody>
-          <a:bodyPr wrap="square" lIns="0" tIns="25400" rIns="25400" bIns="0" rtlCol="0" anchor="ctr"/>
-          <a:lstStyle/>
-          <a:p>
-            <a:pPr algn="ctr" indent="0" marL="0">
-              <a:lnSpc>
-                <a:spcPct val="120000"/>
-              </a:lnSpc>
-              <a:buNone/>
-            </a:pPr>
-            <a:r>
-              <a:rPr lang="en-US" sz="2200" dirty="0">
-                <a:solidFill>
-                  <a:srgbClr val="18181B"/>
-                </a:solidFill>
-                <a:latin typeface="Pretendard" pitchFamily="34" charset="0"/>
-                <a:ea typeface="Pretendard" pitchFamily="34" charset="-122"/>
-                <a:cs typeface="Pretendard" pitchFamily="34" charset="-120"/>
-              </a:rPr>
-              <a:t>Additional advanced functionality</a:t>
-            </a:r>
-            <a:endParaRPr lang="en-US" sz="2200" dirty="0"/>
-          </a:p>
-        </p:txBody>
-      </p:sp>
-      <p:sp>
-        <p:nvSpPr>
-          <p:cNvPr id="22" name="Shape 16"/>
-          <p:cNvSpPr/>
-          <p:nvPr/>
-        </p:nvSpPr>
-        <p:spPr>
-          <a:xfrm>
-            <a:off x="1097280" y="3466308"/>
-            <a:ext cx="474025" cy="474025"/>
-          </a:xfrm>
-          <a:prstGeom prst="roundRect">
-            <a:avLst>
-              <a:gd name="adj" fmla="val 7716"/>
-            </a:avLst>
-          </a:prstGeom>
-          <a:solidFill>
-            <a:srgbClr val="F8F4EF"/>
-          </a:solidFill>
-          <a:ln w="12700">
-            <a:solidFill>
-              <a:srgbClr val="C6CCC9"/>
-            </a:solidFill>
-            <a:prstDash val="solid"/>
-          </a:ln>
-        </p:spPr>
-      </p:sp>
-      <p:pic>
-        <p:nvPicPr>
-          <p:cNvPr id="23" name="Image 4" descr="article icon from tabler-icons (MIT)">    </p:cNvPr>
-          <p:cNvPicPr>
-            <a:picLocks noChangeAspect="1"/>
-          </p:cNvPicPr>
-          <p:nvPr/>
-        </p:nvPicPr>
-        <p:blipFill>
-          <a:blip r:embed="rId9">
-            <a:extLst>
-              <a:ext uri="{96DAC541-7B7A-43D3-8B79-37D633B846F1}">
-                <asvg:svgBlip xmlns:asvg="http://schemas.microsoft.com/office/drawing/2016/SVG/main" r:embed="rId10"/>
-              </a:ext>
-            </a:extLst>
-          </a:blip>
-          <a:stretch>
-            <a:fillRect/>
-          </a:stretch>
-        </p:blipFill>
-        <p:spPr>
-          <a:xfrm>
-            <a:off x="1170432" y="3539460"/>
-            <a:ext cx="327721" cy="327721"/>
-          </a:xfrm>
-          <a:prstGeom prst="rect">
-            <a:avLst/>
-          </a:prstGeom>
-        </p:spPr>
-      </p:pic>
-      <p:sp>
-        <p:nvSpPr>
-          <p:cNvPr id="24" name="Text 17"/>
-          <p:cNvSpPr txBox="1"/>
-          <p:nvPr/>
-        </p:nvSpPr>
-        <p:spPr>
-          <a:xfrm>
-            <a:off x="1699321" y="3283428"/>
-            <a:ext cx="9255191" cy="839785"/>
+            <a:off x="896112" y="3368040"/>
+            <a:ext cx="4791456" cy="762000"/>
           </a:xfrm>
           <a:prstGeom prst="rect">
             <a:avLst/>
@@ -20933,7 +18154,49 @@
                 <a:ea typeface="Pretendard" pitchFamily="34" charset="-122"/>
                 <a:cs typeface="Pretendard" pitchFamily="34" charset="-120"/>
               </a:rPr>
-              <a:t>azure</a:t>
+              <a:t>- Additional advanced functionality</a:t>
+            </a:r>
+            <a:endParaRPr lang="en-US" sz="2200" dirty="0"/>
+          </a:p>
+        </p:txBody>
+      </p:sp>
+      <p:sp>
+        <p:nvSpPr>
+          <p:cNvPr id="12" name="Text 10"/>
+          <p:cNvSpPr txBox="1"/>
+          <p:nvPr/>
+        </p:nvSpPr>
+        <p:spPr>
+          <a:xfrm>
+            <a:off x="6473952" y="1664208"/>
+            <a:ext cx="4791456" cy="4169664"/>
+          </a:xfrm>
+          <a:prstGeom prst="rect">
+            <a:avLst/>
+          </a:prstGeom>
+          <a:noFill/>
+          <a:ln/>
+        </p:spPr>
+        <p:txBody>
+          <a:bodyPr wrap="square" lIns="0" tIns="25400" rIns="25400" bIns="0" rtlCol="0" anchor="t"/>
+          <a:lstStyle/>
+          <a:p>
+            <a:pPr algn="l" indent="0" marL="0">
+              <a:lnSpc>
+                <a:spcPct val="120000"/>
+              </a:lnSpc>
+              <a:buNone/>
+            </a:pPr>
+            <a:r>
+              <a:rPr lang="en-US" sz="2200" dirty="0">
+                <a:solidFill>
+                  <a:srgbClr val="18181B"/>
+                </a:solidFill>
+                <a:latin typeface="Pretendard" pitchFamily="34" charset="0"/>
+                <a:ea typeface="Pretendard" pitchFamily="34" charset="-122"/>
+                <a:cs typeface="Pretendard" pitchFamily="34" charset="-120"/>
+              </a:rPr>
+              <a:t>- azure</a:t>
             </a:r>
             <a:pPr algn="l" indent="0" marL="0">
               <a:lnSpc>
@@ -20968,139 +18231,6 @@
                 <a:cs typeface="Pretendard" pitchFamily="34" charset="-120"/>
               </a:rPr>
               <a:t>OPENAI_ENDPOINT environment variable)</a:t>
-            </a:r>
-            <a:endParaRPr lang="en-US" sz="2200" dirty="0"/>
-          </a:p>
-        </p:txBody>
-      </p:sp>
-      <p:sp>
-        <p:nvSpPr>
-          <p:cNvPr id="25" name="Shape 18"/>
-          <p:cNvSpPr/>
-          <p:nvPr/>
-        </p:nvSpPr>
-        <p:spPr>
-          <a:xfrm>
-            <a:off x="1097280" y="4783044"/>
-            <a:ext cx="474025" cy="474025"/>
-          </a:xfrm>
-          <a:prstGeom prst="roundRect">
-            <a:avLst>
-              <a:gd name="adj" fmla="val 7716"/>
-            </a:avLst>
-          </a:prstGeom>
-          <a:solidFill>
-            <a:srgbClr val="F8F4EF"/>
-          </a:solidFill>
-          <a:ln w="12700">
-            <a:solidFill>
-              <a:srgbClr val="C6CCC9"/>
-            </a:solidFill>
-            <a:prstDash val="solid"/>
-          </a:ln>
-        </p:spPr>
-      </p:sp>
-      <p:pic>
-        <p:nvPicPr>
-          <p:cNvPr id="26" name="Image 5" descr="cloud icon from svgrepo (open-license catalog pattern)">    </p:cNvPr>
-          <p:cNvPicPr>
-            <a:picLocks noChangeAspect="1"/>
-          </p:cNvPicPr>
-          <p:nvPr/>
-        </p:nvPicPr>
-        <p:blipFill>
-          <a:blip r:embed="rId11">
-            <a:extLst>
-              <a:ext uri="{96DAC541-7B7A-43D3-8B79-37D633B846F1}">
-                <asvg:svgBlip xmlns:asvg="http://schemas.microsoft.com/office/drawing/2016/SVG/main" r:embed="rId12"/>
-              </a:ext>
-            </a:extLst>
-          </a:blip>
-          <a:stretch>
-            <a:fillRect/>
-          </a:stretch>
-        </p:blipFill>
-        <p:spPr>
-          <a:xfrm>
-            <a:off x="1170432" y="4856196"/>
-            <a:ext cx="327721" cy="327721"/>
-          </a:xfrm>
-          <a:prstGeom prst="rect">
-            <a:avLst/>
-          </a:prstGeom>
-        </p:spPr>
-      </p:pic>
-      <p:sp>
-        <p:nvSpPr>
-          <p:cNvPr id="27" name="Text 19"/>
-          <p:cNvSpPr txBox="1"/>
-          <p:nvPr/>
-        </p:nvSpPr>
-        <p:spPr>
-          <a:xfrm>
-            <a:off x="1699321" y="4600164"/>
-            <a:ext cx="9255191" cy="839785"/>
-          </a:xfrm>
-          <a:prstGeom prst="rect">
-            <a:avLst/>
-          </a:prstGeom>
-          <a:noFill/>
-          <a:ln/>
-        </p:spPr>
-        <p:txBody>
-          <a:bodyPr wrap="square" lIns="0" tIns="25400" rIns="25400" bIns="0" rtlCol="0" anchor="ctr"/>
-          <a:lstStyle/>
-          <a:p>
-            <a:pPr algn="l" indent="0" marL="0">
-              <a:lnSpc>
-                <a:spcPct val="120000"/>
-              </a:lnSpc>
-              <a:buNone/>
-            </a:pPr>
-            <a:r>
-              <a:rPr lang="en-US" sz="2200" dirty="0">
-                <a:solidFill>
-                  <a:srgbClr val="18181B"/>
-                </a:solidFill>
-                <a:latin typeface="Pretendard" pitchFamily="34" charset="0"/>
-                <a:ea typeface="Pretendard" pitchFamily="34" charset="-122"/>
-                <a:cs typeface="Pretendard" pitchFamily="34" charset="-120"/>
-              </a:rPr>
-              <a:t>api</a:t>
-            </a:r>
-            <a:pPr algn="l" indent="0" marL="0">
-              <a:lnSpc>
-                <a:spcPct val="120000"/>
-              </a:lnSpc>
-              <a:buNone/>
-            </a:pPr>
-            <a:r>
-              <a:rPr lang="en-US" sz="2200" i="1" dirty="0">
-                <a:solidFill>
-                  <a:srgbClr val="18181B"/>
-                </a:solidFill>
-                <a:latin typeface="Pretendard" pitchFamily="34" charset="0"/>
-                <a:ea typeface="Pretendard" pitchFamily="34" charset="-122"/>
-                <a:cs typeface="Pretendard" pitchFamily="34" charset="-120"/>
-              </a:rPr>
-              <a:t>version (or the OPENAI</a:t>
-            </a:r>
-            <a:pPr algn="l" indent="0" marL="0">
-              <a:lnSpc>
-                <a:spcPct val="120000"/>
-              </a:lnSpc>
-              <a:buNone/>
-            </a:pPr>
-            <a:r>
-              <a:rPr lang="en-US" sz="2200" dirty="0">
-                <a:solidFill>
-                  <a:srgbClr val="18181B"/>
-                </a:solidFill>
-                <a:latin typeface="Pretendard" pitchFamily="34" charset="0"/>
-                <a:ea typeface="Pretendard" pitchFamily="34" charset="-122"/>
-                <a:cs typeface="Pretendard" pitchFamily="34" charset="-120"/>
-              </a:rPr>
-              <a:t>API_VERSION environment variable)</a:t>
             </a:r>
             <a:endParaRPr lang="en-US" sz="2200" dirty="0"/>
           </a:p>
@@ -22390,37 +19520,8 @@
         </p:nvSpPr>
         <p:spPr>
           <a:xfrm>
-            <a:off x="786384" y="1956816"/>
-            <a:ext cx="32004" cy="3483864"/>
-          </a:xfrm>
-          <a:prstGeom prst="rect">
-            <a:avLst/>
-          </a:prstGeom>
-          <a:solidFill>
-            <a:srgbClr val="9E0F62">
-              <a:alpha val="80000"/>
-            </a:srgbClr>
-          </a:solidFill>
-          <a:ln w="12700">
-            <a:solidFill>
-              <a:srgbClr val="9E0F62">
-                <a:alpha val="0"/>
-              </a:srgbClr>
-            </a:solidFill>
-            <a:prstDash val="solid"/>
-          </a:ln>
-        </p:spPr>
-      </p:sp>
-      <p:sp>
-        <p:nvSpPr>
-          <p:cNvPr id="9" name="Shape 7"/>
-          <p:cNvSpPr/>
-          <p:nvPr/>
-        </p:nvSpPr>
-        <p:spPr>
-          <a:xfrm>
-            <a:off x="914400" y="1865376"/>
-            <a:ext cx="73152" cy="1024128"/>
+            <a:off x="822960" y="1554480"/>
+            <a:ext cx="4937760" cy="73152"/>
           </a:xfrm>
           <a:prstGeom prst="rect">
             <a:avLst/>
@@ -22440,41 +19541,14 @@
       </p:sp>
       <p:sp>
         <p:nvSpPr>
-          <p:cNvPr id="10" name="Shape 8"/>
-          <p:cNvSpPr/>
-          <p:nvPr/>
-        </p:nvSpPr>
-        <p:spPr>
-          <a:xfrm>
-            <a:off x="914400" y="3191256"/>
-            <a:ext cx="73152" cy="1024128"/>
-          </a:xfrm>
-          <a:prstGeom prst="rect">
-            <a:avLst/>
-          </a:prstGeom>
-          <a:solidFill>
-            <a:srgbClr val="9E0F62"/>
-          </a:solidFill>
-          <a:ln w="12700">
-            <a:solidFill>
-              <a:srgbClr val="9E0F62">
-                <a:alpha val="0"/>
-              </a:srgbClr>
-            </a:solidFill>
-            <a:prstDash val="solid"/>
-          </a:ln>
-        </p:spPr>
-      </p:sp>
-      <p:sp>
-        <p:nvSpPr>
-          <p:cNvPr id="11" name="Shape 9"/>
-          <p:cNvSpPr/>
-          <p:nvPr/>
-        </p:nvSpPr>
-        <p:spPr>
-          <a:xfrm>
-            <a:off x="914400" y="4507992"/>
-            <a:ext cx="73152" cy="1024128"/>
+          <p:cNvPr id="9" name="Shape 7"/>
+          <p:cNvSpPr/>
+          <p:nvPr/>
+        </p:nvSpPr>
+        <p:spPr>
+          <a:xfrm>
+            <a:off x="6400800" y="1554480"/>
+            <a:ext cx="4937760" cy="73152"/>
           </a:xfrm>
           <a:prstGeom prst="rect">
             <a:avLst/>
@@ -22492,207 +19566,9 @@
           </a:ln>
         </p:spPr>
       </p:sp>
-      <p:pic>
-        <p:nvPicPr>
-          <p:cNvPr id="12" name="Image 0" descr="preencoded.png">    </p:cNvPr>
-          <p:cNvPicPr>
-            <a:picLocks noChangeAspect="1"/>
-          </p:cNvPicPr>
-          <p:nvPr/>
-        </p:nvPicPr>
-        <p:blipFill>
-          <a:blip r:embed="rId1">
-            <a:extLst>
-              <a:ext uri="{96DAC541-7B7A-43D3-8B79-37D633B846F1}">
-                <asvg:svgBlip xmlns:asvg="http://schemas.microsoft.com/office/drawing/2016/SVG/main" r:embed="rId2"/>
-              </a:ext>
-            </a:extLst>
-          </a:blip>
-          <a:stretch>
-            <a:fillRect/>
-          </a:stretch>
-        </p:blipFill>
-        <p:spPr>
-          <a:xfrm>
-            <a:off x="914400" y="1865376"/>
-            <a:ext cx="10241280" cy="1024128"/>
-          </a:xfrm>
-          <a:prstGeom prst="rect">
-            <a:avLst/>
-          </a:prstGeom>
-        </p:spPr>
-      </p:pic>
-      <p:sp>
-        <p:nvSpPr>
-          <p:cNvPr id="13" name="Shape 10"/>
-          <p:cNvSpPr/>
-          <p:nvPr/>
-        </p:nvSpPr>
-        <p:spPr>
-          <a:xfrm>
-            <a:off x="914400" y="1865376"/>
-            <a:ext cx="10241280" cy="1024128"/>
-          </a:xfrm>
-          <a:prstGeom prst="rect">
-            <a:avLst/>
-          </a:prstGeom>
-          <a:solidFill>
-            <a:srgbClr val="FBF8F3">
-              <a:alpha val="0"/>
-            </a:srgbClr>
-          </a:solidFill>
-          <a:ln w="12700">
-            <a:solidFill>
-              <a:srgbClr val="C6CCC9">
-                <a:alpha val="0"/>
-              </a:srgbClr>
-            </a:solidFill>
-            <a:prstDash val="solid"/>
-          </a:ln>
-          <a:effectLst>
-            <a:outerShdw sx="100000" sy="100000" kx="0" ky="0" algn="bl" rotWithShape="0" blurRad="12700" dist="50800" dir="2700000">
-              <a:srgbClr val="000000">
-                <a:alpha val="8000"/>
-              </a:srgbClr>
-            </a:outerShdw>
-          </a:effectLst>
-        </p:spPr>
-      </p:sp>
-      <p:pic>
-        <p:nvPicPr>
-          <p:cNvPr id="14" name="Image 1" descr="preencoded.png">    </p:cNvPr>
-          <p:cNvPicPr>
-            <a:picLocks noChangeAspect="1"/>
-          </p:cNvPicPr>
-          <p:nvPr/>
-        </p:nvPicPr>
-        <p:blipFill>
-          <a:blip r:embed="rId3">
-            <a:extLst>
-              <a:ext uri="{96DAC541-7B7A-43D3-8B79-37D633B846F1}">
-                <asvg:svgBlip xmlns:asvg="http://schemas.microsoft.com/office/drawing/2016/SVG/main" r:embed="rId4"/>
-              </a:ext>
-            </a:extLst>
-          </a:blip>
-          <a:stretch>
-            <a:fillRect/>
-          </a:stretch>
-        </p:blipFill>
-        <p:spPr>
-          <a:xfrm>
-            <a:off x="914400" y="3191256"/>
-            <a:ext cx="10241280" cy="1024128"/>
-          </a:xfrm>
-          <a:prstGeom prst="rect">
-            <a:avLst/>
-          </a:prstGeom>
-        </p:spPr>
-      </p:pic>
-      <p:sp>
-        <p:nvSpPr>
-          <p:cNvPr id="15" name="Shape 11"/>
-          <p:cNvSpPr/>
-          <p:nvPr/>
-        </p:nvSpPr>
-        <p:spPr>
-          <a:xfrm>
-            <a:off x="914400" y="3191256"/>
-            <a:ext cx="10241280" cy="1024128"/>
-          </a:xfrm>
-          <a:prstGeom prst="rect">
-            <a:avLst/>
-          </a:prstGeom>
-          <a:solidFill>
-            <a:srgbClr val="FBF8F3">
-              <a:alpha val="0"/>
-            </a:srgbClr>
-          </a:solidFill>
-          <a:ln w="12700">
-            <a:solidFill>
-              <a:srgbClr val="C6CCC9">
-                <a:alpha val="0"/>
-              </a:srgbClr>
-            </a:solidFill>
-            <a:prstDash val="solid"/>
-          </a:ln>
-          <a:effectLst>
-            <a:outerShdw sx="100000" sy="100000" kx="0" ky="0" algn="bl" rotWithShape="0" blurRad="12700" dist="50800" dir="2700000">
-              <a:srgbClr val="000000">
-                <a:alpha val="8000"/>
-              </a:srgbClr>
-            </a:outerShdw>
-          </a:effectLst>
-        </p:spPr>
-      </p:sp>
-      <p:pic>
-        <p:nvPicPr>
-          <p:cNvPr id="16" name="Image 2" descr="preencoded.png">    </p:cNvPr>
-          <p:cNvPicPr>
-            <a:picLocks noChangeAspect="1"/>
-          </p:cNvPicPr>
-          <p:nvPr/>
-        </p:nvPicPr>
-        <p:blipFill>
-          <a:blip r:embed="rId5">
-            <a:extLst>
-              <a:ext uri="{96DAC541-7B7A-43D3-8B79-37D633B846F1}">
-                <asvg:svgBlip xmlns:asvg="http://schemas.microsoft.com/office/drawing/2016/SVG/main" r:embed="rId6"/>
-              </a:ext>
-            </a:extLst>
-          </a:blip>
-          <a:stretch>
-            <a:fillRect/>
-          </a:stretch>
-        </p:blipFill>
-        <p:spPr>
-          <a:xfrm>
-            <a:off x="914400" y="4507992"/>
-            <a:ext cx="10241280" cy="1024128"/>
-          </a:xfrm>
-          <a:prstGeom prst="rect">
-            <a:avLst/>
-          </a:prstGeom>
-        </p:spPr>
-      </p:pic>
-      <p:sp>
-        <p:nvSpPr>
-          <p:cNvPr id="17" name="Shape 12"/>
-          <p:cNvSpPr/>
-          <p:nvPr/>
-        </p:nvSpPr>
-        <p:spPr>
-          <a:xfrm>
-            <a:off x="914400" y="4507992"/>
-            <a:ext cx="10241280" cy="1024128"/>
-          </a:xfrm>
-          <a:prstGeom prst="rect">
-            <a:avLst/>
-          </a:prstGeom>
-          <a:solidFill>
-            <a:srgbClr val="FBF8F3">
-              <a:alpha val="0"/>
-            </a:srgbClr>
-          </a:solidFill>
-          <a:ln w="12700">
-            <a:solidFill>
-              <a:srgbClr val="C6CCC9">
-                <a:alpha val="0"/>
-              </a:srgbClr>
-            </a:solidFill>
-            <a:prstDash val="solid"/>
-          </a:ln>
-          <a:effectLst>
-            <a:outerShdw sx="100000" sy="100000" kx="0" ky="0" algn="bl" rotWithShape="0" blurRad="12700" dist="50800" dir="2700000">
-              <a:srgbClr val="000000">
-                <a:alpha val="8000"/>
-              </a:srgbClr>
-            </a:outerShdw>
-          </a:effectLst>
-        </p:spPr>
-      </p:sp>
-      <p:sp>
-        <p:nvSpPr>
-          <p:cNvPr id="18" name="Text 13"/>
+      <p:sp>
+        <p:nvSpPr>
+          <p:cNvPr id="10" name="Text 8"/>
           <p:cNvSpPr txBox="1"/>
           <p:nvPr/>
         </p:nvSpPr>
@@ -22734,71 +19610,14 @@
       </p:sp>
       <p:sp>
         <p:nvSpPr>
-          <p:cNvPr id="19" name="Shape 14"/>
-          <p:cNvSpPr/>
-          <p:nvPr/>
-        </p:nvSpPr>
-        <p:spPr>
-          <a:xfrm>
-            <a:off x="1097280" y="2140428"/>
-            <a:ext cx="474025" cy="474025"/>
-          </a:xfrm>
-          <a:prstGeom prst="roundRect">
-            <a:avLst>
-              <a:gd name="adj" fmla="val 7716"/>
-            </a:avLst>
-          </a:prstGeom>
-          <a:solidFill>
-            <a:srgbClr val="F8F4EF"/>
-          </a:solidFill>
-          <a:ln w="12700">
-            <a:solidFill>
-              <a:srgbClr val="C6CCC9"/>
-            </a:solidFill>
-            <a:prstDash val="solid"/>
-          </a:ln>
-        </p:spPr>
-      </p:sp>
-      <p:pic>
-        <p:nvPicPr>
-          <p:cNvPr id="20" name="Image 3" descr="article icon from tabler-icons (MIT)">    </p:cNvPr>
-          <p:cNvPicPr>
-            <a:picLocks noChangeAspect="1"/>
-          </p:cNvPicPr>
-          <p:nvPr/>
-        </p:nvPicPr>
-        <p:blipFill>
-          <a:blip r:embed="rId7">
-            <a:extLst>
-              <a:ext uri="{96DAC541-7B7A-43D3-8B79-37D633B846F1}">
-                <asvg:svgBlip xmlns:asvg="http://schemas.microsoft.com/office/drawing/2016/SVG/main" r:embed="rId8"/>
-              </a:ext>
-            </a:extLst>
-          </a:blip>
-          <a:stretch>
-            <a:fillRect/>
-          </a:stretch>
-        </p:blipFill>
-        <p:spPr>
-          <a:xfrm>
-            <a:off x="1170432" y="2213580"/>
-            <a:ext cx="327721" cy="327721"/>
-          </a:xfrm>
-          <a:prstGeom prst="rect">
-            <a:avLst/>
-          </a:prstGeom>
-        </p:spPr>
-      </p:pic>
-      <p:sp>
-        <p:nvSpPr>
-          <p:cNvPr id="21" name="Text 15"/>
+          <p:cNvPr id="11" name="Text 9"/>
           <p:cNvSpPr txBox="1"/>
           <p:nvPr/>
         </p:nvSpPr>
         <p:spPr>
           <a:xfrm>
-            <a:off x="1699321" y="1957548"/>
-            <a:ext cx="9255191" cy="839785"/>
+            <a:off x="896112" y="1664208"/>
+            <a:ext cx="4791456" cy="4169664"/>
           </a:xfrm>
           <a:prstGeom prst="rect">
             <a:avLst/>
@@ -22807,7 +19626,7 @@
           <a:ln/>
         </p:spPr>
         <p:txBody>
-          <a:bodyPr wrap="square" lIns="0" tIns="25400" rIns="25400" bIns="0" rtlCol="0" anchor="ctr"/>
+          <a:bodyPr wrap="square" lIns="0" tIns="25400" rIns="25400" bIns="0" rtlCol="0" anchor="t"/>
           <a:lstStyle/>
           <a:p>
             <a:pPr algn="l" indent="0" marL="0">
@@ -22825,7 +19644,7 @@
                 <a:ea typeface="Pretendard" pitchFamily="34" charset="-122"/>
                 <a:cs typeface="Pretendard" pitchFamily="34" charset="-120"/>
               </a:rPr>
-              <a:t>Integrations</a:t>
+              <a:t>- Integrations</a:t>
             </a:r>
             <a:pPr algn="l" indent="0" marL="0">
               <a:lnSpc>
@@ -22850,71 +19669,14 @@
       </p:sp>
       <p:sp>
         <p:nvSpPr>
-          <p:cNvPr id="22" name="Shape 16"/>
-          <p:cNvSpPr/>
-          <p:nvPr/>
-        </p:nvSpPr>
-        <p:spPr>
-          <a:xfrm>
-            <a:off x="1097280" y="3466308"/>
-            <a:ext cx="474025" cy="474025"/>
-          </a:xfrm>
-          <a:prstGeom prst="roundRect">
-            <a:avLst>
-              <a:gd name="adj" fmla="val 7716"/>
-            </a:avLst>
-          </a:prstGeom>
-          <a:solidFill>
-            <a:srgbClr val="F8F4EF"/>
-          </a:solidFill>
-          <a:ln w="12700">
-            <a:solidFill>
-              <a:srgbClr val="C6CCC9"/>
-            </a:solidFill>
-            <a:prstDash val="solid"/>
-          </a:ln>
-        </p:spPr>
-      </p:sp>
-      <p:pic>
-        <p:nvPicPr>
-          <p:cNvPr id="23" name="Image 4" descr="spark icon from tabler-icons (MIT)">    </p:cNvPr>
-          <p:cNvPicPr>
-            <a:picLocks noChangeAspect="1"/>
-          </p:cNvPicPr>
-          <p:nvPr/>
-        </p:nvPicPr>
-        <p:blipFill>
-          <a:blip r:embed="rId9">
-            <a:extLst>
-              <a:ext uri="{96DAC541-7B7A-43D3-8B79-37D633B846F1}">
-                <asvg:svgBlip xmlns:asvg="http://schemas.microsoft.com/office/drawing/2016/SVG/main" r:embed="rId10"/>
-              </a:ext>
-            </a:extLst>
-          </a:blip>
-          <a:stretch>
-            <a:fillRect/>
-          </a:stretch>
-        </p:blipFill>
-        <p:spPr>
-          <a:xfrm>
-            <a:off x="1170432" y="3539460"/>
-            <a:ext cx="327721" cy="327721"/>
-          </a:xfrm>
-          <a:prstGeom prst="rect">
-            <a:avLst/>
-          </a:prstGeom>
-        </p:spPr>
-      </p:pic>
-      <p:sp>
-        <p:nvSpPr>
-          <p:cNvPr id="24" name="Text 17"/>
+          <p:cNvPr id="12" name="Text 10"/>
           <p:cNvSpPr txBox="1"/>
           <p:nvPr/>
         </p:nvSpPr>
         <p:spPr>
           <a:xfrm>
-            <a:off x="1699321" y="3283428"/>
-            <a:ext cx="9255191" cy="839785"/>
+            <a:off x="6473952" y="1664208"/>
+            <a:ext cx="4791456" cy="4169664"/>
           </a:xfrm>
           <a:prstGeom prst="rect">
             <a:avLst/>
@@ -22923,7 +19685,7 @@
           <a:ln/>
         </p:spPr>
         <p:txBody>
-          <a:bodyPr wrap="square" lIns="0" tIns="25400" rIns="25400" bIns="0" rtlCol="0" anchor="ctr"/>
+          <a:bodyPr wrap="square" lIns="0" tIns="25400" rIns="25400" bIns="0" rtlCol="0" anchor="t"/>
           <a:lstStyle/>
           <a:p>
             <a:pPr algn="l" indent="0" marL="0">
@@ -22941,7 +19703,7 @@
                 <a:ea typeface="Pretendard" pitchFamily="34" charset="-122"/>
                 <a:cs typeface="Pretendard" pitchFamily="34" charset="-120"/>
               </a:rPr>
-              <a:t>LangSmith</a:t>
+              <a:t>- LangSmith</a:t>
             </a:r>
             <a:pPr algn="l" indent="0" marL="0">
               <a:lnSpc>
@@ -22959,122 +19721,6 @@
                 <a:cs typeface="Pretendard" pitchFamily="34" charset="-120"/>
               </a:rPr>
               <a:t> Agent evals, observability, and debugging for LLM apps</a:t>
-            </a:r>
-            <a:endParaRPr lang="en-US" sz="2200" dirty="0"/>
-          </a:p>
-        </p:txBody>
-      </p:sp>
-      <p:sp>
-        <p:nvSpPr>
-          <p:cNvPr id="25" name="Shape 18"/>
-          <p:cNvSpPr/>
-          <p:nvPr/>
-        </p:nvSpPr>
-        <p:spPr>
-          <a:xfrm>
-            <a:off x="1097280" y="4783044"/>
-            <a:ext cx="474025" cy="474025"/>
-          </a:xfrm>
-          <a:prstGeom prst="roundRect">
-            <a:avLst>
-              <a:gd name="adj" fmla="val 7716"/>
-            </a:avLst>
-          </a:prstGeom>
-          <a:solidFill>
-            <a:srgbClr val="F8F4EF"/>
-          </a:solidFill>
-          <a:ln w="12700">
-            <a:solidFill>
-              <a:srgbClr val="C6CCC9"/>
-            </a:solidFill>
-            <a:prstDash val="solid"/>
-          </a:ln>
-        </p:spPr>
-      </p:sp>
-      <p:pic>
-        <p:nvPicPr>
-          <p:cNvPr id="26" name="Image 5" descr="flow icon from tabler-icons (MIT)">    </p:cNvPr>
-          <p:cNvPicPr>
-            <a:picLocks noChangeAspect="1"/>
-          </p:cNvPicPr>
-          <p:nvPr/>
-        </p:nvPicPr>
-        <p:blipFill>
-          <a:blip r:embed="rId11">
-            <a:extLst>
-              <a:ext uri="{96DAC541-7B7A-43D3-8B79-37D633B846F1}">
-                <asvg:svgBlip xmlns:asvg="http://schemas.microsoft.com/office/drawing/2016/SVG/main" r:embed="rId12"/>
-              </a:ext>
-            </a:extLst>
-          </a:blip>
-          <a:stretch>
-            <a:fillRect/>
-          </a:stretch>
-        </p:blipFill>
-        <p:spPr>
-          <a:xfrm>
-            <a:off x="1170432" y="4856196"/>
-            <a:ext cx="327721" cy="327721"/>
-          </a:xfrm>
-          <a:prstGeom prst="rect">
-            <a:avLst/>
-          </a:prstGeom>
-        </p:spPr>
-      </p:pic>
-      <p:sp>
-        <p:nvSpPr>
-          <p:cNvPr id="27" name="Text 19"/>
-          <p:cNvSpPr txBox="1"/>
-          <p:nvPr/>
-        </p:nvSpPr>
-        <p:spPr>
-          <a:xfrm>
-            <a:off x="1699321" y="4600164"/>
-            <a:ext cx="9255191" cy="839785"/>
-          </a:xfrm>
-          <a:prstGeom prst="rect">
-            <a:avLst/>
-          </a:prstGeom>
-          <a:noFill/>
-          <a:ln/>
-        </p:spPr>
-        <p:txBody>
-          <a:bodyPr wrap="square" lIns="0" tIns="25400" rIns="25400" bIns="0" rtlCol="0" anchor="ctr"/>
-          <a:lstStyle/>
-          <a:p>
-            <a:pPr algn="l" indent="0" marL="0">
-              <a:lnSpc>
-                <a:spcPct val="120000"/>
-              </a:lnSpc>
-              <a:buNone/>
-            </a:pPr>
-            <a:r>
-              <a:rPr lang="en-US" sz="2200" b="1" dirty="0">
-                <a:solidFill>
-                  <a:srgbClr val="0F766E"/>
-                </a:solidFill>
-                <a:latin typeface="Pretendard" pitchFamily="34" charset="0"/>
-                <a:ea typeface="Pretendard" pitchFamily="34" charset="-122"/>
-                <a:cs typeface="Pretendard" pitchFamily="34" charset="-120"/>
-              </a:rPr>
-              <a:t>LangSmith Deployment</a:t>
-            </a:r>
-            <a:pPr algn="l" indent="0" marL="0">
-              <a:lnSpc>
-                <a:spcPct val="120000"/>
-              </a:lnSpc>
-              <a:buNone/>
-            </a:pPr>
-            <a:r>
-              <a:rPr lang="en-US" sz="2200" dirty="0">
-                <a:solidFill>
-                  <a:srgbClr val="18181B"/>
-                </a:solidFill>
-                <a:latin typeface="Pretendard" pitchFamily="34" charset="0"/>
-                <a:ea typeface="Pretendard" pitchFamily="34" charset="-122"/>
-                <a:cs typeface="Pretendard" pitchFamily="34" charset="-120"/>
-              </a:rPr>
-              <a:t> Deploy and scale agents with a purpose-built platform for long-running, stateful workflows</a:t>
             </a:r>
             <a:endParaRPr lang="en-US" sz="2200" dirty="0"/>
           </a:p>
@@ -24330,37 +20976,8 @@
         </p:nvSpPr>
         <p:spPr>
           <a:xfrm>
-            <a:off x="786384" y="1956816"/>
-            <a:ext cx="32004" cy="3483864"/>
-          </a:xfrm>
-          <a:prstGeom prst="rect">
-            <a:avLst/>
-          </a:prstGeom>
-          <a:solidFill>
-            <a:srgbClr val="9E0F62">
-              <a:alpha val="80000"/>
-            </a:srgbClr>
-          </a:solidFill>
-          <a:ln w="12700">
-            <a:solidFill>
-              <a:srgbClr val="9E0F62">
-                <a:alpha val="0"/>
-              </a:srgbClr>
-            </a:solidFill>
-            <a:prstDash val="solid"/>
-          </a:ln>
-        </p:spPr>
-      </p:sp>
-      <p:sp>
-        <p:nvSpPr>
-          <p:cNvPr id="9" name="Shape 7"/>
-          <p:cNvSpPr/>
-          <p:nvPr/>
-        </p:nvSpPr>
-        <p:spPr>
-          <a:xfrm>
-            <a:off x="914400" y="1865376"/>
-            <a:ext cx="73152" cy="1024128"/>
+            <a:off x="822960" y="1554480"/>
+            <a:ext cx="4937760" cy="73152"/>
           </a:xfrm>
           <a:prstGeom prst="rect">
             <a:avLst/>
@@ -24380,41 +20997,14 @@
       </p:sp>
       <p:sp>
         <p:nvSpPr>
-          <p:cNvPr id="10" name="Shape 8"/>
-          <p:cNvSpPr/>
-          <p:nvPr/>
-        </p:nvSpPr>
-        <p:spPr>
-          <a:xfrm>
-            <a:off x="914400" y="3191256"/>
-            <a:ext cx="73152" cy="1024128"/>
-          </a:xfrm>
-          <a:prstGeom prst="rect">
-            <a:avLst/>
-          </a:prstGeom>
-          <a:solidFill>
-            <a:srgbClr val="9E0F62"/>
-          </a:solidFill>
-          <a:ln w="12700">
-            <a:solidFill>
-              <a:srgbClr val="9E0F62">
-                <a:alpha val="0"/>
-              </a:srgbClr>
-            </a:solidFill>
-            <a:prstDash val="solid"/>
-          </a:ln>
-        </p:spPr>
-      </p:sp>
-      <p:sp>
-        <p:nvSpPr>
-          <p:cNvPr id="11" name="Shape 9"/>
-          <p:cNvSpPr/>
-          <p:nvPr/>
-        </p:nvSpPr>
-        <p:spPr>
-          <a:xfrm>
-            <a:off x="914400" y="4507992"/>
-            <a:ext cx="73152" cy="1024128"/>
+          <p:cNvPr id="9" name="Shape 7"/>
+          <p:cNvSpPr/>
+          <p:nvPr/>
+        </p:nvSpPr>
+        <p:spPr>
+          <a:xfrm>
+            <a:off x="6400800" y="1554480"/>
+            <a:ext cx="4937760" cy="73152"/>
           </a:xfrm>
           <a:prstGeom prst="rect">
             <a:avLst/>
@@ -24432,207 +21022,9 @@
           </a:ln>
         </p:spPr>
       </p:sp>
-      <p:pic>
-        <p:nvPicPr>
-          <p:cNvPr id="12" name="Image 0" descr="preencoded.png">    </p:cNvPr>
-          <p:cNvPicPr>
-            <a:picLocks noChangeAspect="1"/>
-          </p:cNvPicPr>
-          <p:nvPr/>
-        </p:nvPicPr>
-        <p:blipFill>
-          <a:blip r:embed="rId1">
-            <a:extLst>
-              <a:ext uri="{96DAC541-7B7A-43D3-8B79-37D633B846F1}">
-                <asvg:svgBlip xmlns:asvg="http://schemas.microsoft.com/office/drawing/2016/SVG/main" r:embed="rId2"/>
-              </a:ext>
-            </a:extLst>
-          </a:blip>
-          <a:stretch>
-            <a:fillRect/>
-          </a:stretch>
-        </p:blipFill>
-        <p:spPr>
-          <a:xfrm>
-            <a:off x="914400" y="1865376"/>
-            <a:ext cx="10241280" cy="1024128"/>
-          </a:xfrm>
-          <a:prstGeom prst="rect">
-            <a:avLst/>
-          </a:prstGeom>
-        </p:spPr>
-      </p:pic>
-      <p:sp>
-        <p:nvSpPr>
-          <p:cNvPr id="13" name="Shape 10"/>
-          <p:cNvSpPr/>
-          <p:nvPr/>
-        </p:nvSpPr>
-        <p:spPr>
-          <a:xfrm>
-            <a:off x="914400" y="1865376"/>
-            <a:ext cx="10241280" cy="1024128"/>
-          </a:xfrm>
-          <a:prstGeom prst="rect">
-            <a:avLst/>
-          </a:prstGeom>
-          <a:solidFill>
-            <a:srgbClr val="FBF8F3">
-              <a:alpha val="0"/>
-            </a:srgbClr>
-          </a:solidFill>
-          <a:ln w="12700">
-            <a:solidFill>
-              <a:srgbClr val="C6CCC9">
-                <a:alpha val="0"/>
-              </a:srgbClr>
-            </a:solidFill>
-            <a:prstDash val="solid"/>
-          </a:ln>
-          <a:effectLst>
-            <a:outerShdw sx="100000" sy="100000" kx="0" ky="0" algn="bl" rotWithShape="0" blurRad="12700" dist="50800" dir="2700000">
-              <a:srgbClr val="000000">
-                <a:alpha val="8000"/>
-              </a:srgbClr>
-            </a:outerShdw>
-          </a:effectLst>
-        </p:spPr>
-      </p:sp>
-      <p:pic>
-        <p:nvPicPr>
-          <p:cNvPr id="14" name="Image 1" descr="preencoded.png">    </p:cNvPr>
-          <p:cNvPicPr>
-            <a:picLocks noChangeAspect="1"/>
-          </p:cNvPicPr>
-          <p:nvPr/>
-        </p:nvPicPr>
-        <p:blipFill>
-          <a:blip r:embed="rId3">
-            <a:extLst>
-              <a:ext uri="{96DAC541-7B7A-43D3-8B79-37D633B846F1}">
-                <asvg:svgBlip xmlns:asvg="http://schemas.microsoft.com/office/drawing/2016/SVG/main" r:embed="rId4"/>
-              </a:ext>
-            </a:extLst>
-          </a:blip>
-          <a:stretch>
-            <a:fillRect/>
-          </a:stretch>
-        </p:blipFill>
-        <p:spPr>
-          <a:xfrm>
-            <a:off x="914400" y="3191256"/>
-            <a:ext cx="10241280" cy="1024128"/>
-          </a:xfrm>
-          <a:prstGeom prst="rect">
-            <a:avLst/>
-          </a:prstGeom>
-        </p:spPr>
-      </p:pic>
-      <p:sp>
-        <p:nvSpPr>
-          <p:cNvPr id="15" name="Shape 11"/>
-          <p:cNvSpPr/>
-          <p:nvPr/>
-        </p:nvSpPr>
-        <p:spPr>
-          <a:xfrm>
-            <a:off x="914400" y="3191256"/>
-            <a:ext cx="10241280" cy="1024128"/>
-          </a:xfrm>
-          <a:prstGeom prst="rect">
-            <a:avLst/>
-          </a:prstGeom>
-          <a:solidFill>
-            <a:srgbClr val="FBF8F3">
-              <a:alpha val="0"/>
-            </a:srgbClr>
-          </a:solidFill>
-          <a:ln w="12700">
-            <a:solidFill>
-              <a:srgbClr val="C6CCC9">
-                <a:alpha val="0"/>
-              </a:srgbClr>
-            </a:solidFill>
-            <a:prstDash val="solid"/>
-          </a:ln>
-          <a:effectLst>
-            <a:outerShdw sx="100000" sy="100000" kx="0" ky="0" algn="bl" rotWithShape="0" blurRad="12700" dist="50800" dir="2700000">
-              <a:srgbClr val="000000">
-                <a:alpha val="8000"/>
-              </a:srgbClr>
-            </a:outerShdw>
-          </a:effectLst>
-        </p:spPr>
-      </p:sp>
-      <p:pic>
-        <p:nvPicPr>
-          <p:cNvPr id="16" name="Image 2" descr="preencoded.png">    </p:cNvPr>
-          <p:cNvPicPr>
-            <a:picLocks noChangeAspect="1"/>
-          </p:cNvPicPr>
-          <p:nvPr/>
-        </p:nvPicPr>
-        <p:blipFill>
-          <a:blip r:embed="rId5">
-            <a:extLst>
-              <a:ext uri="{96DAC541-7B7A-43D3-8B79-37D633B846F1}">
-                <asvg:svgBlip xmlns:asvg="http://schemas.microsoft.com/office/drawing/2016/SVG/main" r:embed="rId6"/>
-              </a:ext>
-            </a:extLst>
-          </a:blip>
-          <a:stretch>
-            <a:fillRect/>
-          </a:stretch>
-        </p:blipFill>
-        <p:spPr>
-          <a:xfrm>
-            <a:off x="914400" y="4507992"/>
-            <a:ext cx="10241280" cy="1024128"/>
-          </a:xfrm>
-          <a:prstGeom prst="rect">
-            <a:avLst/>
-          </a:prstGeom>
-        </p:spPr>
-      </p:pic>
-      <p:sp>
-        <p:nvSpPr>
-          <p:cNvPr id="17" name="Shape 12"/>
-          <p:cNvSpPr/>
-          <p:nvPr/>
-        </p:nvSpPr>
-        <p:spPr>
-          <a:xfrm>
-            <a:off x="914400" y="4507992"/>
-            <a:ext cx="10241280" cy="1024128"/>
-          </a:xfrm>
-          <a:prstGeom prst="rect">
-            <a:avLst/>
-          </a:prstGeom>
-          <a:solidFill>
-            <a:srgbClr val="FBF8F3">
-              <a:alpha val="0"/>
-            </a:srgbClr>
-          </a:solidFill>
-          <a:ln w="12700">
-            <a:solidFill>
-              <a:srgbClr val="C6CCC9">
-                <a:alpha val="0"/>
-              </a:srgbClr>
-            </a:solidFill>
-            <a:prstDash val="solid"/>
-          </a:ln>
-          <a:effectLst>
-            <a:outerShdw sx="100000" sy="100000" kx="0" ky="0" algn="bl" rotWithShape="0" blurRad="12700" dist="50800" dir="2700000">
-              <a:srgbClr val="000000">
-                <a:alpha val="8000"/>
-              </a:srgbClr>
-            </a:outerShdw>
-          </a:effectLst>
-        </p:spPr>
-      </p:sp>
-      <p:sp>
-        <p:nvSpPr>
-          <p:cNvPr id="18" name="Text 13"/>
+      <p:sp>
+        <p:nvSpPr>
+          <p:cNvPr id="10" name="Text 8"/>
           <p:cNvSpPr txBox="1"/>
           <p:nvPr/>
         </p:nvSpPr>
@@ -24674,71 +21066,14 @@
       </p:sp>
       <p:sp>
         <p:nvSpPr>
-          <p:cNvPr id="19" name="Shape 14"/>
-          <p:cNvSpPr/>
-          <p:nvPr/>
-        </p:nvSpPr>
-        <p:spPr>
-          <a:xfrm>
-            <a:off x="1097280" y="2140428"/>
-            <a:ext cx="474025" cy="474025"/>
-          </a:xfrm>
-          <a:prstGeom prst="roundRect">
-            <a:avLst>
-              <a:gd name="adj" fmla="val 7716"/>
-            </a:avLst>
-          </a:prstGeom>
-          <a:solidFill>
-            <a:srgbClr val="F8F4EF"/>
-          </a:solidFill>
-          <a:ln w="12700">
-            <a:solidFill>
-              <a:srgbClr val="C6CCC9"/>
-            </a:solidFill>
-            <a:prstDash val="solid"/>
-          </a:ln>
-        </p:spPr>
-      </p:sp>
-      <p:pic>
-        <p:nvPicPr>
-          <p:cNvPr id="20" name="Image 3" descr="verified icon from tabler-icons (MIT)">    </p:cNvPr>
-          <p:cNvPicPr>
-            <a:picLocks noChangeAspect="1"/>
-          </p:cNvPicPr>
-          <p:nvPr/>
-        </p:nvPicPr>
-        <p:blipFill>
-          <a:blip r:embed="rId7">
-            <a:extLst>
-              <a:ext uri="{96DAC541-7B7A-43D3-8B79-37D633B846F1}">
-                <asvg:svgBlip xmlns:asvg="http://schemas.microsoft.com/office/drawing/2016/SVG/main" r:embed="rId8"/>
-              </a:ext>
-            </a:extLst>
-          </a:blip>
-          <a:stretch>
-            <a:fillRect/>
-          </a:stretch>
-        </p:blipFill>
-        <p:spPr>
-          <a:xfrm>
-            <a:off x="1170432" y="2213580"/>
-            <a:ext cx="327721" cy="327721"/>
-          </a:xfrm>
-          <a:prstGeom prst="rect">
-            <a:avLst/>
-          </a:prstGeom>
-        </p:spPr>
-      </p:pic>
-      <p:sp>
-        <p:nvSpPr>
-          <p:cNvPr id="21" name="Text 15"/>
+          <p:cNvPr id="11" name="Text 9"/>
           <p:cNvSpPr txBox="1"/>
           <p:nvPr/>
         </p:nvSpPr>
         <p:spPr>
           <a:xfrm>
-            <a:off x="1699321" y="2164080"/>
-            <a:ext cx="9255191" cy="426720"/>
+            <a:off x="896112" y="3535680"/>
+            <a:ext cx="4791456" cy="426720"/>
           </a:xfrm>
           <a:prstGeom prst="rect">
             <a:avLst/>
@@ -24750,7 +21085,7 @@
           <a:bodyPr wrap="square" lIns="0" tIns="25400" rIns="25400" bIns="0" rtlCol="0" anchor="ctr"/>
           <a:lstStyle/>
           <a:p>
-            <a:pPr algn="ctr" indent="0" marL="0">
+            <a:pPr algn="l" indent="0" marL="0">
               <a:lnSpc>
                 <a:spcPct val="120000"/>
               </a:lnSpc>
@@ -24765,7 +21100,7 @@
                 <a:ea typeface="Pretendard" pitchFamily="34" charset="-122"/>
                 <a:cs typeface="Pretendard" pitchFamily="34" charset="-120"/>
               </a:rPr>
-              <a:t>checkbox "Toggle Todo" [ref=e10]</a:t>
+              <a:t>- checkbox "Toggle Todo" [ref=e10]</a:t>
             </a:r>
             <a:endParaRPr lang="en-US" sz="2200" dirty="0"/>
           </a:p>
@@ -24773,71 +21108,14 @@
       </p:sp>
       <p:sp>
         <p:nvSpPr>
-          <p:cNvPr id="22" name="Shape 16"/>
-          <p:cNvSpPr/>
-          <p:nvPr/>
-        </p:nvSpPr>
-        <p:spPr>
-          <a:xfrm>
-            <a:off x="1097280" y="3466308"/>
-            <a:ext cx="474025" cy="474025"/>
-          </a:xfrm>
-          <a:prstGeom prst="roundRect">
-            <a:avLst>
-              <a:gd name="adj" fmla="val 7716"/>
-            </a:avLst>
-          </a:prstGeom>
-          <a:solidFill>
-            <a:srgbClr val="F8F4EF"/>
-          </a:solidFill>
-          <a:ln w="12700">
-            <a:solidFill>
-              <a:srgbClr val="C6CCC9"/>
-            </a:solidFill>
-            <a:prstDash val="solid"/>
-          </a:ln>
-        </p:spPr>
-      </p:sp>
-      <p:pic>
-        <p:nvPicPr>
-          <p:cNvPr id="23" name="Image 4" descr="article icon from tabler-icons (MIT)">    </p:cNvPr>
-          <p:cNvPicPr>
-            <a:picLocks noChangeAspect="1"/>
-          </p:cNvPicPr>
-          <p:nvPr/>
-        </p:nvPicPr>
-        <p:blipFill>
-          <a:blip r:embed="rId9">
-            <a:extLst>
-              <a:ext uri="{96DAC541-7B7A-43D3-8B79-37D633B846F1}">
-                <asvg:svgBlip xmlns:asvg="http://schemas.microsoft.com/office/drawing/2016/SVG/main" r:embed="rId10"/>
-              </a:ext>
-            </a:extLst>
-          </a:blip>
-          <a:stretch>
-            <a:fillRect/>
-          </a:stretch>
-        </p:blipFill>
-        <p:spPr>
-          <a:xfrm>
-            <a:off x="1170432" y="3539460"/>
-            <a:ext cx="327721" cy="327721"/>
-          </a:xfrm>
-          <a:prstGeom prst="rect">
-            <a:avLst/>
-          </a:prstGeom>
-        </p:spPr>
-      </p:pic>
-      <p:sp>
-        <p:nvSpPr>
-          <p:cNvPr id="24" name="Text 17"/>
+          <p:cNvPr id="12" name="Text 10"/>
           <p:cNvSpPr txBox="1"/>
           <p:nvPr/>
         </p:nvSpPr>
         <p:spPr>
           <a:xfrm>
-            <a:off x="1699321" y="3283428"/>
-            <a:ext cx="9255191" cy="839785"/>
+            <a:off x="6473952" y="1664208"/>
+            <a:ext cx="4791456" cy="4169664"/>
           </a:xfrm>
           <a:prstGeom prst="rect">
             <a:avLst/>
@@ -24846,7 +21124,7 @@
           <a:ln/>
         </p:spPr>
         <p:txBody>
-          <a:bodyPr wrap="square" lIns="0" tIns="25400" rIns="25400" bIns="0" rtlCol="0" anchor="ctr"/>
+          <a:bodyPr wrap="square" lIns="0" tIns="25400" rIns="25400" bIns="0" rtlCol="0" anchor="t"/>
           <a:lstStyle/>
           <a:p>
             <a:pPr algn="l" indent="0" marL="0">
@@ -24864,7 +21142,7 @@
                 <a:ea typeface="Pretendard" pitchFamily="34" charset="-122"/>
                 <a:cs typeface="Pretendard" pitchFamily="34" charset="-120"/>
               </a:rPr>
-              <a:t>text</a:t>
+              <a:t>- text</a:t>
             </a:r>
             <a:pPr algn="l" indent="0" marL="0">
               <a:lnSpc>
@@ -24882,105 +21160,6 @@
                 <a:cs typeface="Pretendard" pitchFamily="34" charset="-120"/>
               </a:rPr>
               <a:t>  "Buy groceries"</a:t>
-            </a:r>
-            <a:endParaRPr lang="en-US" sz="2200" dirty="0"/>
-          </a:p>
-        </p:txBody>
-      </p:sp>
-      <p:sp>
-        <p:nvSpPr>
-          <p:cNvPr id="25" name="Shape 18"/>
-          <p:cNvSpPr/>
-          <p:nvPr/>
-        </p:nvSpPr>
-        <p:spPr>
-          <a:xfrm>
-            <a:off x="1097280" y="4783044"/>
-            <a:ext cx="474025" cy="474025"/>
-          </a:xfrm>
-          <a:prstGeom prst="roundRect">
-            <a:avLst>
-              <a:gd name="adj" fmla="val 7716"/>
-            </a:avLst>
-          </a:prstGeom>
-          <a:solidFill>
-            <a:srgbClr val="F8F4EF"/>
-          </a:solidFill>
-          <a:ln w="12700">
-            <a:solidFill>
-              <a:srgbClr val="C6CCC9"/>
-            </a:solidFill>
-            <a:prstDash val="solid"/>
-          </a:ln>
-        </p:spPr>
-      </p:sp>
-      <p:pic>
-        <p:nvPicPr>
-          <p:cNvPr id="26" name="Image 5" descr="code icon from tabler-icons (MIT)">    </p:cNvPr>
-          <p:cNvPicPr>
-            <a:picLocks noChangeAspect="1"/>
-          </p:cNvPicPr>
-          <p:nvPr/>
-        </p:nvPicPr>
-        <p:blipFill>
-          <a:blip r:embed="rId11">
-            <a:extLst>
-              <a:ext uri="{96DAC541-7B7A-43D3-8B79-37D633B846F1}">
-                <asvg:svgBlip xmlns:asvg="http://schemas.microsoft.com/office/drawing/2016/SVG/main" r:embed="rId12"/>
-              </a:ext>
-            </a:extLst>
-          </a:blip>
-          <a:stretch>
-            <a:fillRect/>
-          </a:stretch>
-        </p:blipFill>
-        <p:spPr>
-          <a:xfrm>
-            <a:off x="1170432" y="4856196"/>
-            <a:ext cx="327721" cy="327721"/>
-          </a:xfrm>
-          <a:prstGeom prst="rect">
-            <a:avLst/>
-          </a:prstGeom>
-        </p:spPr>
-      </p:pic>
-      <p:sp>
-        <p:nvSpPr>
-          <p:cNvPr id="27" name="Text 19"/>
-          <p:cNvSpPr txBox="1"/>
-          <p:nvPr/>
-        </p:nvSpPr>
-        <p:spPr>
-          <a:xfrm>
-            <a:off x="1699321" y="4806696"/>
-            <a:ext cx="9255191" cy="426720"/>
-          </a:xfrm>
-          <a:prstGeom prst="rect">
-            <a:avLst/>
-          </a:prstGeom>
-          <a:noFill/>
-          <a:ln/>
-        </p:spPr>
-        <p:txBody>
-          <a:bodyPr wrap="square" lIns="0" tIns="25400" rIns="25400" bIns="0" rtlCol="0" anchor="ctr"/>
-          <a:lstStyle/>
-          <a:p>
-            <a:pPr algn="ctr" indent="0" marL="0">
-              <a:lnSpc>
-                <a:spcPct val="120000"/>
-              </a:lnSpc>
-              <a:buNone/>
-            </a:pPr>
-            <a:r>
-              <a:rPr lang="en-US" sz="2200" dirty="0">
-                <a:solidFill>
-                  <a:srgbClr val="18181B"/>
-                </a:solidFill>
-                <a:latin typeface="Pretendard" pitchFamily="34" charset="0"/>
-                <a:ea typeface="Pretendard" pitchFamily="34" charset="-122"/>
-                <a:cs typeface="Pretendard" pitchFamily="34" charset="-120"/>
-              </a:rPr>
-              <a:t>CLI for coding agents</a:t>
             </a:r>
             <a:endParaRPr lang="en-US" sz="2200" dirty="0"/>
           </a:p>
@@ -25934,7 +22113,7 @@
                 <a:ea typeface="Pretendard" pitchFamily="34" charset="-122"/>
                 <a:cs typeface="Pretendard" pitchFamily="34" charset="-120"/>
               </a:rPr>
-              <a:t>06  15. if you are updating an existing checkout</a:t>
+              <a:t>06  15. PyTorch</a:t>
             </a:r>
             <a:endParaRPr lang="en-US" sz="1800" dirty="0"/>
           </a:p>
@@ -26102,7 +22281,7 @@
                 <a:ea typeface="Pretendard" pitchFamily="34" charset="-122"/>
                 <a:cs typeface="Pretendard" pitchFamily="34" charset="-120"/>
               </a:rPr>
-              <a:t>10  19. venv</a:t>
+              <a:t>10  19. Transformers</a:t>
             </a:r>
             <a:endParaRPr lang="en-US" sz="1800" dirty="0"/>
           </a:p>
@@ -26228,7 +22407,7 @@
                 <a:ea typeface="Pretendard" pitchFamily="34" charset="-122"/>
                 <a:cs typeface="Pretendard" pitchFamily="34" charset="-120"/>
               </a:rPr>
-              <a:t>13  22. plotly.py</a:t>
+              <a:t>13  22. Plotly.py</a:t>
             </a:r>
             <a:endParaRPr lang="en-US" sz="1800" dirty="0"/>
           </a:p>
@@ -30641,7 +26820,7 @@
                 <a:ea typeface="Pretendard" pitchFamily="34" charset="-122"/>
                 <a:cs typeface="Pretendard" pitchFamily="34" charset="-120"/>
               </a:rPr>
-              <a:t>15. if you are updating an existing checkout</a:t>
+              <a:t>15. PyTorch</a:t>
             </a:r>
             <a:endParaRPr lang="en-US" sz="3400" dirty="0"/>
           </a:p>
@@ -31284,37 +27463,8 @@
         </p:nvSpPr>
         <p:spPr>
           <a:xfrm>
-            <a:off x="786384" y="1956816"/>
-            <a:ext cx="32004" cy="3483864"/>
-          </a:xfrm>
-          <a:prstGeom prst="rect">
-            <a:avLst/>
-          </a:prstGeom>
-          <a:solidFill>
-            <a:srgbClr val="9E0F62">
-              <a:alpha val="80000"/>
-            </a:srgbClr>
-          </a:solidFill>
-          <a:ln w="12700">
-            <a:solidFill>
-              <a:srgbClr val="9E0F62">
-                <a:alpha val="0"/>
-              </a:srgbClr>
-            </a:solidFill>
-            <a:prstDash val="solid"/>
-          </a:ln>
-        </p:spPr>
-      </p:sp>
-      <p:sp>
-        <p:nvSpPr>
-          <p:cNvPr id="9" name="Shape 7"/>
-          <p:cNvSpPr/>
-          <p:nvPr/>
-        </p:nvSpPr>
-        <p:spPr>
-          <a:xfrm>
-            <a:off x="914400" y="1865376"/>
-            <a:ext cx="73152" cy="1024128"/>
+            <a:off x="822960" y="1554480"/>
+            <a:ext cx="4937760" cy="73152"/>
           </a:xfrm>
           <a:prstGeom prst="rect">
             <a:avLst/>
@@ -31334,41 +27484,14 @@
       </p:sp>
       <p:sp>
         <p:nvSpPr>
-          <p:cNvPr id="10" name="Shape 8"/>
-          <p:cNvSpPr/>
-          <p:nvPr/>
-        </p:nvSpPr>
-        <p:spPr>
-          <a:xfrm>
-            <a:off x="914400" y="3191256"/>
-            <a:ext cx="73152" cy="1024128"/>
-          </a:xfrm>
-          <a:prstGeom prst="rect">
-            <a:avLst/>
-          </a:prstGeom>
-          <a:solidFill>
-            <a:srgbClr val="9E0F62"/>
-          </a:solidFill>
-          <a:ln w="12700">
-            <a:solidFill>
-              <a:srgbClr val="9E0F62">
-                <a:alpha val="0"/>
-              </a:srgbClr>
-            </a:solidFill>
-            <a:prstDash val="solid"/>
-          </a:ln>
-        </p:spPr>
-      </p:sp>
-      <p:sp>
-        <p:nvSpPr>
-          <p:cNvPr id="11" name="Shape 9"/>
-          <p:cNvSpPr/>
-          <p:nvPr/>
-        </p:nvSpPr>
-        <p:spPr>
-          <a:xfrm>
-            <a:off x="914400" y="4507992"/>
-            <a:ext cx="73152" cy="1024128"/>
+          <p:cNvPr id="9" name="Shape 7"/>
+          <p:cNvSpPr/>
+          <p:nvPr/>
+        </p:nvSpPr>
+        <p:spPr>
+          <a:xfrm>
+            <a:off x="6400800" y="1554480"/>
+            <a:ext cx="4937760" cy="73152"/>
           </a:xfrm>
           <a:prstGeom prst="rect">
             <a:avLst/>
@@ -31386,207 +27509,9 @@
           </a:ln>
         </p:spPr>
       </p:sp>
-      <p:pic>
-        <p:nvPicPr>
-          <p:cNvPr id="12" name="Image 0" descr="preencoded.png">    </p:cNvPr>
-          <p:cNvPicPr>
-            <a:picLocks noChangeAspect="1"/>
-          </p:cNvPicPr>
-          <p:nvPr/>
-        </p:nvPicPr>
-        <p:blipFill>
-          <a:blip r:embed="rId1">
-            <a:extLst>
-              <a:ext uri="{96DAC541-7B7A-43D3-8B79-37D633B846F1}">
-                <asvg:svgBlip xmlns:asvg="http://schemas.microsoft.com/office/drawing/2016/SVG/main" r:embed="rId2"/>
-              </a:ext>
-            </a:extLst>
-          </a:blip>
-          <a:stretch>
-            <a:fillRect/>
-          </a:stretch>
-        </p:blipFill>
-        <p:spPr>
-          <a:xfrm>
-            <a:off x="914400" y="1865376"/>
-            <a:ext cx="10241280" cy="1024128"/>
-          </a:xfrm>
-          <a:prstGeom prst="rect">
-            <a:avLst/>
-          </a:prstGeom>
-        </p:spPr>
-      </p:pic>
-      <p:sp>
-        <p:nvSpPr>
-          <p:cNvPr id="13" name="Shape 10"/>
-          <p:cNvSpPr/>
-          <p:nvPr/>
-        </p:nvSpPr>
-        <p:spPr>
-          <a:xfrm>
-            <a:off x="914400" y="1865376"/>
-            <a:ext cx="10241280" cy="1024128"/>
-          </a:xfrm>
-          <a:prstGeom prst="rect">
-            <a:avLst/>
-          </a:prstGeom>
-          <a:solidFill>
-            <a:srgbClr val="FBF8F3">
-              <a:alpha val="0"/>
-            </a:srgbClr>
-          </a:solidFill>
-          <a:ln w="12700">
-            <a:solidFill>
-              <a:srgbClr val="C6CCC9">
-                <a:alpha val="0"/>
-              </a:srgbClr>
-            </a:solidFill>
-            <a:prstDash val="solid"/>
-          </a:ln>
-          <a:effectLst>
-            <a:outerShdw sx="100000" sy="100000" kx="0" ky="0" algn="bl" rotWithShape="0" blurRad="12700" dist="50800" dir="2700000">
-              <a:srgbClr val="000000">
-                <a:alpha val="8000"/>
-              </a:srgbClr>
-            </a:outerShdw>
-          </a:effectLst>
-        </p:spPr>
-      </p:sp>
-      <p:pic>
-        <p:nvPicPr>
-          <p:cNvPr id="14" name="Image 1" descr="preencoded.png">    </p:cNvPr>
-          <p:cNvPicPr>
-            <a:picLocks noChangeAspect="1"/>
-          </p:cNvPicPr>
-          <p:nvPr/>
-        </p:nvPicPr>
-        <p:blipFill>
-          <a:blip r:embed="rId3">
-            <a:extLst>
-              <a:ext uri="{96DAC541-7B7A-43D3-8B79-37D633B846F1}">
-                <asvg:svgBlip xmlns:asvg="http://schemas.microsoft.com/office/drawing/2016/SVG/main" r:embed="rId4"/>
-              </a:ext>
-            </a:extLst>
-          </a:blip>
-          <a:stretch>
-            <a:fillRect/>
-          </a:stretch>
-        </p:blipFill>
-        <p:spPr>
-          <a:xfrm>
-            <a:off x="914400" y="3191256"/>
-            <a:ext cx="10241280" cy="1024128"/>
-          </a:xfrm>
-          <a:prstGeom prst="rect">
-            <a:avLst/>
-          </a:prstGeom>
-        </p:spPr>
-      </p:pic>
-      <p:sp>
-        <p:nvSpPr>
-          <p:cNvPr id="15" name="Shape 11"/>
-          <p:cNvSpPr/>
-          <p:nvPr/>
-        </p:nvSpPr>
-        <p:spPr>
-          <a:xfrm>
-            <a:off x="914400" y="3191256"/>
-            <a:ext cx="10241280" cy="1024128"/>
-          </a:xfrm>
-          <a:prstGeom prst="rect">
-            <a:avLst/>
-          </a:prstGeom>
-          <a:solidFill>
-            <a:srgbClr val="FBF8F3">
-              <a:alpha val="0"/>
-            </a:srgbClr>
-          </a:solidFill>
-          <a:ln w="12700">
-            <a:solidFill>
-              <a:srgbClr val="C6CCC9">
-                <a:alpha val="0"/>
-              </a:srgbClr>
-            </a:solidFill>
-            <a:prstDash val="solid"/>
-          </a:ln>
-          <a:effectLst>
-            <a:outerShdw sx="100000" sy="100000" kx="0" ky="0" algn="bl" rotWithShape="0" blurRad="12700" dist="50800" dir="2700000">
-              <a:srgbClr val="000000">
-                <a:alpha val="8000"/>
-              </a:srgbClr>
-            </a:outerShdw>
-          </a:effectLst>
-        </p:spPr>
-      </p:sp>
-      <p:pic>
-        <p:nvPicPr>
-          <p:cNvPr id="16" name="Image 2" descr="preencoded.png">    </p:cNvPr>
-          <p:cNvPicPr>
-            <a:picLocks noChangeAspect="1"/>
-          </p:cNvPicPr>
-          <p:nvPr/>
-        </p:nvPicPr>
-        <p:blipFill>
-          <a:blip r:embed="rId5">
-            <a:extLst>
-              <a:ext uri="{96DAC541-7B7A-43D3-8B79-37D633B846F1}">
-                <asvg:svgBlip xmlns:asvg="http://schemas.microsoft.com/office/drawing/2016/SVG/main" r:embed="rId6"/>
-              </a:ext>
-            </a:extLst>
-          </a:blip>
-          <a:stretch>
-            <a:fillRect/>
-          </a:stretch>
-        </p:blipFill>
-        <p:spPr>
-          <a:xfrm>
-            <a:off x="914400" y="4507992"/>
-            <a:ext cx="10241280" cy="1024128"/>
-          </a:xfrm>
-          <a:prstGeom prst="rect">
-            <a:avLst/>
-          </a:prstGeom>
-        </p:spPr>
-      </p:pic>
-      <p:sp>
-        <p:nvSpPr>
-          <p:cNvPr id="17" name="Shape 12"/>
-          <p:cNvSpPr/>
-          <p:nvPr/>
-        </p:nvSpPr>
-        <p:spPr>
-          <a:xfrm>
-            <a:off x="914400" y="4507992"/>
-            <a:ext cx="10241280" cy="1024128"/>
-          </a:xfrm>
-          <a:prstGeom prst="rect">
-            <a:avLst/>
-          </a:prstGeom>
-          <a:solidFill>
-            <a:srgbClr val="FBF8F3">
-              <a:alpha val="0"/>
-            </a:srgbClr>
-          </a:solidFill>
-          <a:ln w="12700">
-            <a:solidFill>
-              <a:srgbClr val="C6CCC9">
-                <a:alpha val="0"/>
-              </a:srgbClr>
-            </a:solidFill>
-            <a:prstDash val="solid"/>
-          </a:ln>
-          <a:effectLst>
-            <a:outerShdw sx="100000" sy="100000" kx="0" ky="0" algn="bl" rotWithShape="0" blurRad="12700" dist="50800" dir="2700000">
-              <a:srgbClr val="000000">
-                <a:alpha val="8000"/>
-              </a:srgbClr>
-            </a:outerShdw>
-          </a:effectLst>
-        </p:spPr>
-      </p:sp>
-      <p:sp>
-        <p:nvSpPr>
-          <p:cNvPr id="18" name="Text 13"/>
+      <p:sp>
+        <p:nvSpPr>
+          <p:cNvPr id="10" name="Text 8"/>
           <p:cNvSpPr txBox="1"/>
           <p:nvPr/>
         </p:nvSpPr>
@@ -31620,7 +27545,7 @@
                 <a:ea typeface="Pretendard" pitchFamily="34" charset="-122"/>
                 <a:cs typeface="Pretendard" pitchFamily="34" charset="-120"/>
               </a:rPr>
-              <a:t>15. if you are updating an existing checkout (Cont. 2/2)</a:t>
+              <a:t>15. PyTorch (Cont. 2/2)</a:t>
             </a:r>
             <a:endParaRPr lang="en-US" sz="3400" dirty="0"/>
           </a:p>
@@ -31628,71 +27553,14 @@
       </p:sp>
       <p:sp>
         <p:nvSpPr>
-          <p:cNvPr id="19" name="Shape 14"/>
-          <p:cNvSpPr/>
-          <p:nvPr/>
-        </p:nvSpPr>
-        <p:spPr>
-          <a:xfrm>
-            <a:off x="1097280" y="2140428"/>
-            <a:ext cx="474025" cy="474025"/>
-          </a:xfrm>
-          <a:prstGeom prst="roundRect">
-            <a:avLst>
-              <a:gd name="adj" fmla="val 7716"/>
-            </a:avLst>
-          </a:prstGeom>
-          <a:solidFill>
-            <a:srgbClr val="F8F4EF"/>
-          </a:solidFill>
-          <a:ln w="12700">
-            <a:solidFill>
-              <a:srgbClr val="C6CCC9"/>
-            </a:solidFill>
-            <a:prstDash val="solid"/>
-          </a:ln>
-        </p:spPr>
-      </p:sp>
-      <p:pic>
-        <p:nvPicPr>
-          <p:cNvPr id="20" name="Image 3" descr="article icon from tabler-icons (MIT)">    </p:cNvPr>
-          <p:cNvPicPr>
-            <a:picLocks noChangeAspect="1"/>
-          </p:cNvPicPr>
-          <p:nvPr/>
-        </p:nvPicPr>
-        <p:blipFill>
-          <a:blip r:embed="rId7">
-            <a:extLst>
-              <a:ext uri="{96DAC541-7B7A-43D3-8B79-37D633B846F1}">
-                <asvg:svgBlip xmlns:asvg="http://schemas.microsoft.com/office/drawing/2016/SVG/main" r:embed="rId8"/>
-              </a:ext>
-            </a:extLst>
-          </a:blip>
-          <a:stretch>
-            <a:fillRect/>
-          </a:stretch>
-        </p:blipFill>
-        <p:spPr>
-          <a:xfrm>
-            <a:off x="1170432" y="2213580"/>
-            <a:ext cx="327721" cy="327721"/>
-          </a:xfrm>
-          <a:prstGeom prst="rect">
-            <a:avLst/>
-          </a:prstGeom>
-        </p:spPr>
-      </p:pic>
-      <p:sp>
-        <p:nvSpPr>
-          <p:cNvPr id="21" name="Text 15"/>
+          <p:cNvPr id="11" name="Text 9"/>
           <p:cNvSpPr txBox="1"/>
           <p:nvPr/>
         </p:nvSpPr>
         <p:spPr>
           <a:xfrm>
-            <a:off x="1699321" y="2164080"/>
-            <a:ext cx="9255191" cy="426720"/>
+            <a:off x="896112" y="3535680"/>
+            <a:ext cx="4791456" cy="426720"/>
           </a:xfrm>
           <a:prstGeom prst="rect">
             <a:avLst/>
@@ -31704,7 +27572,7 @@
           <a:bodyPr wrap="square" lIns="0" tIns="25400" rIns="25400" bIns="0" rtlCol="0" anchor="ctr"/>
           <a:lstStyle/>
           <a:p>
-            <a:pPr algn="ctr" indent="0" marL="0">
+            <a:pPr algn="l" indent="0" marL="0">
               <a:lnSpc>
                 <a:spcPct val="120000"/>
               </a:lnSpc>
@@ -31719,7 +27587,7 @@
                 <a:ea typeface="Pretendard" pitchFamily="34" charset="-122"/>
                 <a:cs typeface="Pretendard" pitchFamily="34" charset="-120"/>
               </a:rPr>
-              <a:t>A GPU-Ready Tensor Library</a:t>
+              <a:t>- A GPU-Ready Tensor Library</a:t>
             </a:r>
             <a:endParaRPr lang="en-US" sz="2200" dirty="0"/>
           </a:p>
@@ -31727,71 +27595,14 @@
       </p:sp>
       <p:sp>
         <p:nvSpPr>
-          <p:cNvPr id="22" name="Shape 16"/>
-          <p:cNvSpPr/>
-          <p:nvPr/>
-        </p:nvSpPr>
-        <p:spPr>
-          <a:xfrm>
-            <a:off x="1097280" y="3466308"/>
-            <a:ext cx="474025" cy="474025"/>
-          </a:xfrm>
-          <a:prstGeom prst="roundRect">
-            <a:avLst>
-              <a:gd name="adj" fmla="val 7716"/>
-            </a:avLst>
-          </a:prstGeom>
-          <a:solidFill>
-            <a:srgbClr val="F8F4EF"/>
-          </a:solidFill>
-          <a:ln w="12700">
-            <a:solidFill>
-              <a:srgbClr val="C6CCC9"/>
-            </a:solidFill>
-            <a:prstDash val="solid"/>
-          </a:ln>
-        </p:spPr>
-      </p:sp>
-      <p:pic>
-        <p:nvPicPr>
-          <p:cNvPr id="23" name="Image 4" descr="article icon from tabler-icons (MIT)">    </p:cNvPr>
-          <p:cNvPicPr>
-            <a:picLocks noChangeAspect="1"/>
-          </p:cNvPicPr>
-          <p:nvPr/>
-        </p:nvPicPr>
-        <p:blipFill>
-          <a:blip r:embed="rId9">
-            <a:extLst>
-              <a:ext uri="{96DAC541-7B7A-43D3-8B79-37D633B846F1}">
-                <asvg:svgBlip xmlns:asvg="http://schemas.microsoft.com/office/drawing/2016/SVG/main" r:embed="rId10"/>
-              </a:ext>
-            </a:extLst>
-          </a:blip>
-          <a:stretch>
-            <a:fillRect/>
-          </a:stretch>
-        </p:blipFill>
-        <p:spPr>
-          <a:xfrm>
-            <a:off x="1170432" y="3539460"/>
-            <a:ext cx="327721" cy="327721"/>
-          </a:xfrm>
-          <a:prstGeom prst="rect">
-            <a:avLst/>
-          </a:prstGeom>
-        </p:spPr>
-      </p:pic>
-      <p:sp>
-        <p:nvSpPr>
-          <p:cNvPr id="24" name="Text 17"/>
+          <p:cNvPr id="12" name="Text 10"/>
           <p:cNvSpPr txBox="1"/>
           <p:nvPr/>
         </p:nvSpPr>
         <p:spPr>
           <a:xfrm>
-            <a:off x="1699321" y="3283428"/>
-            <a:ext cx="9255191" cy="839785"/>
+            <a:off x="6473952" y="1664208"/>
+            <a:ext cx="4791456" cy="4169664"/>
           </a:xfrm>
           <a:prstGeom prst="rect">
             <a:avLst/>
@@ -31800,7 +27611,7 @@
           <a:ln/>
         </p:spPr>
         <p:txBody>
-          <a:bodyPr wrap="square" lIns="0" tIns="25400" rIns="25400" bIns="0" rtlCol="0" anchor="ctr"/>
+          <a:bodyPr wrap="square" lIns="0" tIns="25400" rIns="25400" bIns="0" rtlCol="0" anchor="t"/>
           <a:lstStyle/>
           <a:p>
             <a:pPr algn="l" indent="0" marL="0">
@@ -31818,7 +27629,7 @@
                 <a:ea typeface="Pretendard" pitchFamily="34" charset="-122"/>
                 <a:cs typeface="Pretendard" pitchFamily="34" charset="-120"/>
               </a:rPr>
-              <a:t>Dynamic Neural Networks</a:t>
+              <a:t>- Dynamic Neural Networks</a:t>
             </a:r>
             <a:pPr algn="l" indent="0" marL="0">
               <a:lnSpc>
@@ -31836,105 +27647,6 @@
                 <a:cs typeface="Pretendard" pitchFamily="34" charset="-120"/>
               </a:rPr>
               <a:t>  Tape-Based Autograd</a:t>
-            </a:r>
-            <a:endParaRPr lang="en-US" sz="2200" dirty="0"/>
-          </a:p>
-        </p:txBody>
-      </p:sp>
-      <p:sp>
-        <p:nvSpPr>
-          <p:cNvPr id="25" name="Shape 18"/>
-          <p:cNvSpPr/>
-          <p:nvPr/>
-        </p:nvSpPr>
-        <p:spPr>
-          <a:xfrm>
-            <a:off x="1097280" y="4783044"/>
-            <a:ext cx="474025" cy="474025"/>
-          </a:xfrm>
-          <a:prstGeom prst="roundRect">
-            <a:avLst>
-              <a:gd name="adj" fmla="val 7716"/>
-            </a:avLst>
-          </a:prstGeom>
-          <a:solidFill>
-            <a:srgbClr val="F8F4EF"/>
-          </a:solidFill>
-          <a:ln w="12700">
-            <a:solidFill>
-              <a:srgbClr val="C6CCC9"/>
-            </a:solidFill>
-            <a:prstDash val="solid"/>
-          </a:ln>
-        </p:spPr>
-      </p:sp>
-      <p:pic>
-        <p:nvPicPr>
-          <p:cNvPr id="26" name="Image 5" descr="article icon from tabler-icons (MIT)">    </p:cNvPr>
-          <p:cNvPicPr>
-            <a:picLocks noChangeAspect="1"/>
-          </p:cNvPicPr>
-          <p:nvPr/>
-        </p:nvPicPr>
-        <p:blipFill>
-          <a:blip r:embed="rId11">
-            <a:extLst>
-              <a:ext uri="{96DAC541-7B7A-43D3-8B79-37D633B846F1}">
-                <asvg:svgBlip xmlns:asvg="http://schemas.microsoft.com/office/drawing/2016/SVG/main" r:embed="rId12"/>
-              </a:ext>
-            </a:extLst>
-          </a:blip>
-          <a:stretch>
-            <a:fillRect/>
-          </a:stretch>
-        </p:blipFill>
-        <p:spPr>
-          <a:xfrm>
-            <a:off x="1170432" y="4856196"/>
-            <a:ext cx="327721" cy="327721"/>
-          </a:xfrm>
-          <a:prstGeom prst="rect">
-            <a:avLst/>
-          </a:prstGeom>
-        </p:spPr>
-      </p:pic>
-      <p:sp>
-        <p:nvSpPr>
-          <p:cNvPr id="27" name="Text 19"/>
-          <p:cNvSpPr txBox="1"/>
-          <p:nvPr/>
-        </p:nvSpPr>
-        <p:spPr>
-          <a:xfrm>
-            <a:off x="1699321" y="4806696"/>
-            <a:ext cx="9255191" cy="426720"/>
-          </a:xfrm>
-          <a:prstGeom prst="rect">
-            <a:avLst/>
-          </a:prstGeom>
-          <a:noFill/>
-          <a:ln/>
-        </p:spPr>
-        <p:txBody>
-          <a:bodyPr wrap="square" lIns="0" tIns="25400" rIns="25400" bIns="0" rtlCol="0" anchor="ctr"/>
-          <a:lstStyle/>
-          <a:p>
-            <a:pPr algn="ctr" indent="0" marL="0">
-              <a:lnSpc>
-                <a:spcPct val="120000"/>
-              </a:lnSpc>
-              <a:buNone/>
-            </a:pPr>
-            <a:r>
-              <a:rPr lang="en-US" sz="2200" dirty="0">
-                <a:solidFill>
-                  <a:srgbClr val="18181B"/>
-                </a:solidFill>
-                <a:latin typeface="Pretendard" pitchFamily="34" charset="0"/>
-                <a:ea typeface="Pretendard" pitchFamily="34" charset="-122"/>
-                <a:cs typeface="Pretendard" pitchFamily="34" charset="-120"/>
-              </a:rPr>
-              <a:t>Imperative Experiences</a:t>
             </a:r>
             <a:endParaRPr lang="en-US" sz="2200" dirty="0"/>
           </a:p>
@@ -33190,37 +28902,8 @@
         </p:nvSpPr>
         <p:spPr>
           <a:xfrm>
-            <a:off x="786384" y="1956816"/>
-            <a:ext cx="32004" cy="3483864"/>
-          </a:xfrm>
-          <a:prstGeom prst="rect">
-            <a:avLst/>
-          </a:prstGeom>
-          <a:solidFill>
-            <a:srgbClr val="9E0F62">
-              <a:alpha val="80000"/>
-            </a:srgbClr>
-          </a:solidFill>
-          <a:ln w="12700">
-            <a:solidFill>
-              <a:srgbClr val="9E0F62">
-                <a:alpha val="0"/>
-              </a:srgbClr>
-            </a:solidFill>
-            <a:prstDash val="solid"/>
-          </a:ln>
-        </p:spPr>
-      </p:sp>
-      <p:sp>
-        <p:nvSpPr>
-          <p:cNvPr id="9" name="Shape 7"/>
-          <p:cNvSpPr/>
-          <p:nvPr/>
-        </p:nvSpPr>
-        <p:spPr>
-          <a:xfrm>
-            <a:off x="914400" y="1865376"/>
-            <a:ext cx="73152" cy="1024128"/>
+            <a:off x="822960" y="1554480"/>
+            <a:ext cx="4937760" cy="73152"/>
           </a:xfrm>
           <a:prstGeom prst="rect">
             <a:avLst/>
@@ -33240,41 +28923,14 @@
       </p:sp>
       <p:sp>
         <p:nvSpPr>
-          <p:cNvPr id="10" name="Shape 8"/>
-          <p:cNvSpPr/>
-          <p:nvPr/>
-        </p:nvSpPr>
-        <p:spPr>
-          <a:xfrm>
-            <a:off x="914400" y="3191256"/>
-            <a:ext cx="73152" cy="1024128"/>
-          </a:xfrm>
-          <a:prstGeom prst="rect">
-            <a:avLst/>
-          </a:prstGeom>
-          <a:solidFill>
-            <a:srgbClr val="9E0F62"/>
-          </a:solidFill>
-          <a:ln w="12700">
-            <a:solidFill>
-              <a:srgbClr val="9E0F62">
-                <a:alpha val="0"/>
-              </a:srgbClr>
-            </a:solidFill>
-            <a:prstDash val="solid"/>
-          </a:ln>
-        </p:spPr>
-      </p:sp>
-      <p:sp>
-        <p:nvSpPr>
-          <p:cNvPr id="11" name="Shape 9"/>
-          <p:cNvSpPr/>
-          <p:nvPr/>
-        </p:nvSpPr>
-        <p:spPr>
-          <a:xfrm>
-            <a:off x="914400" y="4507992"/>
-            <a:ext cx="73152" cy="1024128"/>
+          <p:cNvPr id="9" name="Shape 7"/>
+          <p:cNvSpPr/>
+          <p:nvPr/>
+        </p:nvSpPr>
+        <p:spPr>
+          <a:xfrm>
+            <a:off x="6400800" y="1554480"/>
+            <a:ext cx="4937760" cy="73152"/>
           </a:xfrm>
           <a:prstGeom prst="rect">
             <a:avLst/>
@@ -33292,207 +28948,9 @@
           </a:ln>
         </p:spPr>
       </p:sp>
-      <p:pic>
-        <p:nvPicPr>
-          <p:cNvPr id="12" name="Image 0" descr="preencoded.png">    </p:cNvPr>
-          <p:cNvPicPr>
-            <a:picLocks noChangeAspect="1"/>
-          </p:cNvPicPr>
-          <p:nvPr/>
-        </p:nvPicPr>
-        <p:blipFill>
-          <a:blip r:embed="rId1">
-            <a:extLst>
-              <a:ext uri="{96DAC541-7B7A-43D3-8B79-37D633B846F1}">
-                <asvg:svgBlip xmlns:asvg="http://schemas.microsoft.com/office/drawing/2016/SVG/main" r:embed="rId2"/>
-              </a:ext>
-            </a:extLst>
-          </a:blip>
-          <a:stretch>
-            <a:fillRect/>
-          </a:stretch>
-        </p:blipFill>
-        <p:spPr>
-          <a:xfrm>
-            <a:off x="914400" y="1865376"/>
-            <a:ext cx="10241280" cy="1024128"/>
-          </a:xfrm>
-          <a:prstGeom prst="rect">
-            <a:avLst/>
-          </a:prstGeom>
-        </p:spPr>
-      </p:pic>
-      <p:sp>
-        <p:nvSpPr>
-          <p:cNvPr id="13" name="Shape 10"/>
-          <p:cNvSpPr/>
-          <p:nvPr/>
-        </p:nvSpPr>
-        <p:spPr>
-          <a:xfrm>
-            <a:off x="914400" y="1865376"/>
-            <a:ext cx="10241280" cy="1024128"/>
-          </a:xfrm>
-          <a:prstGeom prst="rect">
-            <a:avLst/>
-          </a:prstGeom>
-          <a:solidFill>
-            <a:srgbClr val="FBF8F3">
-              <a:alpha val="0"/>
-            </a:srgbClr>
-          </a:solidFill>
-          <a:ln w="12700">
-            <a:solidFill>
-              <a:srgbClr val="C6CCC9">
-                <a:alpha val="0"/>
-              </a:srgbClr>
-            </a:solidFill>
-            <a:prstDash val="solid"/>
-          </a:ln>
-          <a:effectLst>
-            <a:outerShdw sx="100000" sy="100000" kx="0" ky="0" algn="bl" rotWithShape="0" blurRad="12700" dist="50800" dir="2700000">
-              <a:srgbClr val="000000">
-                <a:alpha val="8000"/>
-              </a:srgbClr>
-            </a:outerShdw>
-          </a:effectLst>
-        </p:spPr>
-      </p:sp>
-      <p:pic>
-        <p:nvPicPr>
-          <p:cNvPr id="14" name="Image 1" descr="preencoded.png">    </p:cNvPr>
-          <p:cNvPicPr>
-            <a:picLocks noChangeAspect="1"/>
-          </p:cNvPicPr>
-          <p:nvPr/>
-        </p:nvPicPr>
-        <p:blipFill>
-          <a:blip r:embed="rId3">
-            <a:extLst>
-              <a:ext uri="{96DAC541-7B7A-43D3-8B79-37D633B846F1}">
-                <asvg:svgBlip xmlns:asvg="http://schemas.microsoft.com/office/drawing/2016/SVG/main" r:embed="rId4"/>
-              </a:ext>
-            </a:extLst>
-          </a:blip>
-          <a:stretch>
-            <a:fillRect/>
-          </a:stretch>
-        </p:blipFill>
-        <p:spPr>
-          <a:xfrm>
-            <a:off x="914400" y="3191256"/>
-            <a:ext cx="10241280" cy="1024128"/>
-          </a:xfrm>
-          <a:prstGeom prst="rect">
-            <a:avLst/>
-          </a:prstGeom>
-        </p:spPr>
-      </p:pic>
-      <p:sp>
-        <p:nvSpPr>
-          <p:cNvPr id="15" name="Shape 11"/>
-          <p:cNvSpPr/>
-          <p:nvPr/>
-        </p:nvSpPr>
-        <p:spPr>
-          <a:xfrm>
-            <a:off x="914400" y="3191256"/>
-            <a:ext cx="10241280" cy="1024128"/>
-          </a:xfrm>
-          <a:prstGeom prst="rect">
-            <a:avLst/>
-          </a:prstGeom>
-          <a:solidFill>
-            <a:srgbClr val="FBF8F3">
-              <a:alpha val="0"/>
-            </a:srgbClr>
-          </a:solidFill>
-          <a:ln w="12700">
-            <a:solidFill>
-              <a:srgbClr val="C6CCC9">
-                <a:alpha val="0"/>
-              </a:srgbClr>
-            </a:solidFill>
-            <a:prstDash val="solid"/>
-          </a:ln>
-          <a:effectLst>
-            <a:outerShdw sx="100000" sy="100000" kx="0" ky="0" algn="bl" rotWithShape="0" blurRad="12700" dist="50800" dir="2700000">
-              <a:srgbClr val="000000">
-                <a:alpha val="8000"/>
-              </a:srgbClr>
-            </a:outerShdw>
-          </a:effectLst>
-        </p:spPr>
-      </p:sp>
-      <p:pic>
-        <p:nvPicPr>
-          <p:cNvPr id="16" name="Image 2" descr="preencoded.png">    </p:cNvPr>
-          <p:cNvPicPr>
-            <a:picLocks noChangeAspect="1"/>
-          </p:cNvPicPr>
-          <p:nvPr/>
-        </p:nvPicPr>
-        <p:blipFill>
-          <a:blip r:embed="rId5">
-            <a:extLst>
-              <a:ext uri="{96DAC541-7B7A-43D3-8B79-37D633B846F1}">
-                <asvg:svgBlip xmlns:asvg="http://schemas.microsoft.com/office/drawing/2016/SVG/main" r:embed="rId6"/>
-              </a:ext>
-            </a:extLst>
-          </a:blip>
-          <a:stretch>
-            <a:fillRect/>
-          </a:stretch>
-        </p:blipFill>
-        <p:spPr>
-          <a:xfrm>
-            <a:off x="914400" y="4507992"/>
-            <a:ext cx="10241280" cy="1024128"/>
-          </a:xfrm>
-          <a:prstGeom prst="rect">
-            <a:avLst/>
-          </a:prstGeom>
-        </p:spPr>
-      </p:pic>
-      <p:sp>
-        <p:nvSpPr>
-          <p:cNvPr id="17" name="Shape 12"/>
-          <p:cNvSpPr/>
-          <p:nvPr/>
-        </p:nvSpPr>
-        <p:spPr>
-          <a:xfrm>
-            <a:off x="914400" y="4507992"/>
-            <a:ext cx="10241280" cy="1024128"/>
-          </a:xfrm>
-          <a:prstGeom prst="rect">
-            <a:avLst/>
-          </a:prstGeom>
-          <a:solidFill>
-            <a:srgbClr val="FBF8F3">
-              <a:alpha val="0"/>
-            </a:srgbClr>
-          </a:solidFill>
-          <a:ln w="12700">
-            <a:solidFill>
-              <a:srgbClr val="C6CCC9">
-                <a:alpha val="0"/>
-              </a:srgbClr>
-            </a:solidFill>
-            <a:prstDash val="solid"/>
-          </a:ln>
-          <a:effectLst>
-            <a:outerShdw sx="100000" sy="100000" kx="0" ky="0" algn="bl" rotWithShape="0" blurRad="12700" dist="50800" dir="2700000">
-              <a:srgbClr val="000000">
-                <a:alpha val="8000"/>
-              </a:srgbClr>
-            </a:outerShdw>
-          </a:effectLst>
-        </p:spPr>
-      </p:sp>
-      <p:sp>
-        <p:nvSpPr>
-          <p:cNvPr id="18" name="Text 13"/>
+      <p:sp>
+        <p:nvSpPr>
+          <p:cNvPr id="10" name="Text 8"/>
           <p:cNvSpPr txBox="1"/>
           <p:nvPr/>
         </p:nvSpPr>
@@ -33534,71 +28992,14 @@
       </p:sp>
       <p:sp>
         <p:nvSpPr>
-          <p:cNvPr id="19" name="Shape 14"/>
-          <p:cNvSpPr/>
-          <p:nvPr/>
-        </p:nvSpPr>
-        <p:spPr>
-          <a:xfrm>
-            <a:off x="1097280" y="2140428"/>
-            <a:ext cx="474025" cy="474025"/>
-          </a:xfrm>
-          <a:prstGeom prst="roundRect">
-            <a:avLst>
-              <a:gd name="adj" fmla="val 7716"/>
-            </a:avLst>
-          </a:prstGeom>
-          <a:solidFill>
-            <a:srgbClr val="F8F4EF"/>
-          </a:solidFill>
-          <a:ln w="12700">
-            <a:solidFill>
-              <a:srgbClr val="C6CCC9"/>
-            </a:solidFill>
-            <a:prstDash val="solid"/>
-          </a:ln>
-        </p:spPr>
-      </p:sp>
-      <p:pic>
-        <p:nvPicPr>
-          <p:cNvPr id="20" name="Image 3" descr="flow icon from tabler-icons (MIT)">    </p:cNvPr>
-          <p:cNvPicPr>
-            <a:picLocks noChangeAspect="1"/>
-          </p:cNvPicPr>
-          <p:nvPr/>
-        </p:nvPicPr>
-        <p:blipFill>
-          <a:blip r:embed="rId7">
-            <a:extLst>
-              <a:ext uri="{96DAC541-7B7A-43D3-8B79-37D633B846F1}">
-                <asvg:svgBlip xmlns:asvg="http://schemas.microsoft.com/office/drawing/2016/SVG/main" r:embed="rId8"/>
-              </a:ext>
-            </a:extLst>
-          </a:blip>
-          <a:stretch>
-            <a:fillRect/>
-          </a:stretch>
-        </p:blipFill>
-        <p:spPr>
-          <a:xfrm>
-            <a:off x="1170432" y="2213580"/>
-            <a:ext cx="327721" cy="327721"/>
-          </a:xfrm>
-          <a:prstGeom prst="rect">
-            <a:avLst/>
-          </a:prstGeom>
-        </p:spPr>
-      </p:pic>
-      <p:sp>
-        <p:nvSpPr>
-          <p:cNvPr id="21" name="Text 15"/>
+          <p:cNvPr id="11" name="Text 9"/>
           <p:cNvSpPr txBox="1"/>
           <p:nvPr/>
         </p:nvSpPr>
         <p:spPr>
           <a:xfrm>
-            <a:off x="1699321" y="2164080"/>
-            <a:ext cx="9255191" cy="426720"/>
+            <a:off x="896112" y="3368040"/>
+            <a:ext cx="4791456" cy="762000"/>
           </a:xfrm>
           <a:prstGeom prst="rect">
             <a:avLst/>
@@ -33610,7 +29011,7 @@
           <a:bodyPr wrap="square" lIns="0" tIns="25400" rIns="25400" bIns="0" rtlCol="0" anchor="ctr"/>
           <a:lstStyle/>
           <a:p>
-            <a:pPr algn="ctr" indent="0" marL="0">
+            <a:pPr algn="l" indent="0" marL="0">
               <a:lnSpc>
                 <a:spcPct val="120000"/>
               </a:lnSpc>
@@ -33625,7 +29026,7 @@
                 <a:ea typeface="Pretendard" pitchFamily="34" charset="-122"/>
                 <a:cs typeface="Pretendard" pitchFamily="34" charset="-120"/>
               </a:rPr>
-              <a:t>Run TensorFlow tests and ensure they pass.</a:t>
+              <a:t>- Run TensorFlow tests and ensure they pass.</a:t>
             </a:r>
             <a:endParaRPr lang="en-US" sz="2200" dirty="0"/>
           </a:p>
@@ -33633,71 +29034,14 @@
       </p:sp>
       <p:sp>
         <p:nvSpPr>
-          <p:cNvPr id="22" name="Shape 16"/>
-          <p:cNvSpPr/>
-          <p:nvPr/>
-        </p:nvSpPr>
-        <p:spPr>
-          <a:xfrm>
-            <a:off x="1097280" y="3466308"/>
-            <a:ext cx="474025" cy="474025"/>
-          </a:xfrm>
-          <a:prstGeom prst="roundRect">
-            <a:avLst>
-              <a:gd name="adj" fmla="val 7716"/>
-            </a:avLst>
-          </a:prstGeom>
-          <a:solidFill>
-            <a:srgbClr val="F8F4EF"/>
-          </a:solidFill>
-          <a:ln w="12700">
-            <a:solidFill>
-              <a:srgbClr val="C6CCC9"/>
-            </a:solidFill>
-            <a:prstDash val="solid"/>
-          </a:ln>
-        </p:spPr>
-      </p:sp>
-      <p:pic>
-        <p:nvPicPr>
-          <p:cNvPr id="23" name="Image 4" descr="flow icon from tabler-icons (MIT)">    </p:cNvPr>
-          <p:cNvPicPr>
-            <a:picLocks noChangeAspect="1"/>
-          </p:cNvPicPr>
-          <p:nvPr/>
-        </p:nvPicPr>
-        <p:blipFill>
-          <a:blip r:embed="rId9">
-            <a:extLst>
-              <a:ext uri="{96DAC541-7B7A-43D3-8B79-37D633B846F1}">
-                <asvg:svgBlip xmlns:asvg="http://schemas.microsoft.com/office/drawing/2016/SVG/main" r:embed="rId10"/>
-              </a:ext>
-            </a:extLst>
-          </a:blip>
-          <a:stretch>
-            <a:fillRect/>
-          </a:stretch>
-        </p:blipFill>
-        <p:spPr>
-          <a:xfrm>
-            <a:off x="1170432" y="3539460"/>
-            <a:ext cx="327721" cy="327721"/>
-          </a:xfrm>
-          <a:prstGeom prst="rect">
-            <a:avLst/>
-          </a:prstGeom>
-        </p:spPr>
-      </p:pic>
-      <p:sp>
-        <p:nvSpPr>
-          <p:cNvPr id="24" name="Text 17"/>
+          <p:cNvPr id="12" name="Text 10"/>
           <p:cNvSpPr txBox="1"/>
           <p:nvPr/>
         </p:nvSpPr>
         <p:spPr>
           <a:xfrm>
-            <a:off x="1699321" y="3489960"/>
-            <a:ext cx="9255191" cy="426720"/>
+            <a:off x="6473952" y="3535680"/>
+            <a:ext cx="4791456" cy="426720"/>
           </a:xfrm>
           <a:prstGeom prst="rect">
             <a:avLst/>
@@ -33709,7 +29053,7 @@
           <a:bodyPr wrap="square" lIns="0" tIns="25400" rIns="25400" bIns="0" rtlCol="0" anchor="ctr"/>
           <a:lstStyle/>
           <a:p>
-            <a:pPr algn="ctr" indent="0" marL="0">
+            <a:pPr algn="l" indent="0" marL="0">
               <a:lnSpc>
                 <a:spcPct val="120000"/>
               </a:lnSpc>
@@ -33724,106 +29068,7 @@
                 <a:ea typeface="Pretendard" pitchFamily="34" charset="-122"/>
                 <a:cs typeface="Pretendard" pitchFamily="34" charset="-120"/>
               </a:rPr>
-              <a:t>Build the TensorFlow pip</a:t>
-            </a:r>
-            <a:endParaRPr lang="en-US" sz="2200" dirty="0"/>
-          </a:p>
-        </p:txBody>
-      </p:sp>
-      <p:sp>
-        <p:nvSpPr>
-          <p:cNvPr id="25" name="Shape 18"/>
-          <p:cNvSpPr/>
-          <p:nvPr/>
-        </p:nvSpPr>
-        <p:spPr>
-          <a:xfrm>
-            <a:off x="1097280" y="4783044"/>
-            <a:ext cx="474025" cy="474025"/>
-          </a:xfrm>
-          <a:prstGeom prst="roundRect">
-            <a:avLst>
-              <a:gd name="adj" fmla="val 7716"/>
-            </a:avLst>
-          </a:prstGeom>
-          <a:solidFill>
-            <a:srgbClr val="F8F4EF"/>
-          </a:solidFill>
-          <a:ln w="12700">
-            <a:solidFill>
-              <a:srgbClr val="C6CCC9"/>
-            </a:solidFill>
-            <a:prstDash val="solid"/>
-          </a:ln>
-        </p:spPr>
-      </p:sp>
-      <p:pic>
-        <p:nvPicPr>
-          <p:cNvPr id="26" name="Image 5" descr="flow icon from tabler-icons (MIT)">    </p:cNvPr>
-          <p:cNvPicPr>
-            <a:picLocks noChangeAspect="1"/>
-          </p:cNvPicPr>
-          <p:nvPr/>
-        </p:nvPicPr>
-        <p:blipFill>
-          <a:blip r:embed="rId11">
-            <a:extLst>
-              <a:ext uri="{96DAC541-7B7A-43D3-8B79-37D633B846F1}">
-                <asvg:svgBlip xmlns:asvg="http://schemas.microsoft.com/office/drawing/2016/SVG/main" r:embed="rId12"/>
-              </a:ext>
-            </a:extLst>
-          </a:blip>
-          <a:stretch>
-            <a:fillRect/>
-          </a:stretch>
-        </p:blipFill>
-        <p:spPr>
-          <a:xfrm>
-            <a:off x="1170432" y="4856196"/>
-            <a:ext cx="327721" cy="327721"/>
-          </a:xfrm>
-          <a:prstGeom prst="rect">
-            <a:avLst/>
-          </a:prstGeom>
-        </p:spPr>
-      </p:pic>
-      <p:sp>
-        <p:nvSpPr>
-          <p:cNvPr id="27" name="Text 19"/>
-          <p:cNvSpPr txBox="1"/>
-          <p:nvPr/>
-        </p:nvSpPr>
-        <p:spPr>
-          <a:xfrm>
-            <a:off x="1699321" y="4806696"/>
-            <a:ext cx="9255191" cy="426720"/>
-          </a:xfrm>
-          <a:prstGeom prst="rect">
-            <a:avLst/>
-          </a:prstGeom>
-          <a:noFill/>
-          <a:ln/>
-        </p:spPr>
-        <p:txBody>
-          <a:bodyPr wrap="square" lIns="0" tIns="25400" rIns="25400" bIns="0" rtlCol="0" anchor="ctr"/>
-          <a:lstStyle/>
-          <a:p>
-            <a:pPr algn="ctr" indent="0" marL="0">
-              <a:lnSpc>
-                <a:spcPct val="120000"/>
-              </a:lnSpc>
-              <a:buNone/>
-            </a:pPr>
-            <a:r>
-              <a:rPr lang="en-US" sz="2200" dirty="0">
-                <a:solidFill>
-                  <a:srgbClr val="18181B"/>
-                </a:solidFill>
-                <a:latin typeface="Pretendard" pitchFamily="34" charset="0"/>
-                <a:ea typeface="Pretendard" pitchFamily="34" charset="-122"/>
-                <a:cs typeface="Pretendard" pitchFamily="34" charset="-120"/>
-              </a:rPr>
-              <a:t>TensorFlow Tutorials</a:t>
+              <a:t>- Build the TensorFlow pip</a:t>
             </a:r>
             <a:endParaRPr lang="en-US" sz="2200" dirty="0"/>
           </a:p>
@@ -35976,37 +31221,8 @@
         </p:nvSpPr>
         <p:spPr>
           <a:xfrm>
-            <a:off x="786384" y="1956816"/>
-            <a:ext cx="32004" cy="3483864"/>
-          </a:xfrm>
-          <a:prstGeom prst="rect">
-            <a:avLst/>
-          </a:prstGeom>
-          <a:solidFill>
-            <a:srgbClr val="9E0F62">
-              <a:alpha val="80000"/>
-            </a:srgbClr>
-          </a:solidFill>
-          <a:ln w="12700">
-            <a:solidFill>
-              <a:srgbClr val="9E0F62">
-                <a:alpha val="0"/>
-              </a:srgbClr>
-            </a:solidFill>
-            <a:prstDash val="solid"/>
-          </a:ln>
-        </p:spPr>
-      </p:sp>
-      <p:sp>
-        <p:nvSpPr>
-          <p:cNvPr id="9" name="Shape 7"/>
-          <p:cNvSpPr/>
-          <p:nvPr/>
-        </p:nvSpPr>
-        <p:spPr>
-          <a:xfrm>
-            <a:off x="914400" y="1865376"/>
-            <a:ext cx="73152" cy="1024128"/>
+            <a:off x="822960" y="1554480"/>
+            <a:ext cx="4937760" cy="73152"/>
           </a:xfrm>
           <a:prstGeom prst="rect">
             <a:avLst/>
@@ -36026,41 +31242,14 @@
       </p:sp>
       <p:sp>
         <p:nvSpPr>
-          <p:cNvPr id="10" name="Shape 8"/>
-          <p:cNvSpPr/>
-          <p:nvPr/>
-        </p:nvSpPr>
-        <p:spPr>
-          <a:xfrm>
-            <a:off x="914400" y="3191256"/>
-            <a:ext cx="73152" cy="1024128"/>
-          </a:xfrm>
-          <a:prstGeom prst="rect">
-            <a:avLst/>
-          </a:prstGeom>
-          <a:solidFill>
-            <a:srgbClr val="9E0F62"/>
-          </a:solidFill>
-          <a:ln w="12700">
-            <a:solidFill>
-              <a:srgbClr val="9E0F62">
-                <a:alpha val="0"/>
-              </a:srgbClr>
-            </a:solidFill>
-            <a:prstDash val="solid"/>
-          </a:ln>
-        </p:spPr>
-      </p:sp>
-      <p:sp>
-        <p:nvSpPr>
-          <p:cNvPr id="11" name="Shape 9"/>
-          <p:cNvSpPr/>
-          <p:nvPr/>
-        </p:nvSpPr>
-        <p:spPr>
-          <a:xfrm>
-            <a:off x="914400" y="4507992"/>
-            <a:ext cx="73152" cy="1024128"/>
+          <p:cNvPr id="9" name="Shape 7"/>
+          <p:cNvSpPr/>
+          <p:nvPr/>
+        </p:nvSpPr>
+        <p:spPr>
+          <a:xfrm>
+            <a:off x="6400800" y="1554480"/>
+            <a:ext cx="4937760" cy="73152"/>
           </a:xfrm>
           <a:prstGeom prst="rect">
             <a:avLst/>
@@ -36078,207 +31267,9 @@
           </a:ln>
         </p:spPr>
       </p:sp>
-      <p:pic>
-        <p:nvPicPr>
-          <p:cNvPr id="12" name="Image 0" descr="preencoded.png">    </p:cNvPr>
-          <p:cNvPicPr>
-            <a:picLocks noChangeAspect="1"/>
-          </p:cNvPicPr>
-          <p:nvPr/>
-        </p:nvPicPr>
-        <p:blipFill>
-          <a:blip r:embed="rId1">
-            <a:extLst>
-              <a:ext uri="{96DAC541-7B7A-43D3-8B79-37D633B846F1}">
-                <asvg:svgBlip xmlns:asvg="http://schemas.microsoft.com/office/drawing/2016/SVG/main" r:embed="rId2"/>
-              </a:ext>
-            </a:extLst>
-          </a:blip>
-          <a:stretch>
-            <a:fillRect/>
-          </a:stretch>
-        </p:blipFill>
-        <p:spPr>
-          <a:xfrm>
-            <a:off x="914400" y="1865376"/>
-            <a:ext cx="10241280" cy="1024128"/>
-          </a:xfrm>
-          <a:prstGeom prst="rect">
-            <a:avLst/>
-          </a:prstGeom>
-        </p:spPr>
-      </p:pic>
-      <p:sp>
-        <p:nvSpPr>
-          <p:cNvPr id="13" name="Shape 10"/>
-          <p:cNvSpPr/>
-          <p:nvPr/>
-        </p:nvSpPr>
-        <p:spPr>
-          <a:xfrm>
-            <a:off x="914400" y="1865376"/>
-            <a:ext cx="10241280" cy="1024128"/>
-          </a:xfrm>
-          <a:prstGeom prst="rect">
-            <a:avLst/>
-          </a:prstGeom>
-          <a:solidFill>
-            <a:srgbClr val="FBF8F3">
-              <a:alpha val="0"/>
-            </a:srgbClr>
-          </a:solidFill>
-          <a:ln w="12700">
-            <a:solidFill>
-              <a:srgbClr val="C6CCC9">
-                <a:alpha val="0"/>
-              </a:srgbClr>
-            </a:solidFill>
-            <a:prstDash val="solid"/>
-          </a:ln>
-          <a:effectLst>
-            <a:outerShdw sx="100000" sy="100000" kx="0" ky="0" algn="bl" rotWithShape="0" blurRad="12700" dist="50800" dir="2700000">
-              <a:srgbClr val="000000">
-                <a:alpha val="8000"/>
-              </a:srgbClr>
-            </a:outerShdw>
-          </a:effectLst>
-        </p:spPr>
-      </p:sp>
-      <p:pic>
-        <p:nvPicPr>
-          <p:cNvPr id="14" name="Image 1" descr="preencoded.png">    </p:cNvPr>
-          <p:cNvPicPr>
-            <a:picLocks noChangeAspect="1"/>
-          </p:cNvPicPr>
-          <p:nvPr/>
-        </p:nvPicPr>
-        <p:blipFill>
-          <a:blip r:embed="rId3">
-            <a:extLst>
-              <a:ext uri="{96DAC541-7B7A-43D3-8B79-37D633B846F1}">
-                <asvg:svgBlip xmlns:asvg="http://schemas.microsoft.com/office/drawing/2016/SVG/main" r:embed="rId4"/>
-              </a:ext>
-            </a:extLst>
-          </a:blip>
-          <a:stretch>
-            <a:fillRect/>
-          </a:stretch>
-        </p:blipFill>
-        <p:spPr>
-          <a:xfrm>
-            <a:off x="914400" y="3191256"/>
-            <a:ext cx="10241280" cy="1024128"/>
-          </a:xfrm>
-          <a:prstGeom prst="rect">
-            <a:avLst/>
-          </a:prstGeom>
-        </p:spPr>
-      </p:pic>
-      <p:sp>
-        <p:nvSpPr>
-          <p:cNvPr id="15" name="Shape 11"/>
-          <p:cNvSpPr/>
-          <p:nvPr/>
-        </p:nvSpPr>
-        <p:spPr>
-          <a:xfrm>
-            <a:off x="914400" y="3191256"/>
-            <a:ext cx="10241280" cy="1024128"/>
-          </a:xfrm>
-          <a:prstGeom prst="rect">
-            <a:avLst/>
-          </a:prstGeom>
-          <a:solidFill>
-            <a:srgbClr val="FBF8F3">
-              <a:alpha val="0"/>
-            </a:srgbClr>
-          </a:solidFill>
-          <a:ln w="12700">
-            <a:solidFill>
-              <a:srgbClr val="C6CCC9">
-                <a:alpha val="0"/>
-              </a:srgbClr>
-            </a:solidFill>
-            <a:prstDash val="solid"/>
-          </a:ln>
-          <a:effectLst>
-            <a:outerShdw sx="100000" sy="100000" kx="0" ky="0" algn="bl" rotWithShape="0" blurRad="12700" dist="50800" dir="2700000">
-              <a:srgbClr val="000000">
-                <a:alpha val="8000"/>
-              </a:srgbClr>
-            </a:outerShdw>
-          </a:effectLst>
-        </p:spPr>
-      </p:sp>
-      <p:pic>
-        <p:nvPicPr>
-          <p:cNvPr id="16" name="Image 2" descr="preencoded.png">    </p:cNvPr>
-          <p:cNvPicPr>
-            <a:picLocks noChangeAspect="1"/>
-          </p:cNvPicPr>
-          <p:nvPr/>
-        </p:nvPicPr>
-        <p:blipFill>
-          <a:blip r:embed="rId5">
-            <a:extLst>
-              <a:ext uri="{96DAC541-7B7A-43D3-8B79-37D633B846F1}">
-                <asvg:svgBlip xmlns:asvg="http://schemas.microsoft.com/office/drawing/2016/SVG/main" r:embed="rId6"/>
-              </a:ext>
-            </a:extLst>
-          </a:blip>
-          <a:stretch>
-            <a:fillRect/>
-          </a:stretch>
-        </p:blipFill>
-        <p:spPr>
-          <a:xfrm>
-            <a:off x="914400" y="4507992"/>
-            <a:ext cx="10241280" cy="1024128"/>
-          </a:xfrm>
-          <a:prstGeom prst="rect">
-            <a:avLst/>
-          </a:prstGeom>
-        </p:spPr>
-      </p:pic>
-      <p:sp>
-        <p:nvSpPr>
-          <p:cNvPr id="17" name="Shape 12"/>
-          <p:cNvSpPr/>
-          <p:nvPr/>
-        </p:nvSpPr>
-        <p:spPr>
-          <a:xfrm>
-            <a:off x="914400" y="4507992"/>
-            <a:ext cx="10241280" cy="1024128"/>
-          </a:xfrm>
-          <a:prstGeom prst="rect">
-            <a:avLst/>
-          </a:prstGeom>
-          <a:solidFill>
-            <a:srgbClr val="FBF8F3">
-              <a:alpha val="0"/>
-            </a:srgbClr>
-          </a:solidFill>
-          <a:ln w="12700">
-            <a:solidFill>
-              <a:srgbClr val="C6CCC9">
-                <a:alpha val="0"/>
-              </a:srgbClr>
-            </a:solidFill>
-            <a:prstDash val="solid"/>
-          </a:ln>
-          <a:effectLst>
-            <a:outerShdw sx="100000" sy="100000" kx="0" ky="0" algn="bl" rotWithShape="0" blurRad="12700" dist="50800" dir="2700000">
-              <a:srgbClr val="000000">
-                <a:alpha val="8000"/>
-              </a:srgbClr>
-            </a:outerShdw>
-          </a:effectLst>
-        </p:spPr>
-      </p:sp>
-      <p:sp>
-        <p:nvSpPr>
-          <p:cNvPr id="18" name="Text 13"/>
+      <p:sp>
+        <p:nvSpPr>
+          <p:cNvPr id="10" name="Text 8"/>
           <p:cNvSpPr txBox="1"/>
           <p:nvPr/>
         </p:nvSpPr>
@@ -36320,170 +31311,14 @@
       </p:sp>
       <p:sp>
         <p:nvSpPr>
-          <p:cNvPr id="19" name="Shape 14"/>
-          <p:cNvSpPr/>
-          <p:nvPr/>
-        </p:nvSpPr>
-        <p:spPr>
-          <a:xfrm>
-            <a:off x="1097280" y="2140428"/>
-            <a:ext cx="474025" cy="474025"/>
-          </a:xfrm>
-          <a:prstGeom prst="roundRect">
-            <a:avLst>
-              <a:gd name="adj" fmla="val 7716"/>
-            </a:avLst>
-          </a:prstGeom>
-          <a:solidFill>
-            <a:srgbClr val="F8F4EF"/>
-          </a:solidFill>
-          <a:ln w="12700">
-            <a:solidFill>
-              <a:srgbClr val="C6CCC9"/>
-            </a:solidFill>
-            <a:prstDash val="solid"/>
-          </a:ln>
-        </p:spPr>
-      </p:sp>
-      <p:pic>
-        <p:nvPicPr>
-          <p:cNvPr id="20" name="Image 3" descr="article icon from tabler-icons (MIT)">    </p:cNvPr>
-          <p:cNvPicPr>
-            <a:picLocks noChangeAspect="1"/>
-          </p:cNvPicPr>
-          <p:nvPr/>
-        </p:nvPicPr>
-        <p:blipFill>
-          <a:blip r:embed="rId7">
-            <a:extLst>
-              <a:ext uri="{96DAC541-7B7A-43D3-8B79-37D633B846F1}">
-                <asvg:svgBlip xmlns:asvg="http://schemas.microsoft.com/office/drawing/2016/SVG/main" r:embed="rId8"/>
-              </a:ext>
-            </a:extLst>
-          </a:blip>
-          <a:stretch>
-            <a:fillRect/>
-          </a:stretch>
-        </p:blipFill>
-        <p:spPr>
-          <a:xfrm>
-            <a:off x="1170432" y="2213580"/>
-            <a:ext cx="327721" cy="327721"/>
-          </a:xfrm>
-          <a:prstGeom prst="rect">
-            <a:avLst/>
-          </a:prstGeom>
-        </p:spPr>
-      </p:pic>
-      <p:sp>
-        <p:nvSpPr>
-          <p:cNvPr id="21" name="Text 15"/>
+          <p:cNvPr id="11" name="Text 9"/>
           <p:cNvSpPr txBox="1"/>
           <p:nvPr/>
         </p:nvSpPr>
         <p:spPr>
           <a:xfrm>
-            <a:off x="1699321" y="2164080"/>
-            <a:ext cx="9255191" cy="426720"/>
-          </a:xfrm>
-          <a:prstGeom prst="rect">
-            <a:avLst/>
-          </a:prstGeom>
-          <a:noFill/>
-          <a:ln/>
-        </p:spPr>
-        <p:txBody>
-          <a:bodyPr wrap="square" lIns="0" tIns="25400" rIns="25400" bIns="0" rtlCol="0" anchor="ctr"/>
-          <a:lstStyle/>
-          <a:p>
-            <a:pPr algn="ctr" indent="0" marL="0">
-              <a:lnSpc>
-                <a:spcPct val="120000"/>
-              </a:lnSpc>
-              <a:buNone/>
-            </a:pPr>
-            <a:r>
-              <a:rPr lang="en-US" sz="2200" dirty="0">
-                <a:solidFill>
-                  <a:srgbClr val="18181B"/>
-                </a:solidFill>
-                <a:latin typeface="Pretendard" pitchFamily="34" charset="0"/>
-                <a:ea typeface="Pretendard" pitchFamily="34" charset="-122"/>
-                <a:cs typeface="Pretendard" pitchFamily="34" charset="-120"/>
-              </a:rPr>
-              <a:t>Contributing to pandas</a:t>
-            </a:r>
-            <a:endParaRPr lang="en-US" sz="2200" dirty="0"/>
-          </a:p>
-        </p:txBody>
-      </p:sp>
-      <p:sp>
-        <p:nvSpPr>
-          <p:cNvPr id="22" name="Shape 16"/>
-          <p:cNvSpPr/>
-          <p:nvPr/>
-        </p:nvSpPr>
-        <p:spPr>
-          <a:xfrm>
-            <a:off x="1097280" y="3466308"/>
-            <a:ext cx="474025" cy="474025"/>
-          </a:xfrm>
-          <a:prstGeom prst="roundRect">
-            <a:avLst>
-              <a:gd name="adj" fmla="val 7716"/>
-            </a:avLst>
-          </a:prstGeom>
-          <a:solidFill>
-            <a:srgbClr val="F8F4EF"/>
-          </a:solidFill>
-          <a:ln w="12700">
-            <a:solidFill>
-              <a:srgbClr val="C6CCC9"/>
-            </a:solidFill>
-            <a:prstDash val="solid"/>
-          </a:ln>
-        </p:spPr>
-      </p:sp>
-      <p:pic>
-        <p:nvPicPr>
-          <p:cNvPr id="23" name="Image 4" descr="chart icon from tabler-icons (MIT)">    </p:cNvPr>
-          <p:cNvPicPr>
-            <a:picLocks noChangeAspect="1"/>
-          </p:cNvPicPr>
-          <p:nvPr/>
-        </p:nvPicPr>
-        <p:blipFill>
-          <a:blip r:embed="rId9">
-            <a:extLst>
-              <a:ext uri="{96DAC541-7B7A-43D3-8B79-37D633B846F1}">
-                <asvg:svgBlip xmlns:asvg="http://schemas.microsoft.com/office/drawing/2016/SVG/main" r:embed="rId10"/>
-              </a:ext>
-            </a:extLst>
-          </a:blip>
-          <a:stretch>
-            <a:fillRect/>
-          </a:stretch>
-        </p:blipFill>
-        <p:spPr>
-          <a:xfrm>
-            <a:off x="1170432" y="3539460"/>
-            <a:ext cx="327721" cy="327721"/>
-          </a:xfrm>
-          <a:prstGeom prst="rect">
-            <a:avLst/>
-          </a:prstGeom>
-        </p:spPr>
-      </p:pic>
-      <p:sp>
-        <p:nvSpPr>
-          <p:cNvPr id="24" name="Text 17"/>
-          <p:cNvSpPr txBox="1"/>
-          <p:nvPr/>
-        </p:nvSpPr>
-        <p:spPr>
-          <a:xfrm>
-            <a:off x="1699321" y="3283428"/>
-            <a:ext cx="9255191" cy="839785"/>
+            <a:off x="896112" y="3535680"/>
+            <a:ext cx="4791456" cy="426720"/>
           </a:xfrm>
           <a:prstGeom prst="rect">
             <a:avLst/>
@@ -36510,7 +31345,49 @@
                 <a:ea typeface="Pretendard" pitchFamily="34" charset="-122"/>
                 <a:cs typeface="Pretendard" pitchFamily="34" charset="-120"/>
               </a:rPr>
-              <a:t>Easy handling of [</a:t>
+              <a:t>- Contributing to pandas</a:t>
+            </a:r>
+            <a:endParaRPr lang="en-US" sz="2200" dirty="0"/>
+          </a:p>
+        </p:txBody>
+      </p:sp>
+      <p:sp>
+        <p:nvSpPr>
+          <p:cNvPr id="12" name="Text 10"/>
+          <p:cNvSpPr txBox="1"/>
+          <p:nvPr/>
+        </p:nvSpPr>
+        <p:spPr>
+          <a:xfrm>
+            <a:off x="6473952" y="1664208"/>
+            <a:ext cx="4791456" cy="4169664"/>
+          </a:xfrm>
+          <a:prstGeom prst="rect">
+            <a:avLst/>
+          </a:prstGeom>
+          <a:noFill/>
+          <a:ln/>
+        </p:spPr>
+        <p:txBody>
+          <a:bodyPr wrap="square" lIns="0" tIns="25400" rIns="25400" bIns="0" rtlCol="0" anchor="t"/>
+          <a:lstStyle/>
+          <a:p>
+            <a:pPr algn="l" indent="0" marL="0">
+              <a:lnSpc>
+                <a:spcPct val="120000"/>
+              </a:lnSpc>
+              <a:buNone/>
+            </a:pPr>
+            <a:r>
+              <a:rPr lang="en-US" sz="2200" dirty="0">
+                <a:solidFill>
+                  <a:srgbClr val="18181B"/>
+                </a:solidFill>
+                <a:latin typeface="Pretendard" pitchFamily="34" charset="0"/>
+                <a:ea typeface="Pretendard" pitchFamily="34" charset="-122"/>
+                <a:cs typeface="Pretendard" pitchFamily="34" charset="-120"/>
+              </a:rPr>
+              <a:t>- Easy handling of [</a:t>
             </a:r>
             <a:pPr algn="l" indent="0" marL="0">
               <a:lnSpc>
@@ -36545,122 +31422,6 @@
                 <a:cs typeface="Pretendard" pitchFamily="34" charset="-120"/>
               </a:rPr>
               <a:t>][missing-data] (represented as</a:t>
-            </a:r>
-            <a:endParaRPr lang="en-US" sz="2200" dirty="0"/>
-          </a:p>
-        </p:txBody>
-      </p:sp>
-      <p:sp>
-        <p:nvSpPr>
-          <p:cNvPr id="25" name="Shape 18"/>
-          <p:cNvSpPr/>
-          <p:nvPr/>
-        </p:nvSpPr>
-        <p:spPr>
-          <a:xfrm>
-            <a:off x="1097280" y="4783044"/>
-            <a:ext cx="474025" cy="474025"/>
-          </a:xfrm>
-          <a:prstGeom prst="roundRect">
-            <a:avLst>
-              <a:gd name="adj" fmla="val 7716"/>
-            </a:avLst>
-          </a:prstGeom>
-          <a:solidFill>
-            <a:srgbClr val="F8F4EF"/>
-          </a:solidFill>
-          <a:ln w="12700">
-            <a:solidFill>
-              <a:srgbClr val="C6CCC9"/>
-            </a:solidFill>
-            <a:prstDash val="solid"/>
-          </a:ln>
-        </p:spPr>
-      </p:sp>
-      <p:pic>
-        <p:nvPicPr>
-          <p:cNvPr id="26" name="Image 5" descr="table icon from tabler-icons (MIT)">    </p:cNvPr>
-          <p:cNvPicPr>
-            <a:picLocks noChangeAspect="1"/>
-          </p:cNvPicPr>
-          <p:nvPr/>
-        </p:nvPicPr>
-        <p:blipFill>
-          <a:blip r:embed="rId11">
-            <a:extLst>
-              <a:ext uri="{96DAC541-7B7A-43D3-8B79-37D633B846F1}">
-                <asvg:svgBlip xmlns:asvg="http://schemas.microsoft.com/office/drawing/2016/SVG/main" r:embed="rId12"/>
-              </a:ext>
-            </a:extLst>
-          </a:blip>
-          <a:stretch>
-            <a:fillRect/>
-          </a:stretch>
-        </p:blipFill>
-        <p:spPr>
-          <a:xfrm>
-            <a:off x="1170432" y="4856196"/>
-            <a:ext cx="327721" cy="327721"/>
-          </a:xfrm>
-          <a:prstGeom prst="rect">
-            <a:avLst/>
-          </a:prstGeom>
-        </p:spPr>
-      </p:pic>
-      <p:sp>
-        <p:nvSpPr>
-          <p:cNvPr id="27" name="Text 19"/>
-          <p:cNvSpPr txBox="1"/>
-          <p:nvPr/>
-        </p:nvSpPr>
-        <p:spPr>
-          <a:xfrm>
-            <a:off x="1699321" y="4600164"/>
-            <a:ext cx="9255191" cy="839785"/>
-          </a:xfrm>
-          <a:prstGeom prst="rect">
-            <a:avLst/>
-          </a:prstGeom>
-          <a:noFill/>
-          <a:ln/>
-        </p:spPr>
-        <p:txBody>
-          <a:bodyPr wrap="square" lIns="0" tIns="25400" rIns="25400" bIns="0" rtlCol="0" anchor="ctr"/>
-          <a:lstStyle/>
-          <a:p>
-            <a:pPr algn="l" indent="0" marL="0">
-              <a:lnSpc>
-                <a:spcPct val="120000"/>
-              </a:lnSpc>
-              <a:buNone/>
-            </a:pPr>
-            <a:r>
-              <a:rPr lang="en-US" sz="2200" b="1" dirty="0">
-                <a:solidFill>
-                  <a:srgbClr val="0F766E"/>
-                </a:solidFill>
-                <a:latin typeface="Pretendard" pitchFamily="34" charset="0"/>
-                <a:ea typeface="Pretendard" pitchFamily="34" charset="-122"/>
-                <a:cs typeface="Pretendard" pitchFamily="34" charset="-120"/>
-              </a:rPr>
-              <a:t>Size mutability</a:t>
-            </a:r>
-            <a:pPr algn="l" indent="0" marL="0">
-              <a:lnSpc>
-                <a:spcPct val="120000"/>
-              </a:lnSpc>
-              <a:buNone/>
-            </a:pPr>
-            <a:r>
-              <a:rPr lang="en-US" sz="2200" dirty="0">
-                <a:solidFill>
-                  <a:srgbClr val="18181B"/>
-                </a:solidFill>
-                <a:latin typeface="Pretendard" pitchFamily="34" charset="0"/>
-                <a:ea typeface="Pretendard" pitchFamily="34" charset="-122"/>
-                <a:cs typeface="Pretendard" pitchFamily="34" charset="-120"/>
-              </a:rPr>
-              <a:t>  columns can be [**inserted and</a:t>
             </a:r>
             <a:endParaRPr lang="en-US" sz="2200" dirty="0"/>
           </a:p>
@@ -38925,8 +33686,8 @@
         </p:nvSpPr>
         <p:spPr>
           <a:xfrm>
-            <a:off x="822960" y="1463040"/>
-            <a:ext cx="73152" cy="1920240"/>
+            <a:off x="822960" y="1554480"/>
+            <a:ext cx="4937760" cy="73152"/>
           </a:xfrm>
           <a:prstGeom prst="rect">
             <a:avLst/>
@@ -38952,35 +33713,8 @@
         </p:nvSpPr>
         <p:spPr>
           <a:xfrm>
-            <a:off x="6309360" y="1463040"/>
-            <a:ext cx="73152" cy="1920240"/>
-          </a:xfrm>
-          <a:prstGeom prst="rect">
-            <a:avLst/>
-          </a:prstGeom>
-          <a:solidFill>
-            <a:srgbClr val="9E0F62"/>
-          </a:solidFill>
-          <a:ln w="12700">
-            <a:solidFill>
-              <a:srgbClr val="9E0F62">
-                <a:alpha val="0"/>
-              </a:srgbClr>
-            </a:solidFill>
-            <a:prstDash val="solid"/>
-          </a:ln>
-        </p:spPr>
-      </p:sp>
-      <p:sp>
-        <p:nvSpPr>
-          <p:cNvPr id="10" name="Shape 8"/>
-          <p:cNvSpPr/>
-          <p:nvPr/>
-        </p:nvSpPr>
-        <p:spPr>
-          <a:xfrm>
-            <a:off x="822960" y="3749040"/>
-            <a:ext cx="73152" cy="1920240"/>
+            <a:off x="6400800" y="1554480"/>
+            <a:ext cx="4937760" cy="73152"/>
           </a:xfrm>
           <a:prstGeom prst="rect">
             <a:avLst/>
@@ -39000,298 +33734,7 @@
       </p:sp>
       <p:sp>
         <p:nvSpPr>
-          <p:cNvPr id="11" name="Shape 9"/>
-          <p:cNvSpPr/>
-          <p:nvPr/>
-        </p:nvSpPr>
-        <p:spPr>
-          <a:xfrm>
-            <a:off x="6309360" y="3749040"/>
-            <a:ext cx="73152" cy="1920240"/>
-          </a:xfrm>
-          <a:prstGeom prst="rect">
-            <a:avLst/>
-          </a:prstGeom>
-          <a:solidFill>
-            <a:srgbClr val="9E0F62"/>
-          </a:solidFill>
-          <a:ln w="12700">
-            <a:solidFill>
-              <a:srgbClr val="9E0F62">
-                <a:alpha val="0"/>
-              </a:srgbClr>
-            </a:solidFill>
-            <a:prstDash val="solid"/>
-          </a:ln>
-        </p:spPr>
-      </p:sp>
-      <p:pic>
-        <p:nvPicPr>
-          <p:cNvPr id="12" name="Image 0" descr="preencoded.png">    </p:cNvPr>
-          <p:cNvPicPr>
-            <a:picLocks noChangeAspect="1"/>
-          </p:cNvPicPr>
-          <p:nvPr/>
-        </p:nvPicPr>
-        <p:blipFill>
-          <a:blip r:embed="rId1">
-            <a:extLst>
-              <a:ext uri="{96DAC541-7B7A-43D3-8B79-37D633B846F1}">
-                <asvg:svgBlip xmlns:asvg="http://schemas.microsoft.com/office/drawing/2016/SVG/main" r:embed="rId2"/>
-              </a:ext>
-            </a:extLst>
-          </a:blip>
-          <a:stretch>
-            <a:fillRect/>
-          </a:stretch>
-        </p:blipFill>
-        <p:spPr>
-          <a:xfrm>
-            <a:off x="822960" y="1463040"/>
-            <a:ext cx="5029200" cy="1920240"/>
-          </a:xfrm>
-          <a:prstGeom prst="rect">
-            <a:avLst/>
-          </a:prstGeom>
-        </p:spPr>
-      </p:pic>
-      <p:sp>
-        <p:nvSpPr>
-          <p:cNvPr id="13" name="Shape 10"/>
-          <p:cNvSpPr/>
-          <p:nvPr/>
-        </p:nvSpPr>
-        <p:spPr>
-          <a:xfrm>
-            <a:off x="822960" y="1463040"/>
-            <a:ext cx="5029200" cy="1920240"/>
-          </a:xfrm>
-          <a:prstGeom prst="rect">
-            <a:avLst/>
-          </a:prstGeom>
-          <a:solidFill>
-            <a:srgbClr val="FBF8F3">
-              <a:alpha val="0"/>
-            </a:srgbClr>
-          </a:solidFill>
-          <a:ln w="12700">
-            <a:solidFill>
-              <a:srgbClr val="C6CCC9">
-                <a:alpha val="0"/>
-              </a:srgbClr>
-            </a:solidFill>
-            <a:prstDash val="solid"/>
-          </a:ln>
-          <a:effectLst>
-            <a:outerShdw sx="100000" sy="100000" kx="0" ky="0" algn="bl" rotWithShape="0" blurRad="12700" dist="50800" dir="2700000">
-              <a:srgbClr val="000000">
-                <a:alpha val="8000"/>
-              </a:srgbClr>
-            </a:outerShdw>
-          </a:effectLst>
-        </p:spPr>
-      </p:sp>
-      <p:pic>
-        <p:nvPicPr>
-          <p:cNvPr id="14" name="Image 1" descr="preencoded.png">    </p:cNvPr>
-          <p:cNvPicPr>
-            <a:picLocks noChangeAspect="1"/>
-          </p:cNvPicPr>
-          <p:nvPr/>
-        </p:nvPicPr>
-        <p:blipFill>
-          <a:blip r:embed="rId3">
-            <a:extLst>
-              <a:ext uri="{96DAC541-7B7A-43D3-8B79-37D633B846F1}">
-                <asvg:svgBlip xmlns:asvg="http://schemas.microsoft.com/office/drawing/2016/SVG/main" r:embed="rId4"/>
-              </a:ext>
-            </a:extLst>
-          </a:blip>
-          <a:stretch>
-            <a:fillRect/>
-          </a:stretch>
-        </p:blipFill>
-        <p:spPr>
-          <a:xfrm>
-            <a:off x="6309360" y="1463040"/>
-            <a:ext cx="5029200" cy="1920240"/>
-          </a:xfrm>
-          <a:prstGeom prst="rect">
-            <a:avLst/>
-          </a:prstGeom>
-        </p:spPr>
-      </p:pic>
-      <p:sp>
-        <p:nvSpPr>
-          <p:cNvPr id="15" name="Shape 11"/>
-          <p:cNvSpPr/>
-          <p:nvPr/>
-        </p:nvSpPr>
-        <p:spPr>
-          <a:xfrm>
-            <a:off x="6309360" y="1463040"/>
-            <a:ext cx="5029200" cy="1920240"/>
-          </a:xfrm>
-          <a:prstGeom prst="rect">
-            <a:avLst/>
-          </a:prstGeom>
-          <a:solidFill>
-            <a:srgbClr val="FBF8F3">
-              <a:alpha val="0"/>
-            </a:srgbClr>
-          </a:solidFill>
-          <a:ln w="12700">
-            <a:solidFill>
-              <a:srgbClr val="C6CCC9">
-                <a:alpha val="0"/>
-              </a:srgbClr>
-            </a:solidFill>
-            <a:prstDash val="solid"/>
-          </a:ln>
-          <a:effectLst>
-            <a:outerShdw sx="100000" sy="100000" kx="0" ky="0" algn="bl" rotWithShape="0" blurRad="12700" dist="50800" dir="2700000">
-              <a:srgbClr val="000000">
-                <a:alpha val="8000"/>
-              </a:srgbClr>
-            </a:outerShdw>
-          </a:effectLst>
-        </p:spPr>
-      </p:sp>
-      <p:pic>
-        <p:nvPicPr>
-          <p:cNvPr id="16" name="Image 2" descr="preencoded.png">    </p:cNvPr>
-          <p:cNvPicPr>
-            <a:picLocks noChangeAspect="1"/>
-          </p:cNvPicPr>
-          <p:nvPr/>
-        </p:nvPicPr>
-        <p:blipFill>
-          <a:blip r:embed="rId5">
-            <a:extLst>
-              <a:ext uri="{96DAC541-7B7A-43D3-8B79-37D633B846F1}">
-                <asvg:svgBlip xmlns:asvg="http://schemas.microsoft.com/office/drawing/2016/SVG/main" r:embed="rId6"/>
-              </a:ext>
-            </a:extLst>
-          </a:blip>
-          <a:stretch>
-            <a:fillRect/>
-          </a:stretch>
-        </p:blipFill>
-        <p:spPr>
-          <a:xfrm>
-            <a:off x="822960" y="3749040"/>
-            <a:ext cx="5029200" cy="1920240"/>
-          </a:xfrm>
-          <a:prstGeom prst="rect">
-            <a:avLst/>
-          </a:prstGeom>
-        </p:spPr>
-      </p:pic>
-      <p:sp>
-        <p:nvSpPr>
-          <p:cNvPr id="17" name="Shape 12"/>
-          <p:cNvSpPr/>
-          <p:nvPr/>
-        </p:nvSpPr>
-        <p:spPr>
-          <a:xfrm>
-            <a:off x="822960" y="3749040"/>
-            <a:ext cx="5029200" cy="1920240"/>
-          </a:xfrm>
-          <a:prstGeom prst="rect">
-            <a:avLst/>
-          </a:prstGeom>
-          <a:solidFill>
-            <a:srgbClr val="FBF8F3">
-              <a:alpha val="0"/>
-            </a:srgbClr>
-          </a:solidFill>
-          <a:ln w="12700">
-            <a:solidFill>
-              <a:srgbClr val="C6CCC9">
-                <a:alpha val="0"/>
-              </a:srgbClr>
-            </a:solidFill>
-            <a:prstDash val="solid"/>
-          </a:ln>
-          <a:effectLst>
-            <a:outerShdw sx="100000" sy="100000" kx="0" ky="0" algn="bl" rotWithShape="0" blurRad="12700" dist="50800" dir="2700000">
-              <a:srgbClr val="000000">
-                <a:alpha val="8000"/>
-              </a:srgbClr>
-            </a:outerShdw>
-          </a:effectLst>
-        </p:spPr>
-      </p:sp>
-      <p:pic>
-        <p:nvPicPr>
-          <p:cNvPr id="18" name="Image 3" descr="preencoded.png">    </p:cNvPr>
-          <p:cNvPicPr>
-            <a:picLocks noChangeAspect="1"/>
-          </p:cNvPicPr>
-          <p:nvPr/>
-        </p:nvPicPr>
-        <p:blipFill>
-          <a:blip r:embed="rId7">
-            <a:extLst>
-              <a:ext uri="{96DAC541-7B7A-43D3-8B79-37D633B846F1}">
-                <asvg:svgBlip xmlns:asvg="http://schemas.microsoft.com/office/drawing/2016/SVG/main" r:embed="rId8"/>
-              </a:ext>
-            </a:extLst>
-          </a:blip>
-          <a:stretch>
-            <a:fillRect/>
-          </a:stretch>
-        </p:blipFill>
-        <p:spPr>
-          <a:xfrm>
-            <a:off x="6309360" y="3749040"/>
-            <a:ext cx="5029200" cy="1920240"/>
-          </a:xfrm>
-          <a:prstGeom prst="rect">
-            <a:avLst/>
-          </a:prstGeom>
-        </p:spPr>
-      </p:pic>
-      <p:sp>
-        <p:nvSpPr>
-          <p:cNvPr id="19" name="Shape 13"/>
-          <p:cNvSpPr/>
-          <p:nvPr/>
-        </p:nvSpPr>
-        <p:spPr>
-          <a:xfrm>
-            <a:off x="6309360" y="3749040"/>
-            <a:ext cx="5029200" cy="1920240"/>
-          </a:xfrm>
-          <a:prstGeom prst="rect">
-            <a:avLst/>
-          </a:prstGeom>
-          <a:solidFill>
-            <a:srgbClr val="FBF8F3">
-              <a:alpha val="0"/>
-            </a:srgbClr>
-          </a:solidFill>
-          <a:ln w="12700">
-            <a:solidFill>
-              <a:srgbClr val="C6CCC9">
-                <a:alpha val="0"/>
-              </a:srgbClr>
-            </a:solidFill>
-            <a:prstDash val="solid"/>
-          </a:ln>
-          <a:effectLst>
-            <a:outerShdw sx="100000" sy="100000" kx="0" ky="0" algn="bl" rotWithShape="0" blurRad="12700" dist="50800" dir="2700000">
-              <a:srgbClr val="000000">
-                <a:alpha val="8000"/>
-              </a:srgbClr>
-            </a:outerShdw>
-          </a:effectLst>
-        </p:spPr>
-      </p:sp>
-      <p:sp>
-        <p:nvSpPr>
-          <p:cNvPr id="20" name="Text 14"/>
+          <p:cNvPr id="10" name="Text 8"/>
           <p:cNvSpPr txBox="1"/>
           <p:nvPr/>
         </p:nvSpPr>
@@ -39333,71 +33776,14 @@
       </p:sp>
       <p:sp>
         <p:nvSpPr>
-          <p:cNvPr id="21" name="Shape 15"/>
-          <p:cNvSpPr/>
-          <p:nvPr/>
-        </p:nvSpPr>
-        <p:spPr>
-          <a:xfrm>
-            <a:off x="976122" y="2130552"/>
-            <a:ext cx="585216" cy="585216"/>
-          </a:xfrm>
-          <a:prstGeom prst="roundRect">
-            <a:avLst>
-              <a:gd name="adj" fmla="val 6250"/>
-            </a:avLst>
-          </a:prstGeom>
-          <a:solidFill>
-            <a:srgbClr val="F8F4EF"/>
-          </a:solidFill>
-          <a:ln w="12700">
-            <a:solidFill>
-              <a:srgbClr val="C6CCC9"/>
-            </a:solidFill>
-            <a:prstDash val="solid"/>
-          </a:ln>
-        </p:spPr>
-      </p:sp>
-      <p:pic>
-        <p:nvPicPr>
-          <p:cNvPr id="22" name="Image 4" descr="code icon from tabler-icons (MIT)">    </p:cNvPr>
-          <p:cNvPicPr>
-            <a:picLocks noChangeAspect="1"/>
-          </p:cNvPicPr>
-          <p:nvPr/>
-        </p:nvPicPr>
-        <p:blipFill>
-          <a:blip r:embed="rId9">
-            <a:extLst>
-              <a:ext uri="{96DAC541-7B7A-43D3-8B79-37D633B846F1}">
-                <asvg:svgBlip xmlns:asvg="http://schemas.microsoft.com/office/drawing/2016/SVG/main" r:embed="rId10"/>
-              </a:ext>
-            </a:extLst>
-          </a:blip>
-          <a:stretch>
-            <a:fillRect/>
-          </a:stretch>
-        </p:blipFill>
-        <p:spPr>
-          <a:xfrm>
-            <a:off x="1049274" y="2203704"/>
-            <a:ext cx="438912" cy="438912"/>
-          </a:xfrm>
-          <a:prstGeom prst="rect">
-            <a:avLst/>
-          </a:prstGeom>
-        </p:spPr>
-      </p:pic>
-      <p:sp>
-        <p:nvSpPr>
-          <p:cNvPr id="23" name="Text 16"/>
+          <p:cNvPr id="11" name="Text 9"/>
           <p:cNvSpPr txBox="1"/>
           <p:nvPr/>
         </p:nvSpPr>
         <p:spPr>
           <a:xfrm>
-            <a:off x="1689354" y="1627632"/>
-            <a:ext cx="3961638" cy="1591056"/>
+            <a:off x="896112" y="1664208"/>
+            <a:ext cx="4791456" cy="4169664"/>
           </a:xfrm>
           <a:prstGeom prst="rect">
             <a:avLst/>
@@ -39406,7 +33792,7 @@
           <a:ln/>
         </p:spPr>
         <p:txBody>
-          <a:bodyPr wrap="square" lIns="0" tIns="25400" rIns="25400" bIns="0" rtlCol="0" anchor="ctr"/>
+          <a:bodyPr wrap="square" lIns="0" tIns="25400" rIns="25400" bIns="0" rtlCol="0" anchor="t"/>
           <a:lstStyle/>
           <a:p>
             <a:pPr algn="l" indent="0" marL="0">
@@ -39424,7 +33810,7 @@
                 <a:ea typeface="Pretendard" pitchFamily="34" charset="-122"/>
                 <a:cs typeface="Pretendard" pitchFamily="34" charset="-120"/>
               </a:rPr>
-              <a:t>**Source code</a:t>
+              <a:t>- **Source code</a:t>
             </a:r>
             <a:endParaRPr lang="en-US" sz="2200" dirty="0"/>
           </a:p>
@@ -39432,71 +33818,14 @@
       </p:sp>
       <p:sp>
         <p:nvSpPr>
-          <p:cNvPr id="24" name="Shape 17"/>
-          <p:cNvSpPr/>
-          <p:nvPr/>
-        </p:nvSpPr>
-        <p:spPr>
-          <a:xfrm>
-            <a:off x="6462522" y="2130552"/>
-            <a:ext cx="585216" cy="585216"/>
-          </a:xfrm>
-          <a:prstGeom prst="roundRect">
-            <a:avLst>
-              <a:gd name="adj" fmla="val 6250"/>
-            </a:avLst>
-          </a:prstGeom>
-          <a:solidFill>
-            <a:srgbClr val="F8F4EF"/>
-          </a:solidFill>
-          <a:ln w="12700">
-            <a:solidFill>
-              <a:srgbClr val="C6CCC9"/>
-            </a:solidFill>
-            <a:prstDash val="solid"/>
-          </a:ln>
-        </p:spPr>
-      </p:sp>
-      <p:pic>
-        <p:nvPicPr>
-          <p:cNvPr id="25" name="Image 5" descr="github icon from simple-icons (CC0-1.0 with brand guidelines)">    </p:cNvPr>
-          <p:cNvPicPr>
-            <a:picLocks noChangeAspect="1"/>
-          </p:cNvPicPr>
-          <p:nvPr/>
-        </p:nvPicPr>
-        <p:blipFill>
-          <a:blip r:embed="rId11">
-            <a:extLst>
-              <a:ext uri="{96DAC541-7B7A-43D3-8B79-37D633B846F1}">
-                <asvg:svgBlip xmlns:asvg="http://schemas.microsoft.com/office/drawing/2016/SVG/main" r:embed="rId12"/>
-              </a:ext>
-            </a:extLst>
-          </a:blip>
-          <a:stretch>
-            <a:fillRect/>
-          </a:stretch>
-        </p:blipFill>
-        <p:spPr>
-          <a:xfrm>
-            <a:off x="6535674" y="2203704"/>
-            <a:ext cx="438912" cy="438912"/>
-          </a:xfrm>
-          <a:prstGeom prst="rect">
-            <a:avLst/>
-          </a:prstGeom>
-        </p:spPr>
-      </p:pic>
-      <p:sp>
-        <p:nvSpPr>
-          <p:cNvPr id="26" name="Text 18"/>
+          <p:cNvPr id="12" name="Text 10"/>
           <p:cNvSpPr txBox="1"/>
           <p:nvPr/>
         </p:nvSpPr>
         <p:spPr>
           <a:xfrm>
-            <a:off x="7376922" y="1874520"/>
-            <a:ext cx="3760470" cy="1097280"/>
+            <a:off x="6675120" y="3368040"/>
+            <a:ext cx="4590288" cy="762000"/>
           </a:xfrm>
           <a:prstGeom prst="rect">
             <a:avLst/>
@@ -39508,7 +33837,7 @@
           <a:bodyPr wrap="square" lIns="0" tIns="25400" rIns="25400" bIns="0" rtlCol="0" anchor="ctr"/>
           <a:lstStyle/>
           <a:p>
-            <a:pPr algn="ctr" indent="0" marL="0">
+            <a:pPr algn="l" indent="0" marL="0">
               <a:lnSpc>
                 <a:spcPct val="120000"/>
               </a:lnSpc>
@@ -39523,205 +33852,7 @@
                 <a:ea typeface="Pretendard" pitchFamily="34" charset="-122"/>
                 <a:cs typeface="Pretendard" pitchFamily="34" charset="-120"/>
               </a:rPr>
-              <a:t>  * https://github.com/numpy/numpy</a:t>
-            </a:r>
-            <a:endParaRPr lang="en-US" sz="2200" dirty="0"/>
-          </a:p>
-        </p:txBody>
-      </p:sp>
-      <p:sp>
-        <p:nvSpPr>
-          <p:cNvPr id="27" name="Shape 19"/>
-          <p:cNvSpPr/>
-          <p:nvPr/>
-        </p:nvSpPr>
-        <p:spPr>
-          <a:xfrm>
-            <a:off x="976122" y="4416552"/>
-            <a:ext cx="585216" cy="585216"/>
-          </a:xfrm>
-          <a:prstGeom prst="roundRect">
-            <a:avLst>
-              <a:gd name="adj" fmla="val 6250"/>
-            </a:avLst>
-          </a:prstGeom>
-          <a:solidFill>
-            <a:srgbClr val="F8F4EF"/>
-          </a:solidFill>
-          <a:ln w="12700">
-            <a:solidFill>
-              <a:srgbClr val="C6CCC9"/>
-            </a:solidFill>
-            <a:prstDash val="solid"/>
-          </a:ln>
-        </p:spPr>
-      </p:sp>
-      <p:pic>
-        <p:nvPicPr>
-          <p:cNvPr id="28" name="Image 6" descr="article icon from tabler-icons (MIT)">    </p:cNvPr>
-          <p:cNvPicPr>
-            <a:picLocks noChangeAspect="1"/>
-          </p:cNvPicPr>
-          <p:nvPr/>
-        </p:nvPicPr>
-        <p:blipFill>
-          <a:blip r:embed="rId13">
-            <a:extLst>
-              <a:ext uri="{96DAC541-7B7A-43D3-8B79-37D633B846F1}">
-                <asvg:svgBlip xmlns:asvg="http://schemas.microsoft.com/office/drawing/2016/SVG/main" r:embed="rId14"/>
-              </a:ext>
-            </a:extLst>
-          </a:blip>
-          <a:stretch>
-            <a:fillRect/>
-          </a:stretch>
-        </p:blipFill>
-        <p:spPr>
-          <a:xfrm>
-            <a:off x="1049274" y="4489704"/>
-            <a:ext cx="438912" cy="438912"/>
-          </a:xfrm>
-          <a:prstGeom prst="rect">
-            <a:avLst/>
-          </a:prstGeom>
-        </p:spPr>
-      </p:pic>
-      <p:sp>
-        <p:nvSpPr>
-          <p:cNvPr id="29" name="Text 20"/>
-          <p:cNvSpPr txBox="1"/>
-          <p:nvPr/>
-        </p:nvSpPr>
-        <p:spPr>
-          <a:xfrm>
-            <a:off x="1689354" y="3913632"/>
-            <a:ext cx="3961638" cy="1591056"/>
-          </a:xfrm>
-          <a:prstGeom prst="rect">
-            <a:avLst/>
-          </a:prstGeom>
-          <a:noFill/>
-          <a:ln/>
-        </p:spPr>
-        <p:txBody>
-          <a:bodyPr wrap="square" lIns="0" tIns="25400" rIns="25400" bIns="0" rtlCol="0" anchor="ctr"/>
-          <a:lstStyle/>
-          <a:p>
-            <a:pPr algn="l" indent="0" marL="0">
-              <a:lnSpc>
-                <a:spcPct val="120000"/>
-              </a:lnSpc>
-              <a:buNone/>
-            </a:pPr>
-            <a:r>
-              <a:rPr lang="en-US" sz="2200" b="1" dirty="0">
-                <a:solidFill>
-                  <a:srgbClr val="0F766E"/>
-                </a:solidFill>
-                <a:latin typeface="Pretendard" pitchFamily="34" charset="0"/>
-                <a:ea typeface="Pretendard" pitchFamily="34" charset="-122"/>
-                <a:cs typeface="Pretendard" pitchFamily="34" charset="-120"/>
-              </a:rPr>
-              <a:t>**Contributing</a:t>
-            </a:r>
-            <a:endParaRPr lang="en-US" sz="2200" dirty="0"/>
-          </a:p>
-        </p:txBody>
-      </p:sp>
-      <p:sp>
-        <p:nvSpPr>
-          <p:cNvPr id="30" name="Shape 21"/>
-          <p:cNvSpPr/>
-          <p:nvPr/>
-        </p:nvSpPr>
-        <p:spPr>
-          <a:xfrm>
-            <a:off x="6462522" y="4416552"/>
-            <a:ext cx="585216" cy="585216"/>
-          </a:xfrm>
-          <a:prstGeom prst="roundRect">
-            <a:avLst>
-              <a:gd name="adj" fmla="val 6250"/>
-            </a:avLst>
-          </a:prstGeom>
-          <a:solidFill>
-            <a:srgbClr val="F8F4EF"/>
-          </a:solidFill>
-          <a:ln w="12700">
-            <a:solidFill>
-              <a:srgbClr val="C6CCC9"/>
-            </a:solidFill>
-            <a:prstDash val="solid"/>
-          </a:ln>
-        </p:spPr>
-      </p:sp>
-      <p:pic>
-        <p:nvPicPr>
-          <p:cNvPr id="31" name="Image 7" descr="article icon from tabler-icons (MIT)">    </p:cNvPr>
-          <p:cNvPicPr>
-            <a:picLocks noChangeAspect="1"/>
-          </p:cNvPicPr>
-          <p:nvPr/>
-        </p:nvPicPr>
-        <p:blipFill>
-          <a:blip r:embed="rId15">
-            <a:extLst>
-              <a:ext uri="{96DAC541-7B7A-43D3-8B79-37D633B846F1}">
-                <asvg:svgBlip xmlns:asvg="http://schemas.microsoft.com/office/drawing/2016/SVG/main" r:embed="rId16"/>
-              </a:ext>
-            </a:extLst>
-          </a:blip>
-          <a:stretch>
-            <a:fillRect/>
-          </a:stretch>
-        </p:blipFill>
-        <p:spPr>
-          <a:xfrm>
-            <a:off x="6535674" y="4489704"/>
-            <a:ext cx="438912" cy="438912"/>
-          </a:xfrm>
-          <a:prstGeom prst="rect">
-            <a:avLst/>
-          </a:prstGeom>
-        </p:spPr>
-      </p:pic>
-      <p:sp>
-        <p:nvSpPr>
-          <p:cNvPr id="32" name="Text 22"/>
-          <p:cNvSpPr txBox="1"/>
-          <p:nvPr/>
-        </p:nvSpPr>
-        <p:spPr>
-          <a:xfrm>
-            <a:off x="7376922" y="4160520"/>
-            <a:ext cx="3760470" cy="1097280"/>
-          </a:xfrm>
-          <a:prstGeom prst="rect">
-            <a:avLst/>
-          </a:prstGeom>
-          <a:noFill/>
-          <a:ln/>
-        </p:spPr>
-        <p:txBody>
-          <a:bodyPr wrap="square" lIns="0" tIns="25400" rIns="25400" bIns="0" rtlCol="0" anchor="ctr"/>
-          <a:lstStyle/>
-          <a:p>
-            <a:pPr algn="ctr" indent="0" marL="0">
-              <a:lnSpc>
-                <a:spcPct val="120000"/>
-              </a:lnSpc>
-              <a:buNone/>
-            </a:pPr>
-            <a:r>
-              <a:rPr lang="en-US" sz="2200" dirty="0">
-                <a:solidFill>
-                  <a:srgbClr val="18181B"/>
-                </a:solidFill>
-                <a:latin typeface="Pretendard" pitchFamily="34" charset="0"/>
-                <a:ea typeface="Pretendard" pitchFamily="34" charset="-122"/>
-                <a:cs typeface="Pretendard" pitchFamily="34" charset="-120"/>
-              </a:rPr>
-              <a:t>  * https://numpy.org/devdocs/dev/index.html</a:t>
+              <a:t>  - * https://github.com/numpy/numpy</a:t>
             </a:r>
             <a:endParaRPr lang="en-US" sz="2200" dirty="0"/>
           </a:p>
@@ -40334,7 +34465,7 @@
                 <a:ea typeface="Pretendard" pitchFamily="34" charset="-122"/>
                 <a:cs typeface="Pretendard" pitchFamily="34" charset="-120"/>
               </a:rPr>
-              <a:t>19. venv</a:t>
+              <a:t>19. Transformers</a:t>
             </a:r>
             <a:endParaRPr lang="en-US" sz="3400" dirty="0"/>
           </a:p>
@@ -40977,37 +35108,8 @@
         </p:nvSpPr>
         <p:spPr>
           <a:xfrm>
-            <a:off x="786384" y="1956816"/>
-            <a:ext cx="32004" cy="3483864"/>
-          </a:xfrm>
-          <a:prstGeom prst="rect">
-            <a:avLst/>
-          </a:prstGeom>
-          <a:solidFill>
-            <a:srgbClr val="9E0F62">
-              <a:alpha val="80000"/>
-            </a:srgbClr>
-          </a:solidFill>
-          <a:ln w="12700">
-            <a:solidFill>
-              <a:srgbClr val="9E0F62">
-                <a:alpha val="0"/>
-              </a:srgbClr>
-            </a:solidFill>
-            <a:prstDash val="solid"/>
-          </a:ln>
-        </p:spPr>
-      </p:sp>
-      <p:sp>
-        <p:nvSpPr>
-          <p:cNvPr id="9" name="Shape 7"/>
-          <p:cNvSpPr/>
-          <p:nvPr/>
-        </p:nvSpPr>
-        <p:spPr>
-          <a:xfrm>
-            <a:off x="914400" y="1865376"/>
-            <a:ext cx="73152" cy="1024128"/>
+            <a:off x="822960" y="1554480"/>
+            <a:ext cx="4937760" cy="73152"/>
           </a:xfrm>
           <a:prstGeom prst="rect">
             <a:avLst/>
@@ -41027,41 +35129,14 @@
       </p:sp>
       <p:sp>
         <p:nvSpPr>
-          <p:cNvPr id="10" name="Shape 8"/>
-          <p:cNvSpPr/>
-          <p:nvPr/>
-        </p:nvSpPr>
-        <p:spPr>
-          <a:xfrm>
-            <a:off x="914400" y="3191256"/>
-            <a:ext cx="73152" cy="1024128"/>
-          </a:xfrm>
-          <a:prstGeom prst="rect">
-            <a:avLst/>
-          </a:prstGeom>
-          <a:solidFill>
-            <a:srgbClr val="9E0F62"/>
-          </a:solidFill>
-          <a:ln w="12700">
-            <a:solidFill>
-              <a:srgbClr val="9E0F62">
-                <a:alpha val="0"/>
-              </a:srgbClr>
-            </a:solidFill>
-            <a:prstDash val="solid"/>
-          </a:ln>
-        </p:spPr>
-      </p:sp>
-      <p:sp>
-        <p:nvSpPr>
-          <p:cNvPr id="11" name="Shape 9"/>
-          <p:cNvSpPr/>
-          <p:nvPr/>
-        </p:nvSpPr>
-        <p:spPr>
-          <a:xfrm>
-            <a:off x="914400" y="4507992"/>
-            <a:ext cx="73152" cy="1024128"/>
+          <p:cNvPr id="9" name="Shape 7"/>
+          <p:cNvSpPr/>
+          <p:nvPr/>
+        </p:nvSpPr>
+        <p:spPr>
+          <a:xfrm>
+            <a:off x="6400800" y="1554480"/>
+            <a:ext cx="4937760" cy="73152"/>
           </a:xfrm>
           <a:prstGeom prst="rect">
             <a:avLst/>
@@ -41079,207 +35154,9 @@
           </a:ln>
         </p:spPr>
       </p:sp>
-      <p:pic>
-        <p:nvPicPr>
-          <p:cNvPr id="12" name="Image 0" descr="preencoded.png">    </p:cNvPr>
-          <p:cNvPicPr>
-            <a:picLocks noChangeAspect="1"/>
-          </p:cNvPicPr>
-          <p:nvPr/>
-        </p:nvPicPr>
-        <p:blipFill>
-          <a:blip r:embed="rId1">
-            <a:extLst>
-              <a:ext uri="{96DAC541-7B7A-43D3-8B79-37D633B846F1}">
-                <asvg:svgBlip xmlns:asvg="http://schemas.microsoft.com/office/drawing/2016/SVG/main" r:embed="rId2"/>
-              </a:ext>
-            </a:extLst>
-          </a:blip>
-          <a:stretch>
-            <a:fillRect/>
-          </a:stretch>
-        </p:blipFill>
-        <p:spPr>
-          <a:xfrm>
-            <a:off x="914400" y="1865376"/>
-            <a:ext cx="10241280" cy="1024128"/>
-          </a:xfrm>
-          <a:prstGeom prst="rect">
-            <a:avLst/>
-          </a:prstGeom>
-        </p:spPr>
-      </p:pic>
-      <p:sp>
-        <p:nvSpPr>
-          <p:cNvPr id="13" name="Shape 10"/>
-          <p:cNvSpPr/>
-          <p:nvPr/>
-        </p:nvSpPr>
-        <p:spPr>
-          <a:xfrm>
-            <a:off x="914400" y="1865376"/>
-            <a:ext cx="10241280" cy="1024128"/>
-          </a:xfrm>
-          <a:prstGeom prst="rect">
-            <a:avLst/>
-          </a:prstGeom>
-          <a:solidFill>
-            <a:srgbClr val="FBF8F3">
-              <a:alpha val="0"/>
-            </a:srgbClr>
-          </a:solidFill>
-          <a:ln w="12700">
-            <a:solidFill>
-              <a:srgbClr val="C6CCC9">
-                <a:alpha val="0"/>
-              </a:srgbClr>
-            </a:solidFill>
-            <a:prstDash val="solid"/>
-          </a:ln>
-          <a:effectLst>
-            <a:outerShdw sx="100000" sy="100000" kx="0" ky="0" algn="bl" rotWithShape="0" blurRad="12700" dist="50800" dir="2700000">
-              <a:srgbClr val="000000">
-                <a:alpha val="8000"/>
-              </a:srgbClr>
-            </a:outerShdw>
-          </a:effectLst>
-        </p:spPr>
-      </p:sp>
-      <p:pic>
-        <p:nvPicPr>
-          <p:cNvPr id="14" name="Image 1" descr="preencoded.png">    </p:cNvPr>
-          <p:cNvPicPr>
-            <a:picLocks noChangeAspect="1"/>
-          </p:cNvPicPr>
-          <p:nvPr/>
-        </p:nvPicPr>
-        <p:blipFill>
-          <a:blip r:embed="rId3">
-            <a:extLst>
-              <a:ext uri="{96DAC541-7B7A-43D3-8B79-37D633B846F1}">
-                <asvg:svgBlip xmlns:asvg="http://schemas.microsoft.com/office/drawing/2016/SVG/main" r:embed="rId4"/>
-              </a:ext>
-            </a:extLst>
-          </a:blip>
-          <a:stretch>
-            <a:fillRect/>
-          </a:stretch>
-        </p:blipFill>
-        <p:spPr>
-          <a:xfrm>
-            <a:off x="914400" y="3191256"/>
-            <a:ext cx="10241280" cy="1024128"/>
-          </a:xfrm>
-          <a:prstGeom prst="rect">
-            <a:avLst/>
-          </a:prstGeom>
-        </p:spPr>
-      </p:pic>
-      <p:sp>
-        <p:nvSpPr>
-          <p:cNvPr id="15" name="Shape 11"/>
-          <p:cNvSpPr/>
-          <p:nvPr/>
-        </p:nvSpPr>
-        <p:spPr>
-          <a:xfrm>
-            <a:off x="914400" y="3191256"/>
-            <a:ext cx="10241280" cy="1024128"/>
-          </a:xfrm>
-          <a:prstGeom prst="rect">
-            <a:avLst/>
-          </a:prstGeom>
-          <a:solidFill>
-            <a:srgbClr val="FBF8F3">
-              <a:alpha val="0"/>
-            </a:srgbClr>
-          </a:solidFill>
-          <a:ln w="12700">
-            <a:solidFill>
-              <a:srgbClr val="C6CCC9">
-                <a:alpha val="0"/>
-              </a:srgbClr>
-            </a:solidFill>
-            <a:prstDash val="solid"/>
-          </a:ln>
-          <a:effectLst>
-            <a:outerShdw sx="100000" sy="100000" kx="0" ky="0" algn="bl" rotWithShape="0" blurRad="12700" dist="50800" dir="2700000">
-              <a:srgbClr val="000000">
-                <a:alpha val="8000"/>
-              </a:srgbClr>
-            </a:outerShdw>
-          </a:effectLst>
-        </p:spPr>
-      </p:sp>
-      <p:pic>
-        <p:nvPicPr>
-          <p:cNvPr id="16" name="Image 2" descr="preencoded.png">    </p:cNvPr>
-          <p:cNvPicPr>
-            <a:picLocks noChangeAspect="1"/>
-          </p:cNvPicPr>
-          <p:nvPr/>
-        </p:nvPicPr>
-        <p:blipFill>
-          <a:blip r:embed="rId5">
-            <a:extLst>
-              <a:ext uri="{96DAC541-7B7A-43D3-8B79-37D633B846F1}">
-                <asvg:svgBlip xmlns:asvg="http://schemas.microsoft.com/office/drawing/2016/SVG/main" r:embed="rId6"/>
-              </a:ext>
-            </a:extLst>
-          </a:blip>
-          <a:stretch>
-            <a:fillRect/>
-          </a:stretch>
-        </p:blipFill>
-        <p:spPr>
-          <a:xfrm>
-            <a:off x="914400" y="4507992"/>
-            <a:ext cx="10241280" cy="1024128"/>
-          </a:xfrm>
-          <a:prstGeom prst="rect">
-            <a:avLst/>
-          </a:prstGeom>
-        </p:spPr>
-      </p:pic>
-      <p:sp>
-        <p:nvSpPr>
-          <p:cNvPr id="17" name="Shape 12"/>
-          <p:cNvSpPr/>
-          <p:nvPr/>
-        </p:nvSpPr>
-        <p:spPr>
-          <a:xfrm>
-            <a:off x="914400" y="4507992"/>
-            <a:ext cx="10241280" cy="1024128"/>
-          </a:xfrm>
-          <a:prstGeom prst="rect">
-            <a:avLst/>
-          </a:prstGeom>
-          <a:solidFill>
-            <a:srgbClr val="FBF8F3">
-              <a:alpha val="0"/>
-            </a:srgbClr>
-          </a:solidFill>
-          <a:ln w="12700">
-            <a:solidFill>
-              <a:srgbClr val="C6CCC9">
-                <a:alpha val="0"/>
-              </a:srgbClr>
-            </a:solidFill>
-            <a:prstDash val="solid"/>
-          </a:ln>
-          <a:effectLst>
-            <a:outerShdw sx="100000" sy="100000" kx="0" ky="0" algn="bl" rotWithShape="0" blurRad="12700" dist="50800" dir="2700000">
-              <a:srgbClr val="000000">
-                <a:alpha val="8000"/>
-              </a:srgbClr>
-            </a:outerShdw>
-          </a:effectLst>
-        </p:spPr>
-      </p:sp>
-      <p:sp>
-        <p:nvSpPr>
-          <p:cNvPr id="18" name="Text 13"/>
+      <p:sp>
+        <p:nvSpPr>
+          <p:cNvPr id="10" name="Text 8"/>
           <p:cNvSpPr txBox="1"/>
           <p:nvPr/>
         </p:nvSpPr>
@@ -41313,7 +35190,7 @@
                 <a:ea typeface="Pretendard" pitchFamily="34" charset="-122"/>
                 <a:cs typeface="Pretendard" pitchFamily="34" charset="-120"/>
               </a:rPr>
-              <a:t>19. venv (Cont. 2/2)</a:t>
+              <a:t>19. Transformers (Cont. 2/2)</a:t>
             </a:r>
             <a:endParaRPr lang="en-US" sz="3400" dirty="0"/>
           </a:p>
@@ -41321,71 +35198,14 @@
       </p:sp>
       <p:sp>
         <p:nvSpPr>
-          <p:cNvPr id="19" name="Shape 14"/>
-          <p:cNvSpPr/>
-          <p:nvPr/>
-        </p:nvSpPr>
-        <p:spPr>
-          <a:xfrm>
-            <a:off x="1097280" y="2140428"/>
-            <a:ext cx="474025" cy="474025"/>
-          </a:xfrm>
-          <a:prstGeom prst="roundRect">
-            <a:avLst>
-              <a:gd name="adj" fmla="val 7716"/>
-            </a:avLst>
-          </a:prstGeom>
-          <a:solidFill>
-            <a:srgbClr val="F8F4EF"/>
-          </a:solidFill>
-          <a:ln w="12700">
-            <a:solidFill>
-              <a:srgbClr val="C6CCC9"/>
-            </a:solidFill>
-            <a:prstDash val="solid"/>
-          </a:ln>
-        </p:spPr>
-      </p:sp>
-      <p:pic>
-        <p:nvPicPr>
-          <p:cNvPr id="20" name="Image 3" descr="article icon from tabler-icons (MIT)">    </p:cNvPr>
-          <p:cNvPicPr>
-            <a:picLocks noChangeAspect="1"/>
-          </p:cNvPicPr>
-          <p:nvPr/>
-        </p:nvPicPr>
-        <p:blipFill>
-          <a:blip r:embed="rId7">
-            <a:extLst>
-              <a:ext uri="{96DAC541-7B7A-43D3-8B79-37D633B846F1}">
-                <asvg:svgBlip xmlns:asvg="http://schemas.microsoft.com/office/drawing/2016/SVG/main" r:embed="rId8"/>
-              </a:ext>
-            </a:extLst>
-          </a:blip>
-          <a:stretch>
-            <a:fillRect/>
-          </a:stretch>
-        </p:blipFill>
-        <p:spPr>
-          <a:xfrm>
-            <a:off x="1170432" y="2213580"/>
-            <a:ext cx="327721" cy="327721"/>
-          </a:xfrm>
-          <a:prstGeom prst="rect">
-            <a:avLst/>
-          </a:prstGeom>
-        </p:spPr>
-      </p:pic>
-      <p:sp>
-        <p:nvSpPr>
-          <p:cNvPr id="21" name="Text 15"/>
+          <p:cNvPr id="11" name="Text 9"/>
           <p:cNvSpPr txBox="1"/>
           <p:nvPr/>
         </p:nvSpPr>
         <p:spPr>
           <a:xfrm>
-            <a:off x="1699321" y="2164080"/>
-            <a:ext cx="9255191" cy="426720"/>
+            <a:off x="896112" y="3368040"/>
+            <a:ext cx="4791456" cy="762000"/>
           </a:xfrm>
           <a:prstGeom prst="rect">
             <a:avLst/>
@@ -41397,7 +35217,7 @@
           <a:bodyPr wrap="square" lIns="0" tIns="25400" rIns="25400" bIns="0" rtlCol="0" anchor="ctr"/>
           <a:lstStyle/>
           <a:p>
-            <a:pPr algn="ctr" indent="0" marL="0">
+            <a:pPr algn="l" indent="0" marL="0">
               <a:lnSpc>
                 <a:spcPct val="120000"/>
               </a:lnSpc>
@@ -41412,7 +35232,7 @@
                 <a:ea typeface="Pretendard" pitchFamily="34" charset="-122"/>
                 <a:cs typeface="Pretendard" pitchFamily="34" charset="-120"/>
               </a:rPr>
-              <a:t>Few user-facing abstractions with just three classes to learn.</a:t>
+              <a:t>- Few user-facing abstractions with just three classes to learn.</a:t>
             </a:r>
             <a:endParaRPr lang="en-US" sz="2200" dirty="0"/>
           </a:p>
@@ -41420,71 +35240,14 @@
       </p:sp>
       <p:sp>
         <p:nvSpPr>
-          <p:cNvPr id="22" name="Shape 16"/>
-          <p:cNvSpPr/>
-          <p:nvPr/>
-        </p:nvSpPr>
-        <p:spPr>
-          <a:xfrm>
-            <a:off x="1097280" y="3466308"/>
-            <a:ext cx="474025" cy="474025"/>
-          </a:xfrm>
-          <a:prstGeom prst="roundRect">
-            <a:avLst>
-              <a:gd name="adj" fmla="val 7716"/>
-            </a:avLst>
-          </a:prstGeom>
-          <a:solidFill>
-            <a:srgbClr val="F8F4EF"/>
-          </a:solidFill>
-          <a:ln w="12700">
-            <a:solidFill>
-              <a:srgbClr val="C6CCC9"/>
-            </a:solidFill>
-            <a:prstDash val="solid"/>
-          </a:ln>
-        </p:spPr>
-      </p:sp>
-      <p:pic>
-        <p:nvPicPr>
-          <p:cNvPr id="23" name="Image 4" descr="cloud icon from svgrepo (open-license catalog pattern)">    </p:cNvPr>
-          <p:cNvPicPr>
-            <a:picLocks noChangeAspect="1"/>
-          </p:cNvPicPr>
-          <p:nvPr/>
-        </p:nvPicPr>
-        <p:blipFill>
-          <a:blip r:embed="rId9">
-            <a:extLst>
-              <a:ext uri="{96DAC541-7B7A-43D3-8B79-37D633B846F1}">
-                <asvg:svgBlip xmlns:asvg="http://schemas.microsoft.com/office/drawing/2016/SVG/main" r:embed="rId10"/>
-              </a:ext>
-            </a:extLst>
-          </a:blip>
-          <a:stretch>
-            <a:fillRect/>
-          </a:stretch>
-        </p:blipFill>
-        <p:spPr>
-          <a:xfrm>
-            <a:off x="1170432" y="3539460"/>
-            <a:ext cx="327721" cy="327721"/>
-          </a:xfrm>
-          <a:prstGeom prst="rect">
-            <a:avLst/>
-          </a:prstGeom>
-        </p:spPr>
-      </p:pic>
-      <p:sp>
-        <p:nvSpPr>
-          <p:cNvPr id="24" name="Text 17"/>
+          <p:cNvPr id="12" name="Text 10"/>
           <p:cNvSpPr txBox="1"/>
           <p:nvPr/>
         </p:nvSpPr>
         <p:spPr>
           <a:xfrm>
-            <a:off x="1699321" y="3489960"/>
-            <a:ext cx="9255191" cy="426720"/>
+            <a:off x="6473952" y="3368040"/>
+            <a:ext cx="4791456" cy="762000"/>
           </a:xfrm>
           <a:prstGeom prst="rect">
             <a:avLst/>
@@ -41496,7 +35259,7 @@
           <a:bodyPr wrap="square" lIns="0" tIns="25400" rIns="25400" bIns="0" rtlCol="0" anchor="ctr"/>
           <a:lstStyle/>
           <a:p>
-            <a:pPr algn="ctr" indent="0" marL="0">
+            <a:pPr algn="l" indent="0" marL="0">
               <a:lnSpc>
                 <a:spcPct val="120000"/>
               </a:lnSpc>
@@ -41511,106 +35274,7 @@
                 <a:ea typeface="Pretendard" pitchFamily="34" charset="-122"/>
                 <a:cs typeface="Pretendard" pitchFamily="34" charset="-120"/>
               </a:rPr>
-              <a:t>A unified API for using all our pretrained models.</a:t>
-            </a:r>
-            <a:endParaRPr lang="en-US" sz="2200" dirty="0"/>
-          </a:p>
-        </p:txBody>
-      </p:sp>
-      <p:sp>
-        <p:nvSpPr>
-          <p:cNvPr id="25" name="Shape 18"/>
-          <p:cNvSpPr/>
-          <p:nvPr/>
-        </p:nvSpPr>
-        <p:spPr>
-          <a:xfrm>
-            <a:off x="1097280" y="4783044"/>
-            <a:ext cx="474025" cy="474025"/>
-          </a:xfrm>
-          <a:prstGeom prst="roundRect">
-            <a:avLst>
-              <a:gd name="adj" fmla="val 7716"/>
-            </a:avLst>
-          </a:prstGeom>
-          <a:solidFill>
-            <a:srgbClr val="F8F4EF"/>
-          </a:solidFill>
-          <a:ln w="12700">
-            <a:solidFill>
-              <a:srgbClr val="C6CCC9"/>
-            </a:solidFill>
-            <a:prstDash val="solid"/>
-          </a:ln>
-        </p:spPr>
-      </p:sp>
-      <p:pic>
-        <p:nvPicPr>
-          <p:cNvPr id="26" name="Image 5" descr="article icon from tabler-icons (MIT)">    </p:cNvPr>
-          <p:cNvPicPr>
-            <a:picLocks noChangeAspect="1"/>
-          </p:cNvPicPr>
-          <p:nvPr/>
-        </p:nvPicPr>
-        <p:blipFill>
-          <a:blip r:embed="rId11">
-            <a:extLst>
-              <a:ext uri="{96DAC541-7B7A-43D3-8B79-37D633B846F1}">
-                <asvg:svgBlip xmlns:asvg="http://schemas.microsoft.com/office/drawing/2016/SVG/main" r:embed="rId12"/>
-              </a:ext>
-            </a:extLst>
-          </a:blip>
-          <a:stretch>
-            <a:fillRect/>
-          </a:stretch>
-        </p:blipFill>
-        <p:spPr>
-          <a:xfrm>
-            <a:off x="1170432" y="4856196"/>
-            <a:ext cx="327721" cy="327721"/>
-          </a:xfrm>
-          <a:prstGeom prst="rect">
-            <a:avLst/>
-          </a:prstGeom>
-        </p:spPr>
-      </p:pic>
-      <p:sp>
-        <p:nvSpPr>
-          <p:cNvPr id="27" name="Text 19"/>
-          <p:cNvSpPr txBox="1"/>
-          <p:nvPr/>
-        </p:nvSpPr>
-        <p:spPr>
-          <a:xfrm>
-            <a:off x="1699321" y="4806696"/>
-            <a:ext cx="9255191" cy="426720"/>
-          </a:xfrm>
-          <a:prstGeom prst="rect">
-            <a:avLst/>
-          </a:prstGeom>
-          <a:noFill/>
-          <a:ln/>
-        </p:spPr>
-        <p:txBody>
-          <a:bodyPr wrap="square" lIns="0" tIns="25400" rIns="25400" bIns="0" rtlCol="0" anchor="ctr"/>
-          <a:lstStyle/>
-          <a:p>
-            <a:pPr algn="ctr" indent="0" marL="0">
-              <a:lnSpc>
-                <a:spcPct val="120000"/>
-              </a:lnSpc>
-              <a:buNone/>
-            </a:pPr>
-            <a:r>
-              <a:rPr lang="en-US" sz="2200" dirty="0">
-                <a:solidFill>
-                  <a:srgbClr val="18181B"/>
-                </a:solidFill>
-                <a:latin typeface="Pretendard" pitchFamily="34" charset="0"/>
-                <a:ea typeface="Pretendard" pitchFamily="34" charset="-122"/>
-                <a:cs typeface="Pretendard" pitchFamily="34" charset="-120"/>
-              </a:rPr>
-              <a:t>Share trained models instead of training from scratch.</a:t>
+              <a:t>- A unified API for using all our pretrained models.</a:t>
             </a:r>
             <a:endParaRPr lang="en-US" sz="2200" dirty="0"/>
           </a:p>
@@ -44413,7 +38077,7 @@
                 <a:ea typeface="Pretendard" pitchFamily="34" charset="-122"/>
                 <a:cs typeface="Pretendard" pitchFamily="34" charset="-120"/>
               </a:rPr>
-              <a:t>22. plotly.py</a:t>
+              <a:t>22. Plotly.py</a:t>
             </a:r>
             <a:endParaRPr lang="en-US" sz="3400" dirty="0"/>
           </a:p>
@@ -47733,37 +41397,8 @@
         </p:nvSpPr>
         <p:spPr>
           <a:xfrm>
-            <a:off x="786384" y="1956816"/>
-            <a:ext cx="32004" cy="3483864"/>
-          </a:xfrm>
-          <a:prstGeom prst="rect">
-            <a:avLst/>
-          </a:prstGeom>
-          <a:solidFill>
-            <a:srgbClr val="9E0F62">
-              <a:alpha val="80000"/>
-            </a:srgbClr>
-          </a:solidFill>
-          <a:ln w="12700">
-            <a:solidFill>
-              <a:srgbClr val="9E0F62">
-                <a:alpha val="0"/>
-              </a:srgbClr>
-            </a:solidFill>
-            <a:prstDash val="solid"/>
-          </a:ln>
-        </p:spPr>
-      </p:sp>
-      <p:sp>
-        <p:nvSpPr>
-          <p:cNvPr id="9" name="Shape 7"/>
-          <p:cNvSpPr/>
-          <p:nvPr/>
-        </p:nvSpPr>
-        <p:spPr>
-          <a:xfrm>
-            <a:off x="914400" y="1865376"/>
-            <a:ext cx="73152" cy="1024128"/>
+            <a:off x="822960" y="1554480"/>
+            <a:ext cx="4937760" cy="73152"/>
           </a:xfrm>
           <a:prstGeom prst="rect">
             <a:avLst/>
@@ -47783,41 +41418,14 @@
       </p:sp>
       <p:sp>
         <p:nvSpPr>
-          <p:cNvPr id="10" name="Shape 8"/>
-          <p:cNvSpPr/>
-          <p:nvPr/>
-        </p:nvSpPr>
-        <p:spPr>
-          <a:xfrm>
-            <a:off x="914400" y="3191256"/>
-            <a:ext cx="73152" cy="1024128"/>
-          </a:xfrm>
-          <a:prstGeom prst="rect">
-            <a:avLst/>
-          </a:prstGeom>
-          <a:solidFill>
-            <a:srgbClr val="9E0F62"/>
-          </a:solidFill>
-          <a:ln w="12700">
-            <a:solidFill>
-              <a:srgbClr val="9E0F62">
-                <a:alpha val="0"/>
-              </a:srgbClr>
-            </a:solidFill>
-            <a:prstDash val="solid"/>
-          </a:ln>
-        </p:spPr>
-      </p:sp>
-      <p:sp>
-        <p:nvSpPr>
-          <p:cNvPr id="11" name="Shape 9"/>
-          <p:cNvSpPr/>
-          <p:nvPr/>
-        </p:nvSpPr>
-        <p:spPr>
-          <a:xfrm>
-            <a:off x="914400" y="4507992"/>
-            <a:ext cx="73152" cy="1024128"/>
+          <p:cNvPr id="9" name="Shape 7"/>
+          <p:cNvSpPr/>
+          <p:nvPr/>
+        </p:nvSpPr>
+        <p:spPr>
+          <a:xfrm>
+            <a:off x="6400800" y="1554480"/>
+            <a:ext cx="4937760" cy="73152"/>
           </a:xfrm>
           <a:prstGeom prst="rect">
             <a:avLst/>
@@ -47835,207 +41443,9 @@
           </a:ln>
         </p:spPr>
       </p:sp>
-      <p:pic>
-        <p:nvPicPr>
-          <p:cNvPr id="12" name="Image 0" descr="preencoded.png">    </p:cNvPr>
-          <p:cNvPicPr>
-            <a:picLocks noChangeAspect="1"/>
-          </p:cNvPicPr>
-          <p:nvPr/>
-        </p:nvPicPr>
-        <p:blipFill>
-          <a:blip r:embed="rId1">
-            <a:extLst>
-              <a:ext uri="{96DAC541-7B7A-43D3-8B79-37D633B846F1}">
-                <asvg:svgBlip xmlns:asvg="http://schemas.microsoft.com/office/drawing/2016/SVG/main" r:embed="rId2"/>
-              </a:ext>
-            </a:extLst>
-          </a:blip>
-          <a:stretch>
-            <a:fillRect/>
-          </a:stretch>
-        </p:blipFill>
-        <p:spPr>
-          <a:xfrm>
-            <a:off x="914400" y="1865376"/>
-            <a:ext cx="10241280" cy="1024128"/>
-          </a:xfrm>
-          <a:prstGeom prst="rect">
-            <a:avLst/>
-          </a:prstGeom>
-        </p:spPr>
-      </p:pic>
-      <p:sp>
-        <p:nvSpPr>
-          <p:cNvPr id="13" name="Shape 10"/>
-          <p:cNvSpPr/>
-          <p:nvPr/>
-        </p:nvSpPr>
-        <p:spPr>
-          <a:xfrm>
-            <a:off x="914400" y="1865376"/>
-            <a:ext cx="10241280" cy="1024128"/>
-          </a:xfrm>
-          <a:prstGeom prst="rect">
-            <a:avLst/>
-          </a:prstGeom>
-          <a:solidFill>
-            <a:srgbClr val="FBF8F3">
-              <a:alpha val="0"/>
-            </a:srgbClr>
-          </a:solidFill>
-          <a:ln w="12700">
-            <a:solidFill>
-              <a:srgbClr val="C6CCC9">
-                <a:alpha val="0"/>
-              </a:srgbClr>
-            </a:solidFill>
-            <a:prstDash val="solid"/>
-          </a:ln>
-          <a:effectLst>
-            <a:outerShdw sx="100000" sy="100000" kx="0" ky="0" algn="bl" rotWithShape="0" blurRad="12700" dist="50800" dir="2700000">
-              <a:srgbClr val="000000">
-                <a:alpha val="8000"/>
-              </a:srgbClr>
-            </a:outerShdw>
-          </a:effectLst>
-        </p:spPr>
-      </p:sp>
-      <p:pic>
-        <p:nvPicPr>
-          <p:cNvPr id="14" name="Image 1" descr="preencoded.png">    </p:cNvPr>
-          <p:cNvPicPr>
-            <a:picLocks noChangeAspect="1"/>
-          </p:cNvPicPr>
-          <p:nvPr/>
-        </p:nvPicPr>
-        <p:blipFill>
-          <a:blip r:embed="rId3">
-            <a:extLst>
-              <a:ext uri="{96DAC541-7B7A-43D3-8B79-37D633B846F1}">
-                <asvg:svgBlip xmlns:asvg="http://schemas.microsoft.com/office/drawing/2016/SVG/main" r:embed="rId4"/>
-              </a:ext>
-            </a:extLst>
-          </a:blip>
-          <a:stretch>
-            <a:fillRect/>
-          </a:stretch>
-        </p:blipFill>
-        <p:spPr>
-          <a:xfrm>
-            <a:off x="914400" y="3191256"/>
-            <a:ext cx="10241280" cy="1024128"/>
-          </a:xfrm>
-          <a:prstGeom prst="rect">
-            <a:avLst/>
-          </a:prstGeom>
-        </p:spPr>
-      </p:pic>
-      <p:sp>
-        <p:nvSpPr>
-          <p:cNvPr id="15" name="Shape 11"/>
-          <p:cNvSpPr/>
-          <p:nvPr/>
-        </p:nvSpPr>
-        <p:spPr>
-          <a:xfrm>
-            <a:off x="914400" y="3191256"/>
-            <a:ext cx="10241280" cy="1024128"/>
-          </a:xfrm>
-          <a:prstGeom prst="rect">
-            <a:avLst/>
-          </a:prstGeom>
-          <a:solidFill>
-            <a:srgbClr val="FBF8F3">
-              <a:alpha val="0"/>
-            </a:srgbClr>
-          </a:solidFill>
-          <a:ln w="12700">
-            <a:solidFill>
-              <a:srgbClr val="C6CCC9">
-                <a:alpha val="0"/>
-              </a:srgbClr>
-            </a:solidFill>
-            <a:prstDash val="solid"/>
-          </a:ln>
-          <a:effectLst>
-            <a:outerShdw sx="100000" sy="100000" kx="0" ky="0" algn="bl" rotWithShape="0" blurRad="12700" dist="50800" dir="2700000">
-              <a:srgbClr val="000000">
-                <a:alpha val="8000"/>
-              </a:srgbClr>
-            </a:outerShdw>
-          </a:effectLst>
-        </p:spPr>
-      </p:sp>
-      <p:pic>
-        <p:nvPicPr>
-          <p:cNvPr id="16" name="Image 2" descr="preencoded.png">    </p:cNvPr>
-          <p:cNvPicPr>
-            <a:picLocks noChangeAspect="1"/>
-          </p:cNvPicPr>
-          <p:nvPr/>
-        </p:nvPicPr>
-        <p:blipFill>
-          <a:blip r:embed="rId5">
-            <a:extLst>
-              <a:ext uri="{96DAC541-7B7A-43D3-8B79-37D633B846F1}">
-                <asvg:svgBlip xmlns:asvg="http://schemas.microsoft.com/office/drawing/2016/SVG/main" r:embed="rId6"/>
-              </a:ext>
-            </a:extLst>
-          </a:blip>
-          <a:stretch>
-            <a:fillRect/>
-          </a:stretch>
-        </p:blipFill>
-        <p:spPr>
-          <a:xfrm>
-            <a:off x="914400" y="4507992"/>
-            <a:ext cx="10241280" cy="1024128"/>
-          </a:xfrm>
-          <a:prstGeom prst="rect">
-            <a:avLst/>
-          </a:prstGeom>
-        </p:spPr>
-      </p:pic>
-      <p:sp>
-        <p:nvSpPr>
-          <p:cNvPr id="17" name="Shape 12"/>
-          <p:cNvSpPr/>
-          <p:nvPr/>
-        </p:nvSpPr>
-        <p:spPr>
-          <a:xfrm>
-            <a:off x="914400" y="4507992"/>
-            <a:ext cx="10241280" cy="1024128"/>
-          </a:xfrm>
-          <a:prstGeom prst="rect">
-            <a:avLst/>
-          </a:prstGeom>
-          <a:solidFill>
-            <a:srgbClr val="FBF8F3">
-              <a:alpha val="0"/>
-            </a:srgbClr>
-          </a:solidFill>
-          <a:ln w="12700">
-            <a:solidFill>
-              <a:srgbClr val="C6CCC9">
-                <a:alpha val="0"/>
-              </a:srgbClr>
-            </a:solidFill>
-            <a:prstDash val="solid"/>
-          </a:ln>
-          <a:effectLst>
-            <a:outerShdw sx="100000" sy="100000" kx="0" ky="0" algn="bl" rotWithShape="0" blurRad="12700" dist="50800" dir="2700000">
-              <a:srgbClr val="000000">
-                <a:alpha val="8000"/>
-              </a:srgbClr>
-            </a:outerShdw>
-          </a:effectLst>
-        </p:spPr>
-      </p:sp>
-      <p:sp>
-        <p:nvSpPr>
-          <p:cNvPr id="18" name="Text 13"/>
+      <p:sp>
+        <p:nvSpPr>
+          <p:cNvPr id="10" name="Text 8"/>
           <p:cNvSpPr txBox="1"/>
           <p:nvPr/>
         </p:nvSpPr>
@@ -48077,71 +41487,14 @@
       </p:sp>
       <p:sp>
         <p:nvSpPr>
-          <p:cNvPr id="19" name="Shape 14"/>
-          <p:cNvSpPr/>
-          <p:nvPr/>
-        </p:nvSpPr>
-        <p:spPr>
-          <a:xfrm>
-            <a:off x="1097280" y="2140428"/>
-            <a:ext cx="474025" cy="474025"/>
-          </a:xfrm>
-          <a:prstGeom prst="roundRect">
-            <a:avLst>
-              <a:gd name="adj" fmla="val 7716"/>
-            </a:avLst>
-          </a:prstGeom>
-          <a:solidFill>
-            <a:srgbClr val="F8F4EF"/>
-          </a:solidFill>
-          <a:ln w="12700">
-            <a:solidFill>
-              <a:srgbClr val="C6CCC9"/>
-            </a:solidFill>
-            <a:prstDash val="solid"/>
-          </a:ln>
-        </p:spPr>
-      </p:sp>
-      <p:pic>
-        <p:nvPicPr>
-          <p:cNvPr id="20" name="Image 3" descr="palette icon from tabler-icons (MIT)">    </p:cNvPr>
-          <p:cNvPicPr>
-            <a:picLocks noChangeAspect="1"/>
-          </p:cNvPicPr>
-          <p:nvPr/>
-        </p:nvPicPr>
-        <p:blipFill>
-          <a:blip r:embed="rId7">
-            <a:extLst>
-              <a:ext uri="{96DAC541-7B7A-43D3-8B79-37D633B846F1}">
-                <asvg:svgBlip xmlns:asvg="http://schemas.microsoft.com/office/drawing/2016/SVG/main" r:embed="rId8"/>
-              </a:ext>
-            </a:extLst>
-          </a:blip>
-          <a:stretch>
-            <a:fillRect/>
-          </a:stretch>
-        </p:blipFill>
-        <p:spPr>
-          <a:xfrm>
-            <a:off x="1170432" y="2213580"/>
-            <a:ext cx="327721" cy="327721"/>
-          </a:xfrm>
-          <a:prstGeom prst="rect">
-            <a:avLst/>
-          </a:prstGeom>
-        </p:spPr>
-      </p:pic>
-      <p:sp>
-        <p:nvSpPr>
-          <p:cNvPr id="21" name="Text 15"/>
+          <p:cNvPr id="11" name="Text 9"/>
           <p:cNvSpPr txBox="1"/>
           <p:nvPr/>
         </p:nvSpPr>
         <p:spPr>
           <a:xfrm>
-            <a:off x="1699321" y="1957548"/>
-            <a:ext cx="9255191" cy="839785"/>
+            <a:off x="896112" y="1664208"/>
+            <a:ext cx="4791456" cy="4169664"/>
           </a:xfrm>
           <a:prstGeom prst="rect">
             <a:avLst/>
@@ -48150,7 +41503,7 @@
           <a:ln/>
         </p:spPr>
         <p:txBody>
-          <a:bodyPr wrap="square" lIns="0" tIns="25400" rIns="25400" bIns="0" rtlCol="0" anchor="ctr"/>
+          <a:bodyPr wrap="square" lIns="0" tIns="25400" rIns="25400" bIns="0" rtlCol="0" anchor="t"/>
           <a:lstStyle/>
           <a:p>
             <a:pPr algn="l" indent="0" marL="0">
@@ -48168,7 +41521,7 @@
                 <a:ea typeface="Pretendard" pitchFamily="34" charset="-122"/>
                 <a:cs typeface="Pretendard" pitchFamily="34" charset="-120"/>
               </a:rPr>
-              <a:t>Object-oriented design interview questions, </a:t>
+              <a:t>- Object-oriented design interview questions, </a:t>
             </a:r>
             <a:pPr algn="l" indent="0" marL="0">
               <a:lnSpc>
@@ -48193,71 +41546,14 @@
       </p:sp>
       <p:sp>
         <p:nvSpPr>
-          <p:cNvPr id="22" name="Shape 16"/>
-          <p:cNvSpPr/>
-          <p:nvPr/>
-        </p:nvSpPr>
-        <p:spPr>
-          <a:xfrm>
-            <a:off x="1097280" y="3466308"/>
-            <a:ext cx="474025" cy="474025"/>
-          </a:xfrm>
-          <a:prstGeom prst="roundRect">
-            <a:avLst>
-              <a:gd name="adj" fmla="val 7716"/>
-            </a:avLst>
-          </a:prstGeom>
-          <a:solidFill>
-            <a:srgbClr val="F8F4EF"/>
-          </a:solidFill>
-          <a:ln w="12700">
-            <a:solidFill>
-              <a:srgbClr val="C6CCC9"/>
-            </a:solidFill>
-            <a:prstDash val="solid"/>
-          </a:ln>
-        </p:spPr>
-      </p:sp>
-      <p:pic>
-        <p:nvPicPr>
-          <p:cNvPr id="23" name="Image 4" descr="palette icon from tabler-icons (MIT)">    </p:cNvPr>
-          <p:cNvPicPr>
-            <a:picLocks noChangeAspect="1"/>
-          </p:cNvPicPr>
-          <p:nvPr/>
-        </p:nvPicPr>
-        <p:blipFill>
-          <a:blip r:embed="rId9">
-            <a:extLst>
-              <a:ext uri="{96DAC541-7B7A-43D3-8B79-37D633B846F1}">
-                <asvg:svgBlip xmlns:asvg="http://schemas.microsoft.com/office/drawing/2016/SVG/main" r:embed="rId10"/>
-              </a:ext>
-            </a:extLst>
-          </a:blip>
-          <a:stretch>
-            <a:fillRect/>
-          </a:stretch>
-        </p:blipFill>
-        <p:spPr>
-          <a:xfrm>
-            <a:off x="1170432" y="3539460"/>
-            <a:ext cx="327721" cy="327721"/>
-          </a:xfrm>
-          <a:prstGeom prst="rect">
-            <a:avLst/>
-          </a:prstGeom>
-        </p:spPr>
-      </p:pic>
-      <p:sp>
-        <p:nvSpPr>
-          <p:cNvPr id="24" name="Text 17"/>
+          <p:cNvPr id="12" name="Text 10"/>
           <p:cNvSpPr txBox="1"/>
           <p:nvPr/>
         </p:nvSpPr>
         <p:spPr>
           <a:xfrm>
-            <a:off x="1699321" y="3489960"/>
-            <a:ext cx="9255191" cy="426720"/>
+            <a:off x="6473952" y="3368040"/>
+            <a:ext cx="4791456" cy="762000"/>
           </a:xfrm>
           <a:prstGeom prst="rect">
             <a:avLst/>
@@ -48269,7 +41565,7 @@
           <a:bodyPr wrap="square" lIns="0" tIns="25400" rIns="25400" bIns="0" rtlCol="0" anchor="ctr"/>
           <a:lstStyle/>
           <a:p>
-            <a:pPr algn="ctr" indent="0" marL="0">
+            <a:pPr algn="l" indent="0" marL="0">
               <a:lnSpc>
                 <a:spcPct val="120000"/>
               </a:lnSpc>
@@ -48284,106 +41580,7 @@
                 <a:ea typeface="Pretendard" pitchFamily="34" charset="-122"/>
                 <a:cs typeface="Pretendard" pitchFamily="34" charset="-120"/>
               </a:rPr>
-              <a:t>Additional system design interview questions</a:t>
-            </a:r>
-            <a:endParaRPr lang="en-US" sz="2200" dirty="0"/>
-          </a:p>
-        </p:txBody>
-      </p:sp>
-      <p:sp>
-        <p:nvSpPr>
-          <p:cNvPr id="25" name="Shape 18"/>
-          <p:cNvSpPr/>
-          <p:nvPr/>
-        </p:nvSpPr>
-        <p:spPr>
-          <a:xfrm>
-            <a:off x="1097280" y="4783044"/>
-            <a:ext cx="474025" cy="474025"/>
-          </a:xfrm>
-          <a:prstGeom prst="roundRect">
-            <a:avLst>
-              <a:gd name="adj" fmla="val 7716"/>
-            </a:avLst>
-          </a:prstGeom>
-          <a:solidFill>
-            <a:srgbClr val="F8F4EF"/>
-          </a:solidFill>
-          <a:ln w="12700">
-            <a:solidFill>
-              <a:srgbClr val="C6CCC9"/>
-            </a:solidFill>
-            <a:prstDash val="solid"/>
-          </a:ln>
-        </p:spPr>
-      </p:sp>
-      <p:pic>
-        <p:nvPicPr>
-          <p:cNvPr id="26" name="Image 5" descr="palette icon from tabler-icons (MIT)">    </p:cNvPr>
-          <p:cNvPicPr>
-            <a:picLocks noChangeAspect="1"/>
-          </p:cNvPicPr>
-          <p:nvPr/>
-        </p:nvPicPr>
-        <p:blipFill>
-          <a:blip r:embed="rId11">
-            <a:extLst>
-              <a:ext uri="{96DAC541-7B7A-43D3-8B79-37D633B846F1}">
-                <asvg:svgBlip xmlns:asvg="http://schemas.microsoft.com/office/drawing/2016/SVG/main" r:embed="rId12"/>
-              </a:ext>
-            </a:extLst>
-          </a:blip>
-          <a:stretch>
-            <a:fillRect/>
-          </a:stretch>
-        </p:blipFill>
-        <p:spPr>
-          <a:xfrm>
-            <a:off x="1170432" y="4856196"/>
-            <a:ext cx="327721" cy="327721"/>
-          </a:xfrm>
-          <a:prstGeom prst="rect">
-            <a:avLst/>
-          </a:prstGeom>
-        </p:spPr>
-      </p:pic>
-      <p:sp>
-        <p:nvSpPr>
-          <p:cNvPr id="27" name="Text 19"/>
-          <p:cNvSpPr txBox="1"/>
-          <p:nvPr/>
-        </p:nvSpPr>
-        <p:spPr>
-          <a:xfrm>
-            <a:off x="1699321" y="4806696"/>
-            <a:ext cx="9255191" cy="426720"/>
-          </a:xfrm>
-          <a:prstGeom prst="rect">
-            <a:avLst/>
-          </a:prstGeom>
-          <a:noFill/>
-          <a:ln/>
-        </p:spPr>
-        <p:txBody>
-          <a:bodyPr wrap="square" lIns="0" tIns="25400" rIns="25400" bIns="0" rtlCol="0" anchor="ctr"/>
-          <a:lstStyle/>
-          <a:p>
-            <a:pPr algn="ctr" indent="0" marL="0">
-              <a:lnSpc>
-                <a:spcPct val="120000"/>
-              </a:lnSpc>
-              <a:buNone/>
-            </a:pPr>
-            <a:r>
-              <a:rPr lang="en-US" sz="2200" dirty="0">
-                <a:solidFill>
-                  <a:srgbClr val="18181B"/>
-                </a:solidFill>
-                <a:latin typeface="Pretendard" pitchFamily="34" charset="0"/>
-                <a:ea typeface="Pretendard" pitchFamily="34" charset="-122"/>
-                <a:cs typeface="Pretendard" pitchFamily="34" charset="-120"/>
-              </a:rPr>
-              <a:t>System design exercises deck</a:t>
+              <a:t>- Additional system design interview questions</a:t>
             </a:r>
             <a:endParaRPr lang="en-US" sz="2200" dirty="0"/>
           </a:p>

--- a/artifacts/external-markdown-visual-eval/iteration-02/build/deck.pptx
+++ b/artifacts/external-markdown-visual-eval/iteration-02/build/deck.pptx
@@ -30409,7 +30409,7 @@
                 <a:ea typeface="Pretendard" pitchFamily="34" charset="-122"/>
                 <a:cs typeface="Pretendard" pitchFamily="34" charset="-120"/>
               </a:rPr>
-              <a:t>  iteration 2 of 4.</a:t>
+              <a:t>  iteration 2 of 5.</a:t>
             </a:r>
             <a:endParaRPr lang="en-US" sz="2200" dirty="0"/>
           </a:p>
